--- a/docs/informe/exposicion-gs08-2026-10-13.pptx
+++ b/docs/informe/exposicion-gs08-2026-10-13.pptx
@@ -4261,7 +4261,7 @@
                   <a:srgbClr val="1F4E79"/>
                 </a:solidFill>
               </a:rPr>
-              <a:t>Curso GS08 · Docente: Dr. Jack Peralta</a:t>
+              <a:t>Curso GS08 · Docente: Dr. Jack Harry Peralta Cáceres</a:t>
             </a:r>
           </a:p>
           <a:p>
@@ -4328,7 +4328,7 @@
           <a:lstStyle/>
           <a:p>
             <a:r>
-              <a:t>Sprint 0 → Sprint 4: entregado, bloqueado y retrospectiva</a:t>
+              <a:t>Calidad: 39 criterios y lo que apareció probando</a:t>
             </a:r>
           </a:p>
         </p:txBody>
@@ -4351,28 +4351,28 @@
             <a:pPr/>
             <a:r>
               <a:rPr sz="1500"/>
-              <a:t>Sprint 0 cerrado con evidencia: alcance, modelo de datos verificado, infraestructura probada, plan de pruebas y documentación completa.</a:t>
+              <a:t>22 criterios verificados con corrida real · 4 incumplidos por los dos 500 · 2 en arreglo · 6 pendientes de interfaz · 5 bloqueados con motivo.</a:t>
             </a:r>
           </a:p>
           <a:p>
             <a:pPr/>
             <a:r>
               <a:rPr sz="1500"/>
-              <a:t>Sprint 1 en curso (28 endpoints, 22 criterios verdes) y Sprint 3 adelantado: notas y boleta funcionando.</a:t>
+              <a:t>9 bugs documentados con pasos, esperado, obtenido y evidencia — y 4 bugs encontrados en el propio script de pruebas.</a:t>
             </a:r>
           </a:p>
           <a:p>
             <a:pPr/>
             <a:r>
               <a:rPr sz="1500"/>
-              <a:t>Bloqueado y dicho de frente: cluster de Kubernetes (A-02), repositorio público y CI, y el SPA (T2.4).</a:t>
+              <a:t>Hallazgos que valieron la pena: un verificador que fallaba en entorno limpio, criterios con datos inexistentes y un /metrics que devolvía el SPA.</a:t>
             </a:r>
           </a:p>
           <a:p>
             <a:pPr/>
             <a:r>
-              <a:rPr sz="1500"/>
-              <a:t>Retrospectiva: probar temprano pagó; cada hallazgo terminó en una decisión o en una tarea con dueño.</a:t>
+              <a:rPr sz="1500" b="1"/>
+              <a:t>Regla de la casa: un bug no se cierra por decisión, se cierra con la corrida verde pegada.</a:t>
             </a:r>
           </a:p>
         </p:txBody>
@@ -4411,7 +4411,7 @@
           <a:lstStyle/>
           <a:p>
             <a:r>
-              <a:t>Migración del frontend: Vue 3 → React 19</a:t>
+              <a:t>Sprint 0 → Sprint 4: entregado, bloqueado y retrospectiva</a:t>
             </a:r>
           </a:p>
         </p:txBody>
@@ -4431,27 +4431,31 @@
           <a:bodyPr/>
           <a:lstStyle/>
           <a:p>
+            <a:pPr/>
             <a:r>
               <a:rPr sz="1500"/>
-              <a:t>Por qué: la rúbrica del trabajo colaborativo de Implementación de Soluciones para Plataformas Web pide React con Tailwind. Se migra el frontend para cumplirla.</a:t>
-            </a:r>
-          </a:p>
-          <a:p>
+              <a:t>Sprint 0 cerrado con evidencia: alcance, modelo de datos verificado, infraestructura probada, plan de pruebas y documentación completa.</a:t>
+            </a:r>
+          </a:p>
+          <a:p>
+            <a:pPr/>
             <a:r>
               <a:rPr sz="1500"/>
-              <a:t>Qué cambia: solo la capa de presentación. La SPA está desacoplada del API —todo pasa por /api/v1—, así que no se toca el backend, ni la base de datos, ni la infraestructura.</a:t>
-            </a:r>
-          </a:p>
-          <a:p>
+              <a:t>Sprint 1 en curso (28 endpoints, 22 criterios verdes) y Sprint 3 adelantado: notas y boleta funcionando.</a:t>
+            </a:r>
+          </a:p>
+          <a:p>
+            <a:pPr/>
             <a:r>
               <a:rPr sz="1500"/>
-              <a:t>Qué se gana: de 4 vistas al consumo de las 30 operaciones del contrato, con cursos, usuarios, notas y boleta, más búsqueda, filtros, paginación y pruebas.</a:t>
-            </a:r>
-          </a:p>
-          <a:p>
+              <a:t>Bloqueado y dicho de frente: cluster de Kubernetes (A-02), repositorio público y CI, y el SPA (T2.4).</a:t>
+            </a:r>
+          </a:p>
+          <a:p>
+            <a:pPr/>
             <a:r>
               <a:rPr sz="1500"/>
-              <a:t>Despliegue: mismo build estático servido por nginx, misma imagen y el mismo Coolify. El cambio no altera el entorno publicado: se vuelve a construir y listo.</a:t>
+              <a:t>Retrospectiva: probar temprano pagó; cada hallazgo terminó en una decisión o en una tarea con dueño.</a:t>
             </a:r>
           </a:p>
         </p:txBody>
@@ -4893,7 +4897,7 @@
           <a:lstStyle/>
           <a:p>
             <a:r>
-              <a:t>Contenedores y CI</a:t>
+              <a:t>Migración del frontend: Vue 3 → React 19</a:t>
             </a:r>
           </a:p>
         </p:txBody>
@@ -4913,31 +4917,27 @@
           <a:bodyPr/>
           <a:lstStyle/>
           <a:p>
-            <a:pPr/>
             <a:r>
               <a:rPr sz="1500"/>
-              <a:t>6 contenedores con un solo comando: web (nginx 8080), dos instancias del API, PostgreSQL, Prometheus y Grafana.</a:t>
-            </a:r>
-          </a:p>
-          <a:p>
-            <a:pPr/>
+              <a:t>Por qué: la rúbrica del trabajo colaborativo de Implementación de Soluciones para Plataformas Web pide React con Tailwind. Se migra el frontend para cumplirla.</a:t>
+            </a:r>
+          </a:p>
+          <a:p>
             <a:r>
               <a:rPr sz="1500"/>
-              <a:t>Balanceo real 1 a 1 entre las dos instancias; con una apagada, 6 peticiones siguen dando 200 con reintento (failover).</a:t>
-            </a:r>
-          </a:p>
-          <a:p>
-            <a:pPr/>
+              <a:t>Qué cambia: solo la capa de presentación. La SPA está desacoplada del API —todo pasa por /api/v1—, así que no se toca el backend, ni la base de datos, ni la infraestructura.</a:t>
+            </a:r>
+          </a:p>
+          <a:p>
             <a:r>
               <a:rPr sz="1500"/>
-              <a:t>CI en cada pull request: infra + backend (ruff y pytest, cobertura mínima 60 %) + frontend + imágenes con smoke y escaneo.</a:t>
-            </a:r>
-          </a:p>
-          <a:p>
-            <a:pPr/>
+              <a:t>Qué se gana: de 4 vistas al consumo de las 30 operaciones del contrato, con cursos, usuarios, notas y boleta, más búsqueda, filtros, paginación y pruebas.</a:t>
+            </a:r>
+          </a:p>
+          <a:p>
             <a:r>
               <a:rPr sz="1500"/>
-              <a:t>CD: publica en GHCR con SBOM y provenance; el despliegue a Kubernetes queda guardado tras DEPLOY_ENABLED=true.</a:t>
+              <a:t>Despliegue: mismo build estático servido por nginx, misma imagen y el mismo Coolify. El cambio no altera el entorno publicado: se vuelve a construir y listo.</a:t>
             </a:r>
           </a:p>
         </p:txBody>
@@ -4976,7 +4976,7 @@
           <a:lstStyle/>
           <a:p>
             <a:r>
-              <a:t>Kubernetes local y observabilidad</a:t>
+              <a:t>Contenedores y CI</a:t>
             </a:r>
           </a:p>
         </p:txBody>
@@ -4999,28 +4999,28 @@
             <a:pPr/>
             <a:r>
               <a:rPr sz="1500"/>
-              <a:t>11 objetos definidos y validados offline con kustomize: Namespace, ConfigMap, PVC, Job de migraciones, Deployments, Services e Ingress.</a:t>
+              <a:t>6 contenedores con un solo comando: web (nginx 8080), dos instancias del API, PostgreSQL, Prometheus y Grafana.</a:t>
             </a:r>
           </a:p>
           <a:p>
             <a:pPr/>
             <a:r>
               <a:rPr sz="1500"/>
-              <a:t>En el cluster el esquema lo aplica Alembic con el Job de migraciones, no los scripts de inicialización.</a:t>
+              <a:t>Balanceo real 1 a 1 entre las dos instancias; con una apagada, 6 peticiones siguen dando 200 con reintento (failover).</a:t>
             </a:r>
           </a:p>
           <a:p>
             <a:pPr/>
             <a:r>
               <a:rPr sz="1500"/>
-              <a:t>Observabilidad corriendo: 3 targets up y un dashboard API RED con 9 paneles con datos, provisionado desde el repositorio.</a:t>
+              <a:t>CI en cada pull request: infra + backend (ruff y pytest, cobertura mínima 60 %) + frontend + imágenes con smoke y escaneo.</a:t>
             </a:r>
           </a:p>
           <a:p>
             <a:pPr/>
             <a:r>
-              <a:rPr sz="1500" b="1"/>
-              <a:t>ESTADO REAL: el cluster NO está desplegado en esta máquina — minikube no está instalado y espera aprobación (A-02).</a:t>
+              <a:rPr sz="1500"/>
+              <a:t>CD: publica en GHCR con SBOM y provenance; el despliegue a Kubernetes queda guardado tras DEPLOY_ENABLED=true.</a:t>
             </a:r>
           </a:p>
         </p:txBody>
@@ -5059,7 +5059,7 @@
           <a:lstStyle/>
           <a:p>
             <a:r>
-              <a:t>Calidad: 39 criterios y lo que apareció probando</a:t>
+              <a:t>Kubernetes local y observabilidad</a:t>
             </a:r>
           </a:p>
         </p:txBody>
@@ -5082,28 +5082,28 @@
             <a:pPr/>
             <a:r>
               <a:rPr sz="1500"/>
-              <a:t>22 criterios verificados con corrida real · 4 incumplidos por los dos 500 · 2 en arreglo · 6 pendientes de interfaz · 5 bloqueados con motivo.</a:t>
+              <a:t>11 objetos definidos y validados offline con kustomize: Namespace, ConfigMap, PVC, Job de migraciones, Deployments, Services e Ingress.</a:t>
             </a:r>
           </a:p>
           <a:p>
             <a:pPr/>
             <a:r>
               <a:rPr sz="1500"/>
-              <a:t>9 bugs documentados con pasos, esperado, obtenido y evidencia — y 4 bugs encontrados en el propio script de pruebas.</a:t>
+              <a:t>En el cluster el esquema lo aplica Alembic con el Job de migraciones, no los scripts de inicialización.</a:t>
             </a:r>
           </a:p>
           <a:p>
             <a:pPr/>
             <a:r>
               <a:rPr sz="1500"/>
-              <a:t>Hallazgos que valieron la pena: un verificador que fallaba en entorno limpio, criterios con datos inexistentes y un /metrics que devolvía el SPA.</a:t>
+              <a:t>Observabilidad corriendo: 3 targets up y un dashboard API RED con 9 paneles con datos, provisionado desde el repositorio.</a:t>
             </a:r>
           </a:p>
           <a:p>
             <a:pPr/>
             <a:r>
               <a:rPr sz="1500" b="1"/>
-              <a:t>Regla de la casa: un bug no se cierra por decisión, se cierra con la corrida verde pegada.</a:t>
+              <a:t>ESTADO REAL: el cluster NO está desplegado en esta máquina — minikube no está instalado y espera aprobación (A-02).</a:t>
             </a:r>
           </a:p>
         </p:txBody>

--- a/docs/informe/exposicion-gs08-2026-10-13.pptx
+++ b/docs/informe/exposicion-gs08-2026-10-13.pptx
@@ -13,8 +13,10 @@
     <p:sldId id="261" r:id="rId13"/>
     <p:sldId id="266" r:id="rId18"/>
     <p:sldId id="262" r:id="rId14"/>
+    <p:sldId id="267" r:id="rId19"/>
     <p:sldId id="263" r:id="rId15"/>
     <p:sldId id="264" r:id="rId16"/>
+    <p:sldId id="268" r:id="rId20"/>
     <p:sldId id="265" r:id="rId17"/>
   </p:sldIdLst>
   <p:sldSz cx="12191695" cy="6858000" type="screen4x3"/>
@@ -4351,21 +4353,21 @@
             <a:pPr/>
             <a:r>
               <a:rPr sz="1500"/>
-              <a:t>22 criterios verificados con corrida real · 4 incumplidos por los dos 500 · 2 en arreglo · 6 pendientes de interfaz · 5 bloqueados con motivo.</a:t>
+              <a:t>Los 39 criterios del alcance quedan cubiertos con corrida real: recorrido E2E de 39 OK y las pruebas automatizadas (121 del backend con 90 % de cobertura y 25 del SPA).</a:t>
             </a:r>
           </a:p>
           <a:p>
             <a:pPr/>
             <a:r>
               <a:rPr sz="1500"/>
-              <a:t>9 bugs documentados con pasos, esperado, obtenido y evidencia — y 4 bugs encontrados en el propio script de pruebas.</a:t>
+              <a:t>9 bugs del sistema y 4 del propio script de pruebas, todos cerrados con evidencia: un bug no se cierra por decisión, se cierra con la corrida verde pegada.</a:t>
             </a:r>
           </a:p>
           <a:p>
             <a:pPr/>
             <a:r>
               <a:rPr sz="1500"/>
-              <a:t>Hallazgos que valieron la pena: un verificador que fallaba en entorno limpio, criterios con datos inexistentes y un /metrics que devolvía el SPA.</a:t>
+              <a:t>Verificar en el navegador encontró 3 cosas que las pruebas simuladas no ven (D-31): un fallo transitorio de Mongo o Redis apagaba la bitácora para siempre, la pantalla de Auditoría decía «apagada» cuando la consulta había fallado, y una sesión vencida dejaba un estado falso.</a:t>
             </a:r>
           </a:p>
           <a:p>
@@ -4434,28 +4436,262 @@
             <a:pPr/>
             <a:r>
               <a:rPr sz="1500"/>
-              <a:t>Sprint 0 cerrado con evidencia: alcance, modelo de datos verificado, infraestructura probada, plan de pruebas y documentación completa.</a:t>
+              <a:t>Sprint 0 a Sprint 4: los cinco cerrados con evidencia (alcance, modelo verificado, API, SPA, capa de rúbrica, producción y documentación).</a:t>
             </a:r>
           </a:p>
           <a:p>
             <a:pPr/>
             <a:r>
               <a:rPr sz="1500"/>
-              <a:t>Sprint 1 en curso (28 endpoints, 22 criterios verdes) y Sprint 3 adelantado: notas y boleta funcionando.</a:t>
+              <a:t>Sprint 1 y 2: API núcleo con contrato probado y el SPA con siete pantallas en React 19; los dos 500 de los POST cerrados.</a:t>
             </a:r>
           </a:p>
           <a:p>
             <a:pPr/>
             <a:r>
               <a:rPr sz="1500"/>
-              <a:t>Bloqueado y dicho de frente: cluster de Kubernetes (A-02), repositorio público y CI, y el SPA (T2.4).</a:t>
+              <a:t>Sprint 3 y 4: notas y boleta con una sola fórmula de promedio, capa de rúbrica completa (MongoDB, Redis, GraphQL, OAuth2 con scopes, logging y accesibilidad) y publicación en producción.</a:t>
             </a:r>
           </a:p>
           <a:p>
             <a:pPr/>
             <a:r>
               <a:rPr sz="1500"/>
-              <a:t>Retrospectiva: probar temprano pagó; cada hallazgo terminó en una decisión o en una tarea con dueño.</a:t>
+              <a:t>Único bloqueo declarado: Kubernetes real sin desplegar (A-02); Express.js queda como decisión abierta (A-04) con plan B de un día.</a:t>
+            </a:r>
+          </a:p>
+        </p:txBody>
+      </p:sp>
+    </p:spTree>
+  </p:cSld>
+  <p:clrMapOvr>
+    <a:masterClrMapping/>
+  </p:clrMapOvr>
+</p:sld>
+</file>
+
+<file path=ppt/slides/slide12.xml><?xml version="1.0" encoding="utf-8"?>
+<p:sld xmlns:a="http://schemas.openxmlformats.org/drawingml/2006/main" xmlns:p="http://schemas.openxmlformats.org/presentationml/2006/main" xmlns:r="http://schemas.openxmlformats.org/officeDocument/2006/relationships">
+  <p:cSld>
+    <p:spTree>
+      <p:nvGrpSpPr>
+        <p:cNvPr id="1" name=""/>
+        <p:cNvGrpSpPr/>
+        <p:nvPr/>
+      </p:nvGrpSpPr>
+      <p:grpSpPr/>
+      <p:sp>
+        <p:nvSpPr>
+          <p:cNvPr id="2" name="Title 1"/>
+          <p:cNvSpPr>
+            <a:spLocks noGrp="1"/>
+          </p:cNvSpPr>
+          <p:nvPr>
+            <p:ph type="title"/>
+          </p:nvPr>
+        </p:nvSpPr>
+        <p:spPr/>
+        <p:txBody>
+          <a:bodyPr/>
+          <a:lstStyle/>
+          <a:p/>
+        </p:txBody>
+      </p:sp>
+      <p:sp>
+        <p:nvSpPr>
+          <p:cNvPr id="3" name="Content Placeholder 2"/>
+          <p:cNvSpPr>
+            <a:spLocks noGrp="1"/>
+          </p:cNvSpPr>
+          <p:nvPr>
+            <p:ph idx="1"/>
+          </p:nvPr>
+        </p:nvSpPr>
+        <p:spPr/>
+        <p:txBody>
+          <a:bodyPr/>
+          <a:lstStyle/>
+          <a:p/>
+        </p:txBody>
+      </p:sp>
+      <p:sp>
+        <p:nvSpPr>
+          <p:cNvPr id="2" name="Title 1"/>
+          <p:cNvSpPr>
+            <a:spLocks noGrp="1"/>
+          </p:cNvSpPr>
+          <p:nvPr>
+            <p:ph type="title"/>
+          </p:nvPr>
+        </p:nvSpPr>
+        <p:spPr/>
+        <p:txBody>
+          <a:bodyPr/>
+          <a:lstStyle/>
+          <a:p>
+            <a:r>
+              <a:t>Capa de rúbrica del API: segunda base, caché, GraphQL y logging</a:t>
+            </a:r>
+          </a:p>
+        </p:txBody>
+      </p:sp>
+      <p:sp>
+        <p:nvSpPr>
+          <p:cNvPr id="3" name="Content Placeholder 2"/>
+          <p:cNvSpPr>
+            <a:spLocks noGrp="1"/>
+          </p:cNvSpPr>
+          <p:nvPr>
+            <p:ph idx="1"/>
+          </p:nvPr>
+        </p:nvSpPr>
+        <p:spPr/>
+        <p:txBody>
+          <a:bodyPr/>
+          <a:lstStyle/>
+          <a:p>
+            <a:pPr/>
+            <a:r>
+              <a:rPr sz="1500"/>
+              <a:t>Segunda base documental (MongoDB 8.0): la bitácora guarda usuario, acción, entidad, resultado y duración de cada escritura, con contraseñas y tokens enmascarados («***»).</a:t>
+            </a:r>
+          </a:p>
+          <a:p>
+            <a:pPr/>
+            <a:r>
+              <a:rPr sz="1500"/>
+              <a:t>Caché distribuida (Redis 8): el panel se arma una vez y se guarda 60 s; medido con 20 000 estudiantes y 20 000 matrículas: 54,2 ms → 13,5 ms (4,0×), y cualquier escritura la invalida sola.</a:t>
+            </a:r>
+          </a:p>
+          <a:p>
+            <a:pPr/>
+            <a:r>
+              <a:rPr sz="1500"/>
+              <a:t>GraphQL en /graphql (Strawberry) con la consulta de boleta, que comparte una sola fórmula de promedio ponderado con el REST.</a:t>
+            </a:r>
+          </a:p>
+          <a:p>
+            <a:pPr/>
+            <a:r>
+              <a:rPr sz="1500"/>
+              <a:t>Logging centralizado: JSON con identificador de petición, usuario, ruta, estado y duración; Grafana lee la serie {servicio="gs08-api"} desde Loki.</a:t>
+            </a:r>
+          </a:p>
+        </p:txBody>
+      </p:sp>
+    </p:spTree>
+  </p:cSld>
+  <p:clrMapOvr>
+    <a:masterClrMapping/>
+  </p:clrMapOvr>
+</p:sld>
+</file>
+
+<file path=ppt/slides/slide13.xml><?xml version="1.0" encoding="utf-8"?>
+<p:sld xmlns:a="http://schemas.openxmlformats.org/drawingml/2006/main" xmlns:p="http://schemas.openxmlformats.org/presentationml/2006/main" xmlns:r="http://schemas.openxmlformats.org/officeDocument/2006/relationships">
+  <p:cSld>
+    <p:spTree>
+      <p:nvGrpSpPr>
+        <p:cNvPr id="1" name=""/>
+        <p:cNvGrpSpPr/>
+        <p:nvPr/>
+      </p:nvGrpSpPr>
+      <p:grpSpPr/>
+      <p:sp>
+        <p:nvSpPr>
+          <p:cNvPr id="2" name="Title 1"/>
+          <p:cNvSpPr>
+            <a:spLocks noGrp="1"/>
+          </p:cNvSpPr>
+          <p:nvPr>
+            <p:ph type="title"/>
+          </p:nvPr>
+        </p:nvSpPr>
+        <p:spPr/>
+        <p:txBody>
+          <a:bodyPr/>
+          <a:lstStyle/>
+          <a:p/>
+        </p:txBody>
+      </p:sp>
+      <p:sp>
+        <p:nvSpPr>
+          <p:cNvPr id="3" name="Content Placeholder 2"/>
+          <p:cNvSpPr>
+            <a:spLocks noGrp="1"/>
+          </p:cNvSpPr>
+          <p:nvPr>
+            <p:ph idx="1"/>
+          </p:nvPr>
+        </p:nvSpPr>
+        <p:spPr/>
+        <p:txBody>
+          <a:bodyPr/>
+          <a:lstStyle/>
+          <a:p/>
+        </p:txBody>
+      </p:sp>
+      <p:sp>
+        <p:nvSpPr>
+          <p:cNvPr id="2" name="Title 1"/>
+          <p:cNvSpPr>
+            <a:spLocks noGrp="1"/>
+          </p:cNvSpPr>
+          <p:nvPr>
+            <p:ph type="title"/>
+          </p:nvPr>
+        </p:nvSpPr>
+        <p:spPr/>
+        <p:txBody>
+          <a:bodyPr/>
+          <a:lstStyle/>
+          <a:p>
+            <a:r>
+              <a:t>Seguridad, accesibilidad y producción</a:t>
+            </a:r>
+          </a:p>
+        </p:txBody>
+      </p:sp>
+      <p:sp>
+        <p:nvSpPr>
+          <p:cNvPr id="3" name="Content Placeholder 2"/>
+          <p:cNvSpPr>
+            <a:spLocks noGrp="1"/>
+          </p:cNvSpPr>
+          <p:nvPr>
+            <p:ph idx="1"/>
+          </p:nvPr>
+        </p:nvSpPr>
+        <p:spPr/>
+        <p:txBody>
+          <a:bodyPr/>
+          <a:lstStyle/>
+          <a:p>
+            <a:pPr/>
+            <a:r>
+              <a:rPr sz="1500"/>
+              <a:t>OAuth2 con scopes: POST /api/v1/auth/token (password grant, RFC 6749 §4.3) con 16 scopes repartidos por rol; si al token le falta el permiso responde 403 insufficient_scope con WWW-Authenticate.</a:t>
+            </a:r>
+          </a:p>
+          <a:p>
+            <a:pPr/>
+            <a:r>
+              <a:rPr sz="1500"/>
+              <a:t>Accesibilidad WCAG 2.1 AA medida: foco atrapado en los diálogos, «Saltar al contenido», aria-current en el menú, caption y scope en las tablas; 14/14 pares de contraste cumplen AA y el anillo de foco 5.93:1.</a:t>
+            </a:r>
+          </a:p>
+          <a:p>
+            <a:pPr/>
+            <a:r>
+              <a:rPr sz="1500"/>
+              <a:t>25 pruebas del SPA con axe-core y 121 del backend con 90 % de cobertura; los cinco jobs del CI en verde en cada push.</a:t>
+            </a:r>
+          </a:p>
+          <a:p>
+            <a:pPr/>
+            <a:r>
+              <a:rPr sz="1500" b="1"/>
+              <a:t>En producción (https://gs08-matriculas.mlarca.com): deploy verificado el 14/10 — SPA React sirviendo, login con 16 scopes, bitácora activa y 20/20 llamadas al health sin fallos.</a:t>
             </a:r>
           </a:p>
         </p:txBody>
@@ -4761,13 +4997,13 @@
           <a:p>
             <a:r>
               <a:rPr sz="1500"/>
-              <a:t>30 operaciones en 16 rutas, publicadas en su propio OpenAPI (versión 0.1.0): salud, autenticación, panel, estudiantes, cursos, matrículas, usuarios, notas y boleta.</a:t>
+              <a:t>20 rutas y 35 operaciones en su propio OpenAPI (v0.3.0), más GraphQL en /graphql: salud, autenticación, panel, estudiantes, cursos, matrículas, usuarios, notas, boleta, auditoría y boleta archivada.</a:t>
             </a:r>
           </a:p>
           <a:p>
             <a:r>
               <a:rPr sz="1500"/>
-              <a:t>Códigos como contrato: 200/201/204 lo correcto · 401 sin sesión · 403 por rol · 404 · 409 duplicado · 422 dato inválido.</a:t>
+              <a:t>Códigos como contrato: 200/201/204 lo correcto · 400 invalid_grant o invalid_scope · 401 sin sesión · 403 por rol o por scope · 404 · 409 duplicado · 422 dato inválido.</a:t>
             </a:r>
           </a:p>
           <a:p>
@@ -4779,7 +5015,7 @@
           <a:p>
             <a:r>
               <a:rPr sz="1500"/>
-              <a:t>Las 30 operaciones están consumidas desde el SPA y verificadas contra la API real.</a:t>
+              <a:t>Todas las operaciones se consumen desde el SPA y se verificaron contra la API real; los dos 500 de los POST de matrículas y usuarios quedaron cerrados.</a:t>
             </a:r>
           </a:p>
         </p:txBody>
@@ -4840,7 +5076,7 @@
           <a:p>
             <a:r>
               <a:rPr sz="1500"/>
-              <a:t>Entrar → panel con los 4 indicadores → buscar «huaman» y encontrar «Huamán» → registrar estudiante → matricular → 3 notas → ver la boleta → cursos y usuarios.</a:t>
+              <a:t>Entrar → panel con los 4 indicadores → buscar «huaman» y encontrar «Huamán» → registrar estudiante → matricular → 3 notas → ver la boleta → cursos, usuarios y la pantalla de Auditoría (bitácora y boleta archivada).</a:t>
             </a:r>
           </a:p>
           <a:p>
@@ -4999,7 +5235,7 @@
             <a:pPr/>
             <a:r>
               <a:rPr sz="1500"/>
-              <a:t>6 contenedores con un solo comando: web (nginx 8080), dos instancias del API, PostgreSQL, Prometheus y Grafana.</a:t>
+              <a:t>8 servicios con un solo comando: web (nginx: 80 en producción, 8080 en local), dos instancias del API, PostgreSQL, MongoDB, Redis, Prometheus y Grafana.</a:t>
             </a:r>
           </a:p>
           <a:p>
@@ -5013,14 +5249,14 @@
             <a:pPr/>
             <a:r>
               <a:rPr sz="1500"/>
-              <a:t>CI en cada pull request: infra + backend (ruff y pytest, cobertura mínima 60 %) + frontend + imágenes con smoke y escaneo.</a:t>
+              <a:t>CI en cada push a main: infraestructura + backend (ruff y 121 pruebas, 90 % de cobertura) + frontend (25 pruebas, eslint y build) + imágenes con humo; los cinco jobs están en verde.</a:t>
             </a:r>
           </a:p>
           <a:p>
             <a:pPr/>
             <a:r>
               <a:rPr sz="1500"/>
-              <a:t>CD: publica en GHCR con SBOM y provenance; el despliegue a Kubernetes queda guardado tras DEPLOY_ENABLED=true.</a:t>
+              <a:t>CD real: Coolify reconstruye y despliega desde main; el deploy del 14/10 tardó 57 s y quedó verificado (health 200, login con 16 scopes y bitácora activa).</a:t>
             </a:r>
           </a:p>
         </p:txBody>

--- a/docs/informe/exposicion-gs08-2026-10-13.pptx
+++ b/docs/informe/exposicion-gs08-2026-10-13.pptx
@@ -4330,7 +4330,7 @@
           <a:lstStyle/>
           <a:p>
             <a:r>
-              <a:t>Calidad: 39 criterios y lo que apareció probando</a:t>
+              <a:t>Kubernetes local y observabilidad</a:t>
             </a:r>
           </a:p>
         </p:txBody>
@@ -4353,28 +4353,28 @@
             <a:pPr/>
             <a:r>
               <a:rPr sz="1500"/>
-              <a:t>Los 39 criterios del alcance quedan cubiertos con corrida real: recorrido E2E de 39 OK y las pruebas automatizadas (121 del backend con 90 % de cobertura y 25 del SPA).</a:t>
+              <a:t>11 objetos definidos y validados offline con kustomize: Namespace, ConfigMap, PVC, Job de migraciones, Deployments, Services e Ingress.</a:t>
             </a:r>
           </a:p>
           <a:p>
             <a:pPr/>
             <a:r>
               <a:rPr sz="1500"/>
-              <a:t>9 bugs del sistema y 4 del propio script de pruebas, todos cerrados con evidencia: un bug no se cierra por decisión, se cierra con la corrida verde pegada.</a:t>
+              <a:t>En el cluster el esquema lo aplica Alembic con el Job de migraciones, no los scripts de inicialización.</a:t>
             </a:r>
           </a:p>
           <a:p>
             <a:pPr/>
             <a:r>
               <a:rPr sz="1500"/>
-              <a:t>Verificar en el navegador encontró 3 cosas que las pruebas simuladas no ven (D-31): un fallo transitorio de Mongo o Redis apagaba la bitácora para siempre, la pantalla de Auditoría decía «apagada» cuando la consulta había fallado, y una sesión vencida dejaba un estado falso.</a:t>
+              <a:t>Observabilidad corriendo: 3 targets up y un dashboard API RED con 9 paneles con datos, provisionado desde el repositorio.</a:t>
             </a:r>
           </a:p>
           <a:p>
             <a:pPr/>
             <a:r>
               <a:rPr sz="1500" b="1"/>
-              <a:t>Regla de la casa: un bug no se cierra por decisión, se cierra con la corrida verde pegada.</a:t>
+              <a:t>ESTADO REAL: el cluster NO está desplegado en esta máquina — minikube no está instalado y espera aprobación (A-02).</a:t>
             </a:r>
           </a:p>
         </p:txBody>
@@ -4413,7 +4413,7 @@
           <a:lstStyle/>
           <a:p>
             <a:r>
-              <a:t>Sprint 0 → Sprint 4: entregado, bloqueado y retrospectiva</a:t>
+              <a:t>Calidad: 39 criterios y lo que apareció probando</a:t>
             </a:r>
           </a:p>
         </p:txBody>
@@ -4436,28 +4436,28 @@
             <a:pPr/>
             <a:r>
               <a:rPr sz="1500"/>
-              <a:t>Sprint 0 a Sprint 4: los cinco cerrados con evidencia (alcance, modelo verificado, API, SPA, capa de rúbrica, producción y documentación).</a:t>
+              <a:t>Los 39 criterios del alcance quedan cubiertos con corrida real: recorrido E2E de 39 OK y las pruebas automatizadas (121 del backend con 90 % de cobertura y 25 del SPA).</a:t>
             </a:r>
           </a:p>
           <a:p>
             <a:pPr/>
             <a:r>
               <a:rPr sz="1500"/>
-              <a:t>Sprint 1 y 2: API núcleo con contrato probado y el SPA con siete pantallas en React 19; los dos 500 de los POST cerrados.</a:t>
+              <a:t>9 bugs del sistema y 4 del propio script de pruebas, todos cerrados con evidencia: un bug no se cierra por decisión, se cierra con la corrida verde pegada.</a:t>
             </a:r>
           </a:p>
           <a:p>
             <a:pPr/>
             <a:r>
               <a:rPr sz="1500"/>
-              <a:t>Sprint 3 y 4: notas y boleta con una sola fórmula de promedio, capa de rúbrica completa (MongoDB, Redis, GraphQL, OAuth2 con scopes, logging y accesibilidad) y publicación en producción.</a:t>
+              <a:t>Verificar en el navegador encontró 3 cosas que las pruebas simuladas no ven (D-31): un fallo transitorio de Mongo o Redis apagaba la bitácora para siempre, la pantalla de Auditoría decía «apagada» cuando la consulta había fallado, y una sesión vencida dejaba un estado falso.</a:t>
             </a:r>
           </a:p>
           <a:p>
             <a:pPr/>
             <a:r>
-              <a:rPr sz="1500"/>
-              <a:t>Único bloqueo declarado: Kubernetes real sin desplegar (A-02); Express.js queda como decisión abierta (A-04) con plan B de un día.</a:t>
+              <a:rPr sz="1500" b="1"/>
+              <a:t>Regla de la casa: un bug no se cierra por decisión, se cierra con la corrida verde pegada.</a:t>
             </a:r>
           </a:p>
         </p:txBody>
@@ -4530,7 +4530,7 @@
           <a:lstStyle/>
           <a:p>
             <a:r>
-              <a:t>Capa de rúbrica del API: segunda base, caché, GraphQL y logging</a:t>
+              <a:t>Seguridad, accesibilidad y producción</a:t>
             </a:r>
           </a:p>
         </p:txBody>
@@ -4553,28 +4553,28 @@
             <a:pPr/>
             <a:r>
               <a:rPr sz="1500"/>
-              <a:t>Segunda base documental (MongoDB 8.0): la bitácora guarda usuario, acción, entidad, resultado y duración de cada escritura, con contraseñas y tokens enmascarados («***»).</a:t>
+              <a:t>OAuth2 con scopes: POST /api/v1/auth/token (password grant, RFC 6749 §4.3) con 16 scopes repartidos por rol; si al token le falta el permiso responde 403 insufficient_scope con WWW-Authenticate.</a:t>
             </a:r>
           </a:p>
           <a:p>
             <a:pPr/>
             <a:r>
               <a:rPr sz="1500"/>
-              <a:t>Caché distribuida (Redis 8): el panel se arma una vez y se guarda 60 s; medido con 20 000 estudiantes y 20 000 matrículas: 54,2 ms → 13,5 ms (4,0×), y cualquier escritura la invalida sola.</a:t>
+              <a:t>Accesibilidad WCAG 2.1 AA medida: foco atrapado en los diálogos, «Saltar al contenido», aria-current en el menú, caption y scope en las tablas; 14/14 pares de contraste cumplen AA y el anillo de foco 5.93:1.</a:t>
             </a:r>
           </a:p>
           <a:p>
             <a:pPr/>
             <a:r>
               <a:rPr sz="1500"/>
-              <a:t>GraphQL en /graphql (Strawberry) con la consulta de boleta, que comparte una sola fórmula de promedio ponderado con el REST.</a:t>
+              <a:t>25 pruebas del SPA con axe-core y 121 del backend con 90 % de cobertura; los cinco jobs del CI en verde en cada push.</a:t>
             </a:r>
           </a:p>
           <a:p>
             <a:pPr/>
             <a:r>
-              <a:rPr sz="1500"/>
-              <a:t>Logging centralizado: JSON con identificador de petición, usuario, ruta, estado y duración; Grafana lee la serie {servicio="gs08-api"} desde Loki.</a:t>
+              <a:rPr sz="1500" b="1"/>
+              <a:t>En producción (https://gs08-matriculas.mlarca.com): deploy verificado el 14/10 — SPA React sirviendo, login con 16 scopes, bitácora activa y 20/20 llamadas al health sin fallos.</a:t>
             </a:r>
           </a:p>
         </p:txBody>
@@ -4611,7 +4611,11 @@
         <p:txBody>
           <a:bodyPr/>
           <a:lstStyle/>
-          <a:p/>
+          <a:p>
+            <a:r>
+              <a:t>Sprint 0 → Sprint 4: los cinco cerrados y la retrospectiva</a:t>
+            </a:r>
+          </a:p>
         </p:txBody>
       </p:sp>
       <p:sp>
@@ -4628,70 +4632,32 @@
         <p:txBody>
           <a:bodyPr/>
           <a:lstStyle/>
-          <a:p/>
-        </p:txBody>
-      </p:sp>
-      <p:sp>
-        <p:nvSpPr>
-          <p:cNvPr id="2" name="Title 1"/>
-          <p:cNvSpPr>
-            <a:spLocks noGrp="1"/>
-          </p:cNvSpPr>
-          <p:nvPr>
-            <p:ph type="title"/>
-          </p:nvPr>
-        </p:nvSpPr>
-        <p:spPr/>
-        <p:txBody>
-          <a:bodyPr/>
-          <a:lstStyle/>
-          <a:p>
-            <a:r>
-              <a:t>Seguridad, accesibilidad y producción</a:t>
-            </a:r>
-          </a:p>
-        </p:txBody>
-      </p:sp>
-      <p:sp>
-        <p:nvSpPr>
-          <p:cNvPr id="3" name="Content Placeholder 2"/>
-          <p:cNvSpPr>
-            <a:spLocks noGrp="1"/>
-          </p:cNvSpPr>
-          <p:nvPr>
-            <p:ph idx="1"/>
-          </p:nvPr>
-        </p:nvSpPr>
-        <p:spPr/>
-        <p:txBody>
-          <a:bodyPr/>
-          <a:lstStyle/>
           <a:p>
             <a:pPr/>
             <a:r>
               <a:rPr sz="1500"/>
-              <a:t>OAuth2 con scopes: POST /api/v1/auth/token (password grant, RFC 6749 §4.3) con 16 scopes repartidos por rol; si al token le falta el permiso responde 403 insufficient_scope con WWW-Authenticate.</a:t>
+              <a:t>Sprint 0 a Sprint 4: los cinco cerrados con evidencia (alcance, modelo verificado, API, SPA, capa de rúbrica, producción y documentación).</a:t>
             </a:r>
           </a:p>
           <a:p>
             <a:pPr/>
             <a:r>
               <a:rPr sz="1500"/>
-              <a:t>Accesibilidad WCAG 2.1 AA medida: foco atrapado en los diálogos, «Saltar al contenido», aria-current en el menú, caption y scope en las tablas; 14/14 pares de contraste cumplen AA y el anillo de foco 5.93:1.</a:t>
+              <a:t>Sprint 1 y 2: API núcleo con contrato probado y el SPA con siete pantallas en React 19; los dos 500 de los POST cerrados.</a:t>
             </a:r>
           </a:p>
           <a:p>
             <a:pPr/>
             <a:r>
               <a:rPr sz="1500"/>
-              <a:t>25 pruebas del SPA con axe-core y 121 del backend con 90 % de cobertura; los cinco jobs del CI en verde en cada push.</a:t>
+              <a:t>Sprint 3 y 4: notas y boleta con una sola fórmula de promedio, capa de rúbrica completa (MongoDB, Redis, GraphQL, OAuth2 con scopes, logging y accesibilidad) y publicación en producción.</a:t>
             </a:r>
           </a:p>
           <a:p>
             <a:pPr/>
             <a:r>
-              <a:rPr sz="1500" b="1"/>
-              <a:t>En producción (https://gs08-matriculas.mlarca.com): deploy verificado el 14/10 — SPA React sirviendo, login con 16 scopes, bitácora activa y 20/20 llamadas al health sin fallos.</a:t>
+              <a:rPr sz="1500"/>
+              <a:t>Único bloqueo declarado: Kubernetes real sin desplegar (A-02); Express.js queda como decisión abierta (A-04) con plan B de un día.</a:t>
             </a:r>
           </a:p>
         </p:txBody>
@@ -5256,7 +5222,7 @@
             <a:pPr/>
             <a:r>
               <a:rPr sz="1500"/>
-              <a:t>CD real: Coolify reconstruye y despliega desde main; el deploy del 14/10 tardó 57 s y quedó verificado (health 200, login con 16 scopes y bitácora activa).</a:t>
+              <a:t>CD en GitHub Actions: al terminar el CI en verde sobre main pide el despliegue a Coolify y verifica producción</a:t>
             </a:r>
           </a:p>
         </p:txBody>
@@ -5293,11 +5259,7 @@
         <p:txBody>
           <a:bodyPr/>
           <a:lstStyle/>
-          <a:p>
-            <a:r>
-              <a:t>Kubernetes local y observabilidad</a:t>
-            </a:r>
-          </a:p>
+          <a:p/>
         </p:txBody>
       </p:sp>
       <p:sp>
@@ -5314,32 +5276,70 @@
         <p:txBody>
           <a:bodyPr/>
           <a:lstStyle/>
+          <a:p/>
+        </p:txBody>
+      </p:sp>
+      <p:sp>
+        <p:nvSpPr>
+          <p:cNvPr id="2" name="Title 1"/>
+          <p:cNvSpPr>
+            <a:spLocks noGrp="1"/>
+          </p:cNvSpPr>
+          <p:nvPr>
+            <p:ph type="title"/>
+          </p:nvPr>
+        </p:nvSpPr>
+        <p:spPr/>
+        <p:txBody>
+          <a:bodyPr/>
+          <a:lstStyle/>
+          <a:p>
+            <a:r>
+              <a:t>Capa de rúbrica del API: segunda base, caché, GraphQL y logging</a:t>
+            </a:r>
+          </a:p>
+        </p:txBody>
+      </p:sp>
+      <p:sp>
+        <p:nvSpPr>
+          <p:cNvPr id="3" name="Content Placeholder 2"/>
+          <p:cNvSpPr>
+            <a:spLocks noGrp="1"/>
+          </p:cNvSpPr>
+          <p:nvPr>
+            <p:ph idx="1"/>
+          </p:nvPr>
+        </p:nvSpPr>
+        <p:spPr/>
+        <p:txBody>
+          <a:bodyPr/>
+          <a:lstStyle/>
           <a:p>
             <a:pPr/>
             <a:r>
               <a:rPr sz="1500"/>
-              <a:t>11 objetos definidos y validados offline con kustomize: Namespace, ConfigMap, PVC, Job de migraciones, Deployments, Services e Ingress.</a:t>
+              <a:t>Segunda base documental (MongoDB 8.0): la bitácora guarda usuario, acción, entidad, resultado y duración de cada escritura, con contraseñas y tokens enmascarados («***»).</a:t>
             </a:r>
           </a:p>
           <a:p>
             <a:pPr/>
             <a:r>
               <a:rPr sz="1500"/>
-              <a:t>En el cluster el esquema lo aplica Alembic con el Job de migraciones, no los scripts de inicialización.</a:t>
+              <a:t>Caché distribuida (Redis 8): el panel se arma una vez y se guarda 60 s; medido con 20 000 estudiantes y 20 000 matrículas: 54,2 ms → 13,5 ms (4,0×), y cualquier escritura la invalida sola.</a:t>
             </a:r>
           </a:p>
           <a:p>
             <a:pPr/>
             <a:r>
               <a:rPr sz="1500"/>
-              <a:t>Observabilidad corriendo: 3 targets up y un dashboard API RED con 9 paneles con datos, provisionado desde el repositorio.</a:t>
+              <a:t>GraphQL en /graphql (Strawberry) con la consulta de boleta, que comparte una sola fórmula de promedio ponderado con el REST.</a:t>
             </a:r>
           </a:p>
           <a:p>
             <a:pPr/>
             <a:r>
-              <a:rPr sz="1500" b="1"/>
-              <a:t>ESTADO REAL: el cluster NO está desplegado en esta máquina — minikube no está instalado y espera aprobación (A-02).</a:t>
+              <a:rPr sz="1500"/>
+              <a:t>Logging centralizado: JSON con identificador de petición, usuario, ruta, estado y duración; Grafana lee la serie {servicio="gs08-api"} desde Loki.</a:t>
             </a:r>
           </a:p>
         </p:txBody>

--- a/docs/informe/exposicion-gs08-2026-10-13.pptx
+++ b/docs/informe/exposicion-gs08-2026-10-13.pptx
@@ -4270,21 +4270,14 @@
             <a:pPr/>
             <a:r>
               <a:rPr sz="1600"/>
-              <a:t>Arteaga Rullier, Roberto — Scrum Master + DevOps</a:t>
+              <a:t>Arteaga Rullier, Roberto — Scrum Master, DevOps y Backend</a:t>
             </a:r>
           </a:p>
           <a:p>
             <a:pPr/>
             <a:r>
               <a:rPr sz="1600"/>
-              <a:t>Díaz Cárdenas, Jorge Luis — Backend</a:t>
-            </a:r>
-          </a:p>
-          <a:p>
-            <a:pPr/>
-            <a:r>
-              <a:rPr sz="1600"/>
-              <a:t>Inocencio Gargate, Dalcir — Frontend + Documentador</a:t>
+              <a:t>Inocencio Gargate, Dalcir — Frontend y Documentación</a:t>
             </a:r>
           </a:p>
           <a:p>

--- a/docs/informe/exposicion-gs08-2026-10-13.pptx
+++ b/docs/informe/exposicion-gs08-2026-10-13.pptx
@@ -6,18 +6,18 @@
   </p:sldMasterIdLst>
   <p:sldIdLst>
     <p:sldId id="256" r:id="rId7"/>
-    <p:sldId id="257" r:id="rId9"/>
-    <p:sldId id="258" r:id="rId10"/>
-    <p:sldId id="259" r:id="rId11"/>
-    <p:sldId id="260" r:id="rId12"/>
-    <p:sldId id="261" r:id="rId13"/>
-    <p:sldId id="266" r:id="rId18"/>
-    <p:sldId id="262" r:id="rId14"/>
-    <p:sldId id="267" r:id="rId19"/>
-    <p:sldId id="263" r:id="rId15"/>
-    <p:sldId id="264" r:id="rId16"/>
-    <p:sldId id="268" r:id="rId20"/>
-    <p:sldId id="265" r:id="rId17"/>
+    <p:sldId id="257" r:id="rId8"/>
+    <p:sldId id="258" r:id="rId9"/>
+    <p:sldId id="259" r:id="rId10"/>
+    <p:sldId id="260" r:id="rId11"/>
+    <p:sldId id="261" r:id="rId12"/>
+    <p:sldId id="262" r:id="rId13"/>
+    <p:sldId id="263" r:id="rId14"/>
+    <p:sldId id="264" r:id="rId15"/>
+    <p:sldId id="265" r:id="rId16"/>
+    <p:sldId id="266" r:id="rId17"/>
+    <p:sldId id="267" r:id="rId18"/>
+    <p:sldId id="268" r:id="rId19"/>
   </p:sldIdLst>
   <p:sldSz cx="12191695" cy="6858000" type="screen4x3"/>
   <p:notesSz cx="6858000" cy="9144000"/>
@@ -117,1126 +117,6 @@
     </a:lvl9pPr>
   </p:defaultTextStyle>
 </p:presentation>
-</file>
-
-<file path=ppt/notesMasters/notesMaster1.xml><?xml version="1.0" encoding="utf-8"?>
-<p:notesMaster xmlns:a="http://schemas.openxmlformats.org/drawingml/2006/main" xmlns:p="http://schemas.openxmlformats.org/presentationml/2006/main" xmlns:r="http://schemas.openxmlformats.org/officeDocument/2006/relationships">
-  <p:cSld>
-    <p:bg>
-      <p:bgRef idx="1001">
-        <a:schemeClr val="bg1"/>
-      </p:bgRef>
-    </p:bg>
-    <p:spTree>
-      <p:nvGrpSpPr>
-        <p:cNvPr id="1" name=""/>
-        <p:cNvGrpSpPr/>
-        <p:nvPr/>
-      </p:nvGrpSpPr>
-      <p:grpSpPr>
-        <a:xfrm>
-          <a:off x="0" y="0"/>
-          <a:ext cx="0" cy="0"/>
-          <a:chOff x="0" y="0"/>
-          <a:chExt cx="0" cy="0"/>
-        </a:xfrm>
-      </p:grpSpPr>
-      <p:sp>
-        <p:nvSpPr>
-          <p:cNvPr id="2" name="Header Placeholder 1"/>
-          <p:cNvSpPr>
-            <a:spLocks noGrp="1"/>
-          </p:cNvSpPr>
-          <p:nvPr>
-            <p:ph type="hdr" sz="quarter"/>
-          </p:nvPr>
-        </p:nvSpPr>
-        <p:spPr>
-          <a:xfrm>
-            <a:off x="0" y="0"/>
-            <a:ext cx="2971800" cy="457200"/>
-          </a:xfrm>
-          <a:prstGeom prst="rect">
-            <a:avLst/>
-          </a:prstGeom>
-        </p:spPr>
-        <p:txBody>
-          <a:bodyPr vert="horz" lIns="91440" tIns="45720" rIns="91440" bIns="45720" rtlCol="0"/>
-          <a:lstStyle>
-            <a:lvl1pPr algn="l">
-              <a:defRPr sz="1200"/>
-            </a:lvl1pPr>
-          </a:lstStyle>
-          <a:p>
-            <a:endParaRPr lang="en-US"/>
-          </a:p>
-        </p:txBody>
-      </p:sp>
-      <p:sp>
-        <p:nvSpPr>
-          <p:cNvPr id="3" name="Date Placeholder 2"/>
-          <p:cNvSpPr>
-            <a:spLocks noGrp="1"/>
-          </p:cNvSpPr>
-          <p:nvPr>
-            <p:ph type="dt" idx="1"/>
-          </p:nvPr>
-        </p:nvSpPr>
-        <p:spPr>
-          <a:xfrm>
-            <a:off x="3884613" y="0"/>
-            <a:ext cx="2971800" cy="457200"/>
-          </a:xfrm>
-          <a:prstGeom prst="rect">
-            <a:avLst/>
-          </a:prstGeom>
-        </p:spPr>
-        <p:txBody>
-          <a:bodyPr vert="horz" lIns="91440" tIns="45720" rIns="91440" bIns="45720" rtlCol="0"/>
-          <a:lstStyle>
-            <a:lvl1pPr algn="r">
-              <a:defRPr sz="1200"/>
-            </a:lvl1pPr>
-          </a:lstStyle>
-          <a:p>
-            <a:fld id="{0F89C1C7-3DCD-1040-A9CF-14679D8B5DDD}" type="datetimeFigureOut">
-              <a:rPr lang="en-US" smtClean="0"/>
-              <a:t>10/17/16</a:t>
-            </a:fld>
-            <a:endParaRPr lang="en-US"/>
-          </a:p>
-        </p:txBody>
-      </p:sp>
-      <p:sp>
-        <p:nvSpPr>
-          <p:cNvPr id="4" name="Slide Image Placeholder 3"/>
-          <p:cNvSpPr>
-            <a:spLocks noGrp="1" noRot="1" noChangeAspect="1"/>
-          </p:cNvSpPr>
-          <p:nvPr>
-            <p:ph type="sldImg" idx="2"/>
-          </p:nvPr>
-        </p:nvSpPr>
-        <p:spPr>
-          <a:xfrm>
-            <a:off x="1143000" y="685800"/>
-            <a:ext cx="4572000" cy="3429000"/>
-          </a:xfrm>
-          <a:prstGeom prst="rect">
-            <a:avLst/>
-          </a:prstGeom>
-          <a:noFill/>
-          <a:ln w="12700">
-            <a:solidFill>
-              <a:prstClr val="black"/>
-            </a:solidFill>
-          </a:ln>
-        </p:spPr>
-        <p:txBody>
-          <a:bodyPr vert="horz" lIns="91440" tIns="45720" rIns="91440" bIns="45720" rtlCol="0" anchor="ctr"/>
-          <a:lstStyle/>
-          <a:p>
-            <a:endParaRPr lang="en-US"/>
-          </a:p>
-        </p:txBody>
-      </p:sp>
-      <p:sp>
-        <p:nvSpPr>
-          <p:cNvPr id="5" name="Notes Placeholder 4"/>
-          <p:cNvSpPr>
-            <a:spLocks noGrp="1"/>
-          </p:cNvSpPr>
-          <p:nvPr>
-            <p:ph type="body" sz="quarter" idx="3"/>
-          </p:nvPr>
-        </p:nvSpPr>
-        <p:spPr>
-          <a:xfrm>
-            <a:off x="685800" y="4343400"/>
-            <a:ext cx="5486400" cy="4114800"/>
-          </a:xfrm>
-          <a:prstGeom prst="rect">
-            <a:avLst/>
-          </a:prstGeom>
-        </p:spPr>
-        <p:txBody>
-          <a:bodyPr vert="horz" lIns="91440" tIns="45720" rIns="91440" bIns="45720" rtlCol="0"/>
-          <a:lstStyle/>
-          <a:p>
-            <a:pPr lvl="0"/>
-            <a:r>
-              <a:rPr lang="en-US" smtClean="0"/>
-              <a:t>Click to edit Master text styles</a:t>
-            </a:r>
-          </a:p>
-          <a:p>
-            <a:pPr lvl="1"/>
-            <a:r>
-              <a:rPr lang="en-US" smtClean="0"/>
-              <a:t>Second level</a:t>
-            </a:r>
-          </a:p>
-          <a:p>
-            <a:pPr lvl="2"/>
-            <a:r>
-              <a:rPr lang="en-US" smtClean="0"/>
-              <a:t>Third level</a:t>
-            </a:r>
-          </a:p>
-          <a:p>
-            <a:pPr lvl="3"/>
-            <a:r>
-              <a:rPr lang="en-US" smtClean="0"/>
-              <a:t>Fourth level</a:t>
-            </a:r>
-          </a:p>
-          <a:p>
-            <a:pPr lvl="4"/>
-            <a:r>
-              <a:rPr lang="en-US" smtClean="0"/>
-              <a:t>Fifth level</a:t>
-            </a:r>
-            <a:endParaRPr lang="en-US"/>
-          </a:p>
-        </p:txBody>
-      </p:sp>
-      <p:sp>
-        <p:nvSpPr>
-          <p:cNvPr id="6" name="Footer Placeholder 5"/>
-          <p:cNvSpPr>
-            <a:spLocks noGrp="1"/>
-          </p:cNvSpPr>
-          <p:nvPr>
-            <p:ph type="ftr" sz="quarter" idx="4"/>
-          </p:nvPr>
-        </p:nvSpPr>
-        <p:spPr>
-          <a:xfrm>
-            <a:off x="0" y="8685213"/>
-            <a:ext cx="2971800" cy="457200"/>
-          </a:xfrm>
-          <a:prstGeom prst="rect">
-            <a:avLst/>
-          </a:prstGeom>
-        </p:spPr>
-        <p:txBody>
-          <a:bodyPr vert="horz" lIns="91440" tIns="45720" rIns="91440" bIns="45720" rtlCol="0" anchor="b"/>
-          <a:lstStyle>
-            <a:lvl1pPr algn="l">
-              <a:defRPr sz="1200"/>
-            </a:lvl1pPr>
-          </a:lstStyle>
-          <a:p>
-            <a:endParaRPr lang="en-US"/>
-          </a:p>
-        </p:txBody>
-      </p:sp>
-      <p:sp>
-        <p:nvSpPr>
-          <p:cNvPr id="7" name="Slide Number Placeholder 6"/>
-          <p:cNvSpPr>
-            <a:spLocks noGrp="1"/>
-          </p:cNvSpPr>
-          <p:nvPr>
-            <p:ph type="sldNum" sz="quarter" idx="5"/>
-          </p:nvPr>
-        </p:nvSpPr>
-        <p:spPr>
-          <a:xfrm>
-            <a:off x="3884613" y="8685213"/>
-            <a:ext cx="2971800" cy="457200"/>
-          </a:xfrm>
-          <a:prstGeom prst="rect">
-            <a:avLst/>
-          </a:prstGeom>
-        </p:spPr>
-        <p:txBody>
-          <a:bodyPr vert="horz" lIns="91440" tIns="45720" rIns="91440" bIns="45720" rtlCol="0" anchor="b"/>
-          <a:lstStyle>
-            <a:lvl1pPr algn="r">
-              <a:defRPr sz="1200"/>
-            </a:lvl1pPr>
-          </a:lstStyle>
-          <a:p>
-            <a:fld id="{BB5E49A5-4136-284D-997B-48E1D791AD67}" type="slidenum">
-              <a:rPr lang="en-US" smtClean="0"/>
-              <a:t>‹#›</a:t>
-            </a:fld>
-            <a:endParaRPr lang="en-US"/>
-          </a:p>
-        </p:txBody>
-      </p:sp>
-    </p:spTree>
-    <p:extLst>
-      <p:ext uri="{BB962C8B-B14F-4D97-AF65-F5344CB8AC3E}">
-        <p14:creationId xmlns:p14="http://schemas.microsoft.com/office/powerpoint/2010/main" val="2623252185"/>
-      </p:ext>
-    </p:extLst>
-  </p:cSld>
-  <p:clrMap bg1="lt1" tx1="dk1" bg2="lt2" tx2="dk2" accent1="accent1" accent2="accent2" accent3="accent3" accent4="accent4" accent5="accent5" accent6="accent6" hlink="hlink" folHlink="folHlink"/>
-  <p:notesStyle>
-    <a:lvl1pPr marL="0" algn="l" defTabSz="457200" rtl="0" eaLnBrk="1" latinLnBrk="0" hangingPunct="1">
-      <a:defRPr sz="1200" kern="1200">
-        <a:solidFill>
-          <a:schemeClr val="tx1"/>
-        </a:solidFill>
-        <a:latin typeface="+mn-lt"/>
-        <a:ea typeface="+mn-ea"/>
-        <a:cs typeface="+mn-cs"/>
-      </a:defRPr>
-    </a:lvl1pPr>
-    <a:lvl2pPr marL="457200" algn="l" defTabSz="457200" rtl="0" eaLnBrk="1" latinLnBrk="0" hangingPunct="1">
-      <a:defRPr sz="1200" kern="1200">
-        <a:solidFill>
-          <a:schemeClr val="tx1"/>
-        </a:solidFill>
-        <a:latin typeface="+mn-lt"/>
-        <a:ea typeface="+mn-ea"/>
-        <a:cs typeface="+mn-cs"/>
-      </a:defRPr>
-    </a:lvl2pPr>
-    <a:lvl3pPr marL="914400" algn="l" defTabSz="457200" rtl="0" eaLnBrk="1" latinLnBrk="0" hangingPunct="1">
-      <a:defRPr sz="1200" kern="1200">
-        <a:solidFill>
-          <a:schemeClr val="tx1"/>
-        </a:solidFill>
-        <a:latin typeface="+mn-lt"/>
-        <a:ea typeface="+mn-ea"/>
-        <a:cs typeface="+mn-cs"/>
-      </a:defRPr>
-    </a:lvl3pPr>
-    <a:lvl4pPr marL="1371600" algn="l" defTabSz="457200" rtl="0" eaLnBrk="1" latinLnBrk="0" hangingPunct="1">
-      <a:defRPr sz="1200" kern="1200">
-        <a:solidFill>
-          <a:schemeClr val="tx1"/>
-        </a:solidFill>
-        <a:latin typeface="+mn-lt"/>
-        <a:ea typeface="+mn-ea"/>
-        <a:cs typeface="+mn-cs"/>
-      </a:defRPr>
-    </a:lvl4pPr>
-    <a:lvl5pPr marL="1828800" algn="l" defTabSz="457200" rtl="0" eaLnBrk="1" latinLnBrk="0" hangingPunct="1">
-      <a:defRPr sz="1200" kern="1200">
-        <a:solidFill>
-          <a:schemeClr val="tx1"/>
-        </a:solidFill>
-        <a:latin typeface="+mn-lt"/>
-        <a:ea typeface="+mn-ea"/>
-        <a:cs typeface="+mn-cs"/>
-      </a:defRPr>
-    </a:lvl5pPr>
-    <a:lvl6pPr marL="2286000" algn="l" defTabSz="457200" rtl="0" eaLnBrk="1" latinLnBrk="0" hangingPunct="1">
-      <a:defRPr sz="1200" kern="1200">
-        <a:solidFill>
-          <a:schemeClr val="tx1"/>
-        </a:solidFill>
-        <a:latin typeface="+mn-lt"/>
-        <a:ea typeface="+mn-ea"/>
-        <a:cs typeface="+mn-cs"/>
-      </a:defRPr>
-    </a:lvl6pPr>
-    <a:lvl7pPr marL="2743200" algn="l" defTabSz="457200" rtl="0" eaLnBrk="1" latinLnBrk="0" hangingPunct="1">
-      <a:defRPr sz="1200" kern="1200">
-        <a:solidFill>
-          <a:schemeClr val="tx1"/>
-        </a:solidFill>
-        <a:latin typeface="+mn-lt"/>
-        <a:ea typeface="+mn-ea"/>
-        <a:cs typeface="+mn-cs"/>
-      </a:defRPr>
-    </a:lvl7pPr>
-    <a:lvl8pPr marL="3200400" algn="l" defTabSz="457200" rtl="0" eaLnBrk="1" latinLnBrk="0" hangingPunct="1">
-      <a:defRPr sz="1200" kern="1200">
-        <a:solidFill>
-          <a:schemeClr val="tx1"/>
-        </a:solidFill>
-        <a:latin typeface="+mn-lt"/>
-        <a:ea typeface="+mn-ea"/>
-        <a:cs typeface="+mn-cs"/>
-      </a:defRPr>
-    </a:lvl8pPr>
-    <a:lvl9pPr marL="3657600" algn="l" defTabSz="457200" rtl="0" eaLnBrk="1" latinLnBrk="0" hangingPunct="1">
-      <a:defRPr sz="1200" kern="1200">
-        <a:solidFill>
-          <a:schemeClr val="tx1"/>
-        </a:solidFill>
-        <a:latin typeface="+mn-lt"/>
-        <a:ea typeface="+mn-ea"/>
-        <a:cs typeface="+mn-cs"/>
-      </a:defRPr>
-    </a:lvl9pPr>
-  </p:notesStyle>
-</p:notesMaster>
-</file>
-
-<file path=ppt/notesSlides/notesSlide1.xml><?xml version="1.0" encoding="utf-8"?>
-<p:notes xmlns:a="http://schemas.openxmlformats.org/drawingml/2006/main" xmlns:p="http://schemas.openxmlformats.org/presentationml/2006/main" xmlns:r="http://schemas.openxmlformats.org/officeDocument/2006/relationships">
-  <p:cSld>
-    <p:spTree>
-      <p:nvGrpSpPr>
-        <p:cNvPr id="1" name=""/>
-        <p:cNvGrpSpPr/>
-        <p:nvPr/>
-      </p:nvGrpSpPr>
-      <p:grpSpPr>
-        <a:xfrm>
-          <a:off x="0" y="0"/>
-          <a:ext cx="0" cy="0"/>
-          <a:chOff x="0" y="0"/>
-          <a:chExt cx="0" cy="0"/>
-        </a:xfrm>
-      </p:grpSpPr>
-      <p:sp>
-        <p:nvSpPr>
-          <p:cNvPr id="2" name="Slide Image Placeholder 1"/>
-          <p:cNvSpPr>
-            <a:spLocks noGrp="1"/>
-          </p:cNvSpPr>
-          <p:nvPr>
-            <p:ph type="sldImg" idx="2"/>
-          </p:nvPr>
-        </p:nvSpPr>
-        <p:spPr/>
-      </p:sp>
-      <p:sp>
-        <p:nvSpPr>
-          <p:cNvPr id="3" name="Notes Placeholder 2"/>
-          <p:cNvSpPr>
-            <a:spLocks noGrp="1"/>
-          </p:cNvSpPr>
-          <p:nvPr>
-            <p:ph type="body" idx="3" sz="quarter"/>
-          </p:nvPr>
-        </p:nvSpPr>
-        <p:spPr/>
-        <p:txBody>
-          <a:bodyPr/>
-          <a:lstStyle/>
-          <a:p>
-            <a:r>
-              <a:t>Lámina 1 · expone ROBERTO. Carátula: proyecto, curso, docente, los 3 integrantes y firma grupal. Fuente: docs/actas/acta-sprint-0.md y docs/backlog-sprints.md (D-23). Idea única: quiénes somos y qué presentamos.</a:t>
-            </a:r>
-          </a:p>
-        </p:txBody>
-      </p:sp>
-      <p:sp>
-        <p:nvSpPr>
-          <p:cNvPr id="4" name="Slide Number Placeholder 3"/>
-          <p:cNvSpPr>
-            <a:spLocks noGrp="1"/>
-          </p:cNvSpPr>
-          <p:nvPr>
-            <p:ph type="sldNum" idx="5" sz="quarter"/>
-          </p:nvPr>
-        </p:nvSpPr>
-        <p:spPr/>
-      </p:sp>
-    </p:spTree>
-  </p:cSld>
-  <p:clrMapOvr>
-    <a:masterClrMapping/>
-  </p:clrMapOvr>
-</p:notes>
-</file>
-
-<file path=ppt/notesSlides/notesSlide10.xml><?xml version="1.0" encoding="utf-8"?>
-<p:notes xmlns:a="http://schemas.openxmlformats.org/drawingml/2006/main" xmlns:p="http://schemas.openxmlformats.org/presentationml/2006/main" xmlns:r="http://schemas.openxmlformats.org/officeDocument/2006/relationships">
-  <p:cSld>
-    <p:spTree>
-      <p:nvGrpSpPr>
-        <p:cNvPr id="1" name=""/>
-        <p:cNvGrpSpPr/>
-        <p:nvPr/>
-      </p:nvGrpSpPr>
-      <p:grpSpPr>
-        <a:xfrm>
-          <a:off x="0" y="0"/>
-          <a:ext cx="0" cy="0"/>
-          <a:chOff x="0" y="0"/>
-          <a:chExt cx="0" cy="0"/>
-        </a:xfrm>
-      </p:grpSpPr>
-      <p:sp>
-        <p:nvSpPr>
-          <p:cNvPr id="2" name="Slide Image Placeholder 1"/>
-          <p:cNvSpPr>
-            <a:spLocks noGrp="1"/>
-          </p:cNvSpPr>
-          <p:nvPr>
-            <p:ph type="sldImg" idx="2"/>
-          </p:nvPr>
-        </p:nvSpPr>
-        <p:spPr/>
-      </p:sp>
-      <p:sp>
-        <p:nvSpPr>
-          <p:cNvPr id="3" name="Notes Placeholder 2"/>
-          <p:cNvSpPr>
-            <a:spLocks noGrp="1"/>
-          </p:cNvSpPr>
-          <p:nvPr>
-            <p:ph type="body" idx="3" sz="quarter"/>
-          </p:nvPr>
-        </p:nvSpPr>
-        <p:spPr/>
-        <p:txBody>
-          <a:bodyPr/>
-          <a:lstStyle/>
-          <a:p>
-            <a:r>
-              <a:t>Lámina 10 · expone ROBERTO y cierra el grupo. Fuentes: docs/backlog-sprints.md y docs/actas/retrospectiva-sprint-0.md. Idea única: dónde estamos y qué sigue. Cerrar con el orden de corte si el tiempo aprieta y con la firma grupal.</a:t>
-            </a:r>
-          </a:p>
-        </p:txBody>
-      </p:sp>
-      <p:sp>
-        <p:nvSpPr>
-          <p:cNvPr id="4" name="Slide Number Placeholder 3"/>
-          <p:cNvSpPr>
-            <a:spLocks noGrp="1"/>
-          </p:cNvSpPr>
-          <p:nvPr>
-            <p:ph type="sldNum" idx="5" sz="quarter"/>
-          </p:nvPr>
-        </p:nvSpPr>
-        <p:spPr/>
-      </p:sp>
-    </p:spTree>
-  </p:cSld>
-  <p:clrMapOvr>
-    <a:masterClrMapping/>
-  </p:clrMapOvr>
-</p:notes>
-</file>
-
-<file path=ppt/notesSlides/notesSlide11.xml><?xml version="1.0" encoding="utf-8"?>
-<p:notes xmlns:a="http://schemas.openxmlformats.org/drawingml/2006/main" xmlns:p="http://schemas.openxmlformats.org/presentationml/2006/main" xmlns:r="http://schemas.openxmlformats.org/officeDocument/2006/relationships">
-  <p:cSld>
-    <p:spTree>
-      <p:nvGrpSpPr>
-        <p:cNvPr id="1" name=""/>
-        <p:cNvGrpSpPr/>
-        <p:nvPr/>
-      </p:nvGrpSpPr>
-      <p:grpSpPr>
-        <a:xfrm>
-          <a:off x="0" y="0"/>
-          <a:ext cx="0" cy="0"/>
-          <a:chOff x="0" y="0"/>
-          <a:chExt cx="0" cy="0"/>
-        </a:xfrm>
-      </p:grpSpPr>
-      <p:sp>
-        <p:nvSpPr>
-          <p:cNvPr id="2" name="Slide Image Placeholder 1"/>
-          <p:cNvSpPr>
-            <a:spLocks noGrp="1"/>
-          </p:cNvSpPr>
-          <p:nvPr>
-            <p:ph type="sldImg" idx="2"/>
-          </p:nvPr>
-        </p:nvSpPr>
-        <p:spPr/>
-      </p:sp>
-      <p:sp>
-        <p:nvSpPr>
-          <p:cNvPr id="3" name="Notes Placeholder 2"/>
-          <p:cNvSpPr>
-            <a:spLocks noGrp="1"/>
-          </p:cNvSpPr>
-          <p:nvPr>
-            <p:ph type="body" idx="3" sz="quarter"/>
-          </p:nvPr>
-        </p:nvSpPr>
-        <p:spPr/>
-        <p:txBody>
-          <a:bodyPr/>
-          <a:lstStyle/>
-          <a:p>
-            <a:r>
-              <a:t>Lámina 7 · expone DALCIR. Fuente: docs/decisiones.md D-27 y frontend/README.md. Idea única: el frontend se migra a React para cumplir la rúbrica del curso y el despliegue no cambia. Decir en voz alta que el alcance creció: de 4 vistas al consumo de las 30 operaciones del contrato, y que quedó verificado (lint, 9 pruebas, build, imagen Docker y recorrido en el navegador con la boleta 14/16/18 → 16.00).</a:t>
-            </a:r>
-          </a:p>
-        </p:txBody>
-      </p:sp>
-      <p:sp>
-        <p:nvSpPr>
-          <p:cNvPr id="4" name="Slide Number Placeholder 3"/>
-          <p:cNvSpPr>
-            <a:spLocks noGrp="1"/>
-          </p:cNvSpPr>
-          <p:nvPr>
-            <p:ph type="sldNum" idx="5" sz="quarter"/>
-          </p:nvPr>
-        </p:nvSpPr>
-        <p:spPr/>
-      </p:sp>
-    </p:spTree>
-  </p:cSld>
-  <p:clrMapOvr>
-    <a:masterClrMapping/>
-  </p:clrMapOvr>
-</p:notes>
-</file>
-
-<file path=ppt/notesSlides/notesSlide2.xml><?xml version="1.0" encoding="utf-8"?>
-<p:notes xmlns:a="http://schemas.openxmlformats.org/drawingml/2006/main" xmlns:p="http://schemas.openxmlformats.org/presentationml/2006/main" xmlns:r="http://schemas.openxmlformats.org/officeDocument/2006/relationships">
-  <p:cSld>
-    <p:spTree>
-      <p:nvGrpSpPr>
-        <p:cNvPr id="1" name=""/>
-        <p:cNvGrpSpPr/>
-        <p:nvPr/>
-      </p:nvGrpSpPr>
-      <p:grpSpPr>
-        <a:xfrm>
-          <a:off x="0" y="0"/>
-          <a:ext cx="0" cy="0"/>
-          <a:chOff x="0" y="0"/>
-          <a:chExt cx="0" cy="0"/>
-        </a:xfrm>
-      </p:grpSpPr>
-      <p:sp>
-        <p:nvSpPr>
-          <p:cNvPr id="2" name="Slide Image Placeholder 1"/>
-          <p:cNvSpPr>
-            <a:spLocks noGrp="1"/>
-          </p:cNvSpPr>
-          <p:nvPr>
-            <p:ph type="sldImg" idx="2"/>
-          </p:nvPr>
-        </p:nvSpPr>
-        <p:spPr/>
-      </p:sp>
-      <p:sp>
-        <p:nvSpPr>
-          <p:cNvPr id="3" name="Notes Placeholder 2"/>
-          <p:cNvSpPr>
-            <a:spLocks noGrp="1"/>
-          </p:cNvSpPr>
-          <p:nvPr>
-            <p:ph type="body" idx="3" sz="quarter"/>
-          </p:nvPr>
-        </p:nvSpPr>
-        <p:spPr/>
-        <p:txBody>
-          <a:bodyPr/>
-          <a:lstStyle/>
-          <a:p>
-            <a:r>
-              <a:t>Lámina 2 · expone DALCIR. Fuente: docs/alcance-mvp.md §1, §4 y §5. Idea única: qué resolvemos y dónde trazamos la raya. El caso de uso principal «de la matrícula a la nota» es la prueba de aceptación y el guion de la demo (§3).</a:t>
-            </a:r>
-          </a:p>
-        </p:txBody>
-      </p:sp>
-      <p:sp>
-        <p:nvSpPr>
-          <p:cNvPr id="4" name="Slide Number Placeholder 3"/>
-          <p:cNvSpPr>
-            <a:spLocks noGrp="1"/>
-          </p:cNvSpPr>
-          <p:nvPr>
-            <p:ph type="sldNum" idx="5" sz="quarter"/>
-          </p:nvPr>
-        </p:nvSpPr>
-        <p:spPr/>
-      </p:sp>
-    </p:spTree>
-  </p:cSld>
-  <p:clrMapOvr>
-    <a:masterClrMapping/>
-  </p:clrMapOvr>
-</p:notes>
-</file>
-
-<file path=ppt/notesSlides/notesSlide3.xml><?xml version="1.0" encoding="utf-8"?>
-<p:notes xmlns:a="http://schemas.openxmlformats.org/drawingml/2006/main" xmlns:p="http://schemas.openxmlformats.org/presentationml/2006/main" xmlns:r="http://schemas.openxmlformats.org/officeDocument/2006/relationships">
-  <p:cSld>
-    <p:spTree>
-      <p:nvGrpSpPr>
-        <p:cNvPr id="1" name=""/>
-        <p:cNvGrpSpPr/>
-        <p:nvPr/>
-      </p:nvGrpSpPr>
-      <p:grpSpPr>
-        <a:xfrm>
-          <a:off x="0" y="0"/>
-          <a:ext cx="0" cy="0"/>
-          <a:chOff x="0" y="0"/>
-          <a:chExt cx="0" cy="0"/>
-        </a:xfrm>
-      </p:grpSpPr>
-      <p:sp>
-        <p:nvSpPr>
-          <p:cNvPr id="2" name="Slide Image Placeholder 1"/>
-          <p:cNvSpPr>
-            <a:spLocks noGrp="1"/>
-          </p:cNvSpPr>
-          <p:nvPr>
-            <p:ph type="sldImg" idx="2"/>
-          </p:nvPr>
-        </p:nvSpPr>
-        <p:spPr/>
-      </p:sp>
-      <p:sp>
-        <p:nvSpPr>
-          <p:cNvPr id="3" name="Notes Placeholder 2"/>
-          <p:cNvSpPr>
-            <a:spLocks noGrp="1"/>
-          </p:cNvSpPr>
-          <p:nvPr>
-            <p:ph type="body" idx="3" sz="quarter"/>
-          </p:nvPr>
-        </p:nvSpPr>
-        <p:spPr/>
-        <p:txBody>
-          <a:bodyPr/>
-          <a:lstStyle/>
-          <a:p>
-            <a:r>
-              <a:t>Lámina 3 · expone ROBERTO. Fuente: docs/arquitectura.md y docs/decisiones.md D-00. Idea única: cómo está armado el sistema. Mostrar el diagrama de componentes (§1) y el de balanceo y failover (§2).</a:t>
-            </a:r>
-          </a:p>
-        </p:txBody>
-      </p:sp>
-      <p:sp>
-        <p:nvSpPr>
-          <p:cNvPr id="4" name="Slide Number Placeholder 3"/>
-          <p:cNvSpPr>
-            <a:spLocks noGrp="1"/>
-          </p:cNvSpPr>
-          <p:nvPr>
-            <p:ph type="sldNum" idx="5" sz="quarter"/>
-          </p:nvPr>
-        </p:nvSpPr>
-        <p:spPr/>
-      </p:sp>
-    </p:spTree>
-  </p:cSld>
-  <p:clrMapOvr>
-    <a:masterClrMapping/>
-  </p:clrMapOvr>
-</p:notes>
-</file>
-
-<file path=ppt/notesSlides/notesSlide4.xml><?xml version="1.0" encoding="utf-8"?>
-<p:notes xmlns:a="http://schemas.openxmlformats.org/drawingml/2006/main" xmlns:p="http://schemas.openxmlformats.org/presentationml/2006/main" xmlns:r="http://schemas.openxmlformats.org/officeDocument/2006/relationships">
-  <p:cSld>
-    <p:spTree>
-      <p:nvGrpSpPr>
-        <p:cNvPr id="1" name=""/>
-        <p:cNvGrpSpPr/>
-        <p:nvPr/>
-      </p:nvGrpSpPr>
-      <p:grpSpPr>
-        <a:xfrm>
-          <a:off x="0" y="0"/>
-          <a:ext cx="0" cy="0"/>
-          <a:chOff x="0" y="0"/>
-          <a:chExt cx="0" cy="0"/>
-        </a:xfrm>
-      </p:grpSpPr>
-      <p:sp>
-        <p:nvSpPr>
-          <p:cNvPr id="2" name="Slide Image Placeholder 1"/>
-          <p:cNvSpPr>
-            <a:spLocks noGrp="1"/>
-          </p:cNvSpPr>
-          <p:nvPr>
-            <p:ph type="sldImg" idx="2"/>
-          </p:nvPr>
-        </p:nvSpPr>
-        <p:spPr/>
-      </p:sp>
-      <p:sp>
-        <p:nvSpPr>
-          <p:cNvPr id="3" name="Notes Placeholder 2"/>
-          <p:cNvSpPr>
-            <a:spLocks noGrp="1"/>
-          </p:cNvSpPr>
-          <p:nvPr>
-            <p:ph type="body" idx="3" sz="quarter"/>
-          </p:nvPr>
-        </p:nvSpPr>
-        <p:spPr/>
-        <p:txBody>
-          <a:bodyPr/>
-          <a:lstStyle/>
-          <a:p>
-            <a:r>
-              <a:t>Lámina 4 · expone JORGE. Fuentes: docs/analisis/modelo-datos.md §1 y §3, docs/analisis/datos-seed.md, db/verificacion/. Idea única: el dato manda y las reglas están en la base. Hallazgo estrella: el LIKE del legacy devuelve 0 filas; se usa ILIKE con unaccent.</a:t>
-            </a:r>
-          </a:p>
-        </p:txBody>
-      </p:sp>
-      <p:sp>
-        <p:nvSpPr>
-          <p:cNvPr id="4" name="Slide Number Placeholder 3"/>
-          <p:cNvSpPr>
-            <a:spLocks noGrp="1"/>
-          </p:cNvSpPr>
-          <p:nvPr>
-            <p:ph type="sldNum" idx="5" sz="quarter"/>
-          </p:nvPr>
-        </p:nvSpPr>
-        <p:spPr/>
-      </p:sp>
-    </p:spTree>
-  </p:cSld>
-  <p:clrMapOvr>
-    <a:masterClrMapping/>
-  </p:clrMapOvr>
-</p:notes>
-</file>
-
-<file path=ppt/notesSlides/notesSlide5.xml><?xml version="1.0" encoding="utf-8"?>
-<p:notes xmlns:a="http://schemas.openxmlformats.org/drawingml/2006/main" xmlns:p="http://schemas.openxmlformats.org/presentationml/2006/main" xmlns:r="http://schemas.openxmlformats.org/officeDocument/2006/relationships">
-  <p:cSld>
-    <p:spTree>
-      <p:nvGrpSpPr>
-        <p:cNvPr id="1" name=""/>
-        <p:cNvGrpSpPr/>
-        <p:nvPr/>
-      </p:nvGrpSpPr>
-      <p:grpSpPr>
-        <a:xfrm>
-          <a:off x="0" y="0"/>
-          <a:ext cx="0" cy="0"/>
-          <a:chOff x="0" y="0"/>
-          <a:chExt cx="0" cy="0"/>
-        </a:xfrm>
-      </p:grpSpPr>
-      <p:sp>
-        <p:nvSpPr>
-          <p:cNvPr id="2" name="Slide Image Placeholder 1"/>
-          <p:cNvSpPr>
-            <a:spLocks noGrp="1"/>
-          </p:cNvSpPr>
-          <p:nvPr>
-            <p:ph type="sldImg" idx="2"/>
-          </p:nvPr>
-        </p:nvSpPr>
-        <p:spPr/>
-      </p:sp>
-      <p:sp>
-        <p:nvSpPr>
-          <p:cNvPr id="3" name="Notes Placeholder 2"/>
-          <p:cNvSpPr>
-            <a:spLocks noGrp="1"/>
-          </p:cNvSpPr>
-          <p:nvPr>
-            <p:ph type="body" idx="3" sz="quarter"/>
-          </p:nvPr>
-        </p:nvSpPr>
-        <p:spPr/>
-        <p:txBody>
-          <a:bodyPr/>
-          <a:lstStyle/>
-          <a:p>
-            <a:r>
-              <a:t>Lámina 5 · expone JORGE. Fuente: docs/manual-tecnico.md §2.2 y docs/qa/reporte-bugs.md. Idea única: el contrato y qué se cumple hoy. Mostrar un curl real de /api/v1/dashboard (12/7/23/1) y la fila de la boleta (16.00 y promedio 13.43).</a:t>
-            </a:r>
-          </a:p>
-        </p:txBody>
-      </p:sp>
-      <p:sp>
-        <p:nvSpPr>
-          <p:cNvPr id="4" name="Slide Number Placeholder 3"/>
-          <p:cNvSpPr>
-            <a:spLocks noGrp="1"/>
-          </p:cNvSpPr>
-          <p:nvPr>
-            <p:ph type="sldNum" idx="5" sz="quarter"/>
-          </p:nvPr>
-        </p:nvSpPr>
-        <p:spPr/>
-      </p:sp>
-    </p:spTree>
-  </p:cSld>
-  <p:clrMapOvr>
-    <a:masterClrMapping/>
-  </p:clrMapOvr>
-</p:notes>
-</file>
-
-<file path=ppt/notesSlides/notesSlide6.xml><?xml version="1.0" encoding="utf-8"?>
-<p:notes xmlns:a="http://schemas.openxmlformats.org/drawingml/2006/main" xmlns:p="http://schemas.openxmlformats.org/presentationml/2006/main" xmlns:r="http://schemas.openxmlformats.org/officeDocument/2006/relationships">
-  <p:cSld>
-    <p:spTree>
-      <p:nvGrpSpPr>
-        <p:cNvPr id="1" name=""/>
-        <p:cNvGrpSpPr/>
-        <p:nvPr/>
-      </p:nvGrpSpPr>
-      <p:grpSpPr>
-        <a:xfrm>
-          <a:off x="0" y="0"/>
-          <a:ext cx="0" cy="0"/>
-          <a:chOff x="0" y="0"/>
-          <a:chExt cx="0" cy="0"/>
-        </a:xfrm>
-      </p:grpSpPr>
-      <p:sp>
-        <p:nvSpPr>
-          <p:cNvPr id="2" name="Slide Image Placeholder 1"/>
-          <p:cNvSpPr>
-            <a:spLocks noGrp="1"/>
-          </p:cNvSpPr>
-          <p:nvPr>
-            <p:ph type="sldImg" idx="2"/>
-          </p:nvPr>
-        </p:nvSpPr>
-        <p:spPr/>
-      </p:sp>
-      <p:sp>
-        <p:nvSpPr>
-          <p:cNvPr id="3" name="Notes Placeholder 2"/>
-          <p:cNvSpPr>
-            <a:spLocks noGrp="1"/>
-          </p:cNvSpPr>
-          <p:nvPr>
-            <p:ph type="body" idx="3" sz="quarter"/>
-          </p:nvPr>
-        </p:nvSpPr>
-        <p:spPr/>
-        <p:txBody>
-          <a:bodyPr/>
-          <a:lstStyle/>
-          <a:p>
-            <a:r>
-              <a:t>Lámina 6 · expone DALCIR. Fuentes: docs/alcance-mvp.md §3 y docs/qa/plan-pruebas.md §7. Idea única: qué ve y qué hace el usuario. Decirlo claro: el SPA es lo que falta; no se muestran capturas de una pantalla que no existe.</a:t>
-            </a:r>
-          </a:p>
-        </p:txBody>
-      </p:sp>
-      <p:sp>
-        <p:nvSpPr>
-          <p:cNvPr id="4" name="Slide Number Placeholder 3"/>
-          <p:cNvSpPr>
-            <a:spLocks noGrp="1"/>
-          </p:cNvSpPr>
-          <p:nvPr>
-            <p:ph type="sldNum" idx="5" sz="quarter"/>
-          </p:nvPr>
-        </p:nvSpPr>
-        <p:spPr/>
-      </p:sp>
-    </p:spTree>
-  </p:cSld>
-  <p:clrMapOvr>
-    <a:masterClrMapping/>
-  </p:clrMapOvr>
-</p:notes>
-</file>
-
-<file path=ppt/notesSlides/notesSlide7.xml><?xml version="1.0" encoding="utf-8"?>
-<p:notes xmlns:a="http://schemas.openxmlformats.org/drawingml/2006/main" xmlns:p="http://schemas.openxmlformats.org/presentationml/2006/main" xmlns:r="http://schemas.openxmlformats.org/officeDocument/2006/relationships">
-  <p:cSld>
-    <p:spTree>
-      <p:nvGrpSpPr>
-        <p:cNvPr id="1" name=""/>
-        <p:cNvGrpSpPr/>
-        <p:nvPr/>
-      </p:nvGrpSpPr>
-      <p:grpSpPr>
-        <a:xfrm>
-          <a:off x="0" y="0"/>
-          <a:ext cx="0" cy="0"/>
-          <a:chOff x="0" y="0"/>
-          <a:chExt cx="0" cy="0"/>
-        </a:xfrm>
-      </p:grpSpPr>
-      <p:sp>
-        <p:nvSpPr>
-          <p:cNvPr id="2" name="Slide Image Placeholder 1"/>
-          <p:cNvSpPr>
-            <a:spLocks noGrp="1"/>
-          </p:cNvSpPr>
-          <p:nvPr>
-            <p:ph type="sldImg" idx="2"/>
-          </p:nvPr>
-        </p:nvSpPr>
-        <p:spPr/>
-      </p:sp>
-      <p:sp>
-        <p:nvSpPr>
-          <p:cNvPr id="3" name="Notes Placeholder 2"/>
-          <p:cNvSpPr>
-            <a:spLocks noGrp="1"/>
-          </p:cNvSpPr>
-          <p:nvPr>
-            <p:ph type="body" idx="3" sz="quarter"/>
-          </p:nvPr>
-        </p:nvSpPr>
-        <p:spPr/>
-        <p:txBody>
-          <a:bodyPr/>
-          <a:lstStyle/>
-          <a:p>
-            <a:r>
-              <a:t>Lámina 7 · expone ROBERTO. Fuente: docs/devops/plan-contenedores-ci.md y docs/devops/evidencia-sprint0.md §2-3. Idea única: el sistema se levanta, reparte la carga y se verifica solo. Aclarar que el CI aún no corrió en GitHub porque el repo no tiene remoto.</a:t>
-            </a:r>
-          </a:p>
-        </p:txBody>
-      </p:sp>
-      <p:sp>
-        <p:nvSpPr>
-          <p:cNvPr id="4" name="Slide Number Placeholder 3"/>
-          <p:cNvSpPr>
-            <a:spLocks noGrp="1"/>
-          </p:cNvSpPr>
-          <p:nvPr>
-            <p:ph type="sldNum" idx="5" sz="quarter"/>
-          </p:nvPr>
-        </p:nvSpPr>
-        <p:spPr/>
-      </p:sp>
-    </p:spTree>
-  </p:cSld>
-  <p:clrMapOvr>
-    <a:masterClrMapping/>
-  </p:clrMapOvr>
-</p:notes>
-</file>
-
-<file path=ppt/notesSlides/notesSlide8.xml><?xml version="1.0" encoding="utf-8"?>
-<p:notes xmlns:a="http://schemas.openxmlformats.org/drawingml/2006/main" xmlns:p="http://schemas.openxmlformats.org/presentationml/2006/main" xmlns:r="http://schemas.openxmlformats.org/officeDocument/2006/relationships">
-  <p:cSld>
-    <p:spTree>
-      <p:nvGrpSpPr>
-        <p:cNvPr id="1" name=""/>
-        <p:cNvGrpSpPr/>
-        <p:nvPr/>
-      </p:nvGrpSpPr>
-      <p:grpSpPr>
-        <a:xfrm>
-          <a:off x="0" y="0"/>
-          <a:ext cx="0" cy="0"/>
-          <a:chOff x="0" y="0"/>
-          <a:chExt cx="0" cy="0"/>
-        </a:xfrm>
-      </p:grpSpPr>
-      <p:sp>
-        <p:nvSpPr>
-          <p:cNvPr id="2" name="Slide Image Placeholder 1"/>
-          <p:cNvSpPr>
-            <a:spLocks noGrp="1"/>
-          </p:cNvSpPr>
-          <p:nvPr>
-            <p:ph type="sldImg" idx="2"/>
-          </p:nvPr>
-        </p:nvSpPr>
-        <p:spPr/>
-      </p:sp>
-      <p:sp>
-        <p:nvSpPr>
-          <p:cNvPr id="3" name="Notes Placeholder 2"/>
-          <p:cNvSpPr>
-            <a:spLocks noGrp="1"/>
-          </p:cNvSpPr>
-          <p:nvPr>
-            <p:ph type="body" idx="3" sz="quarter"/>
-          </p:nvPr>
-        </p:nvSpPr>
-        <p:spPr/>
-        <p:txBody>
-          <a:bodyPr/>
-          <a:lstStyle/>
-          <a:p>
-            <a:r>
-              <a:t>Lámina 8 · expone ROBERTO. Fuentes: k8s/, docs/devops/evidencia-sprint0.md §4-5, docs/decisiones.md D-04 y A-02. Idea única: lo declarativo está listo y la observabilidad corre; el cluster es lo que falta. Criterio del backlog: si no se instala minikube, va con la etiqueta «no desplegado en esta máquina», nunca como si corriera.</a:t>
-            </a:r>
-          </a:p>
-        </p:txBody>
-      </p:sp>
-      <p:sp>
-        <p:nvSpPr>
-          <p:cNvPr id="4" name="Slide Number Placeholder 3"/>
-          <p:cNvSpPr>
-            <a:spLocks noGrp="1"/>
-          </p:cNvSpPr>
-          <p:nvPr>
-            <p:ph type="sldNum" idx="5" sz="quarter"/>
-          </p:nvPr>
-        </p:nvSpPr>
-        <p:spPr/>
-      </p:sp>
-    </p:spTree>
-  </p:cSld>
-  <p:clrMapOvr>
-    <a:masterClrMapping/>
-  </p:clrMapOvr>
-</p:notes>
-</file>
-
-<file path=ppt/notesSlides/notesSlide9.xml><?xml version="1.0" encoding="utf-8"?>
-<p:notes xmlns:a="http://schemas.openxmlformats.org/drawingml/2006/main" xmlns:p="http://schemas.openxmlformats.org/presentationml/2006/main" xmlns:r="http://schemas.openxmlformats.org/officeDocument/2006/relationships">
-  <p:cSld>
-    <p:spTree>
-      <p:nvGrpSpPr>
-        <p:cNvPr id="1" name=""/>
-        <p:cNvGrpSpPr/>
-        <p:nvPr/>
-      </p:nvGrpSpPr>
-      <p:grpSpPr>
-        <a:xfrm>
-          <a:off x="0" y="0"/>
-          <a:ext cx="0" cy="0"/>
-          <a:chOff x="0" y="0"/>
-          <a:chExt cx="0" cy="0"/>
-        </a:xfrm>
-      </p:grpSpPr>
-      <p:sp>
-        <p:nvSpPr>
-          <p:cNvPr id="2" name="Slide Image Placeholder 1"/>
-          <p:cNvSpPr>
-            <a:spLocks noGrp="1"/>
-          </p:cNvSpPr>
-          <p:nvPr>
-            <p:ph type="sldImg" idx="2"/>
-          </p:nvPr>
-        </p:nvSpPr>
-        <p:spPr/>
-      </p:sp>
-      <p:sp>
-        <p:nvSpPr>
-          <p:cNvPr id="3" name="Notes Placeholder 2"/>
-          <p:cNvSpPr>
-            <a:spLocks noGrp="1"/>
-          </p:cNvSpPr>
-          <p:nvPr>
-            <p:ph type="body" idx="3" sz="quarter"/>
-          </p:nvPr>
-        </p:nvSpPr>
-        <p:spPr/>
-        <p:txBody>
-          <a:bodyPr/>
-          <a:lstStyle/>
-          <a:p>
-            <a:r>
-              <a:t>Lámina 9 · expone JORGE. Fuentes: docs/qa/plan-pruebas.md §3 y docs/qa/reporte-bugs.md. Idea única: la calidad se demuestra con salidas, no con afirmaciones. Mostrar la matriz de los 39 criterios.</a:t>
-            </a:r>
-          </a:p>
-        </p:txBody>
-      </p:sp>
-      <p:sp>
-        <p:nvSpPr>
-          <p:cNvPr id="4" name="Slide Number Placeholder 3"/>
-          <p:cNvSpPr>
-            <a:spLocks noGrp="1"/>
-          </p:cNvSpPr>
-          <p:nvPr>
-            <p:ph type="sldNum" idx="5" sz="quarter"/>
-          </p:nvPr>
-        </p:nvSpPr>
-        <p:spPr/>
-      </p:sp>
-    </p:spTree>
-  </p:cSld>
-  <p:clrMapOvr>
-    <a:masterClrMapping/>
-  </p:clrMapOvr>
-</p:notes>
 </file>
 
 <file path=ppt/slideLayouts/slideLayout1.xml><?xml version="1.0" encoding="utf-8"?>
@@ -4222,20 +3102,187 @@
       <p:grpSpPr/>
       <p:sp>
         <p:nvSpPr>
-          <p:cNvPr id="2" name="Title 1"/>
-          <p:cNvSpPr>
-            <a:spLocks noGrp="1"/>
-          </p:cNvSpPr>
-          <p:nvPr>
-            <p:ph type="title"/>
-          </p:nvPr>
-        </p:nvSpPr>
-        <p:spPr/>
-        <p:txBody>
-          <a:bodyPr/>
-          <a:lstStyle/>
-          <a:p>
-            <a:r>
+          <p:cNvPr id="2" name="Rectangle 1"/>
+          <p:cNvSpPr/>
+          <p:nvPr/>
+        </p:nvSpPr>
+        <p:spPr>
+          <a:xfrm>
+            <a:off x="0" y="0"/>
+            <a:ext cx="12191695" cy="6858000"/>
+          </a:xfrm>
+          <a:prstGeom prst="rect">
+            <a:avLst/>
+          </a:prstGeom>
+          <a:solidFill>
+            <a:srgbClr val="0B1220"/>
+          </a:solidFill>
+          <a:ln>
+            <a:noFill/>
+          </a:ln>
+        </p:spPr>
+        <p:style>
+          <a:lnRef idx="1">
+            <a:schemeClr val="accent1"/>
+          </a:lnRef>
+          <a:fillRef idx="3">
+            <a:schemeClr val="accent1"/>
+          </a:fillRef>
+          <a:effectRef idx="2">
+            <a:schemeClr val="accent1"/>
+          </a:effectRef>
+          <a:fontRef idx="minor">
+            <a:schemeClr val="lt1"/>
+          </a:fontRef>
+        </p:style>
+        <p:txBody>
+          <a:bodyPr rtlCol="0" anchor="ctr"/>
+          <a:lstStyle/>
+          <a:p>
+            <a:pPr algn="ctr"/>
+          </a:p>
+        </p:txBody>
+      </p:sp>
+      <p:sp>
+        <p:nvSpPr>
+          <p:cNvPr id="3" name="Rectangle 2"/>
+          <p:cNvSpPr/>
+          <p:nvPr/>
+        </p:nvSpPr>
+        <p:spPr>
+          <a:xfrm>
+            <a:off x="0" y="0"/>
+            <a:ext cx="12191695" cy="41148"/>
+          </a:xfrm>
+          <a:prstGeom prst="rect">
+            <a:avLst/>
+          </a:prstGeom>
+          <a:solidFill>
+            <a:srgbClr val="22D3EE"/>
+          </a:solidFill>
+          <a:ln>
+            <a:noFill/>
+          </a:ln>
+        </p:spPr>
+        <p:style>
+          <a:lnRef idx="1">
+            <a:schemeClr val="accent1"/>
+          </a:lnRef>
+          <a:fillRef idx="3">
+            <a:schemeClr val="accent1"/>
+          </a:fillRef>
+          <a:effectRef idx="2">
+            <a:schemeClr val="accent1"/>
+          </a:effectRef>
+          <a:fontRef idx="minor">
+            <a:schemeClr val="lt1"/>
+          </a:fontRef>
+        </p:style>
+        <p:txBody>
+          <a:bodyPr rtlCol="0" anchor="ctr"/>
+          <a:lstStyle/>
+          <a:p>
+            <a:pPr algn="ctr"/>
+          </a:p>
+        </p:txBody>
+      </p:sp>
+      <p:pic>
+        <p:nvPicPr>
+          <p:cNvPr id="4" name="Picture 3" descr="_portada.jpg"/>
+          <p:cNvPicPr>
+            <a:picLocks noChangeAspect="1"/>
+          </p:cNvPicPr>
+          <p:nvPr/>
+        </p:nvPicPr>
+        <p:blipFill>
+          <a:blip r:embed="rId2"/>
+          <a:stretch>
+            <a:fillRect/>
+          </a:stretch>
+        </p:blipFill>
+        <p:spPr>
+          <a:xfrm>
+            <a:off x="0" y="0"/>
+            <a:ext cx="12191695" cy="6858000"/>
+          </a:xfrm>
+          <a:prstGeom prst="rect">
+            <a:avLst/>
+          </a:prstGeom>
+        </p:spPr>
+      </p:pic>
+      <p:sp>
+        <p:nvSpPr>
+          <p:cNvPr id="5" name="TextBox 4"/>
+          <p:cNvSpPr txBox="1"/>
+          <p:nvPr/>
+        </p:nvSpPr>
+        <p:spPr>
+          <a:xfrm>
+            <a:off x="822960" y="1417320"/>
+            <a:ext cx="6400800" cy="365760"/>
+          </a:xfrm>
+          <a:prstGeom prst="rect">
+            <a:avLst/>
+          </a:prstGeom>
+          <a:noFill/>
+        </p:spPr>
+        <p:txBody>
+          <a:bodyPr wrap="square" anchor="t" lIns="25400" rIns="25400" tIns="0" bIns="0">
+            <a:spAutoFit/>
+          </a:bodyPr>
+          <a:lstStyle/>
+          <a:p>
+            <a:pPr algn="l">
+              <a:lnSpc>
+                <a:spcPct val="112000"/>
+              </a:lnSpc>
+            </a:pPr>
+            <a:r>
+              <a:rPr sz="1100" b="1">
+                <a:solidFill>
+                  <a:srgbClr val="22D3EE"/>
+                </a:solidFill>
+                <a:latin typeface="Segoe UI"/>
+              </a:rPr>
+              <a:t>TRABAJO COLABORATIVO · PROYECTO INTEGRADO</a:t>
+            </a:r>
+          </a:p>
+        </p:txBody>
+      </p:sp>
+      <p:sp>
+        <p:nvSpPr>
+          <p:cNvPr id="6" name="TextBox 5"/>
+          <p:cNvSpPr txBox="1"/>
+          <p:nvPr/>
+        </p:nvSpPr>
+        <p:spPr>
+          <a:xfrm>
+            <a:off x="822960" y="1828800"/>
+            <a:ext cx="6583680" cy="1737360"/>
+          </a:xfrm>
+          <a:prstGeom prst="rect">
+            <a:avLst/>
+          </a:prstGeom>
+          <a:noFill/>
+        </p:spPr>
+        <p:txBody>
+          <a:bodyPr wrap="square" anchor="t" lIns="25400" rIns="25400" tIns="0" bIns="0">
+            <a:spAutoFit/>
+          </a:bodyPr>
+          <a:lstStyle/>
+          <a:p>
+            <a:pPr algn="l">
+              <a:lnSpc>
+                <a:spcPct val="95000"/>
+              </a:lnSpc>
+            </a:pPr>
+            <a:r>
+              <a:rPr sz="4600" b="1">
+                <a:solidFill>
+                  <a:srgbClr val="F8FAFC"/>
+                </a:solidFill>
+                <a:latin typeface="Segoe UI"/>
+              </a:rPr>
               <a:t>GS08 · Matrículas y Notas</a:t>
             </a:r>
           </a:p>
@@ -4243,48 +3290,162 @@
       </p:sp>
       <p:sp>
         <p:nvSpPr>
-          <p:cNvPr id="3" name="Content Placeholder 2"/>
-          <p:cNvSpPr>
-            <a:spLocks noGrp="1"/>
-          </p:cNvSpPr>
-          <p:nvPr>
-            <p:ph idx="1"/>
-          </p:nvPr>
-        </p:nvSpPr>
-        <p:spPr/>
-        <p:txBody>
-          <a:bodyPr/>
-          <a:lstStyle/>
-          <a:p>
-            <a:pPr/>
-            <a:r>
-              <a:rPr sz="2000" b="1">
-                <a:solidFill>
-                  <a:srgbClr val="1F4E79"/>
-                </a:solidFill>
-              </a:rPr>
-              <a:t>Curso GS08 · Docente: Dr. Jack Harry Peralta Cáceres</a:t>
-            </a:r>
-          </a:p>
-          <a:p>
-            <a:pPr/>
-            <a:r>
-              <a:rPr sz="1600"/>
-              <a:t>Arteaga Rullier, Roberto — Scrum Master, DevOps y Backend</a:t>
-            </a:r>
-          </a:p>
-          <a:p>
-            <a:pPr/>
-            <a:r>
-              <a:rPr sz="1600"/>
-              <a:t>Inocencio Gargate, Dalcir — Frontend y Documentación</a:t>
-            </a:r>
-          </a:p>
-          <a:p>
-            <a:pPr/>
-            <a:r>
-              <a:rPr sz="1600" i="1"/>
-              <a:t>Presentación grupal · 21/09/2026</a:t>
+          <p:cNvPr id="7" name="TextBox 6"/>
+          <p:cNvSpPr txBox="1"/>
+          <p:nvPr/>
+        </p:nvSpPr>
+        <p:spPr>
+          <a:xfrm>
+            <a:off x="822960" y="3429000"/>
+            <a:ext cx="6035040" cy="822960"/>
+          </a:xfrm>
+          <a:prstGeom prst="rect">
+            <a:avLst/>
+          </a:prstGeom>
+          <a:noFill/>
+        </p:spPr>
+        <p:txBody>
+          <a:bodyPr wrap="square" anchor="t" lIns="25400" rIns="25400" tIns="0" bIns="0">
+            <a:spAutoFit/>
+          </a:bodyPr>
+          <a:lstStyle/>
+          <a:p>
+            <a:pPr algn="l">
+              <a:lnSpc>
+                <a:spcPct val="120000"/>
+              </a:lnSpc>
+            </a:pPr>
+            <a:r>
+              <a:rPr sz="1300" b="0">
+                <a:solidFill>
+                  <a:srgbClr val="94A3B8"/>
+                </a:solidFill>
+                <a:latin typeface="Segoe UI"/>
+              </a:rPr>
+              <a:t>Sistema académico con base híbrida, API REST y GraphQL, OAuth2 con scopes y SPA accesible, desplegado en producción con integración continua.</a:t>
+            </a:r>
+          </a:p>
+        </p:txBody>
+      </p:sp>
+      <p:sp>
+        <p:nvSpPr>
+          <p:cNvPr id="8" name="Rectangle 7"/>
+          <p:cNvSpPr/>
+          <p:nvPr/>
+        </p:nvSpPr>
+        <p:spPr>
+          <a:xfrm>
+            <a:off x="822960" y="4434840"/>
+            <a:ext cx="1280160" cy="31750"/>
+          </a:xfrm>
+          <a:prstGeom prst="rect">
+            <a:avLst/>
+          </a:prstGeom>
+          <a:solidFill>
+            <a:srgbClr val="22D3EE"/>
+          </a:solidFill>
+          <a:ln>
+            <a:noFill/>
+          </a:ln>
+        </p:spPr>
+        <p:style>
+          <a:lnRef idx="1">
+            <a:schemeClr val="accent1"/>
+          </a:lnRef>
+          <a:fillRef idx="3">
+            <a:schemeClr val="accent1"/>
+          </a:fillRef>
+          <a:effectRef idx="2">
+            <a:schemeClr val="accent1"/>
+          </a:effectRef>
+          <a:fontRef idx="minor">
+            <a:schemeClr val="lt1"/>
+          </a:fontRef>
+        </p:style>
+        <p:txBody>
+          <a:bodyPr rtlCol="0" anchor="ctr"/>
+          <a:lstStyle/>
+          <a:p>
+            <a:pPr algn="ctr"/>
+          </a:p>
+        </p:txBody>
+      </p:sp>
+      <p:sp>
+        <p:nvSpPr>
+          <p:cNvPr id="9" name="TextBox 8"/>
+          <p:cNvSpPr txBox="1"/>
+          <p:nvPr/>
+        </p:nvSpPr>
+        <p:spPr>
+          <a:xfrm>
+            <a:off x="822960" y="4617720"/>
+            <a:ext cx="5852160" cy="914400"/>
+          </a:xfrm>
+          <a:prstGeom prst="rect">
+            <a:avLst/>
+          </a:prstGeom>
+          <a:noFill/>
+        </p:spPr>
+        <p:txBody>
+          <a:bodyPr wrap="square" anchor="t" lIns="25400" rIns="25400" tIns="0" bIns="0">
+            <a:spAutoFit/>
+          </a:bodyPr>
+          <a:lstStyle/>
+          <a:p>
+            <a:pPr algn="l">
+              <a:lnSpc>
+                <a:spcPct val="125000"/>
+              </a:lnSpc>
+            </a:pPr>
+            <a:r>
+              <a:rPr sz="1200" b="0">
+                <a:solidFill>
+                  <a:srgbClr val="F8FAFC"/>
+                </a:solidFill>
+                <a:latin typeface="Segoe UI"/>
+              </a:rPr>
+              <a:t>Arteaga Rullier, Roberto Carlos — Scrum Master, DevOps y Backend
+Inocencio Gargate, Dalcir — Frontend y Documentación</a:t>
+            </a:r>
+          </a:p>
+        </p:txBody>
+      </p:sp>
+      <p:sp>
+        <p:nvSpPr>
+          <p:cNvPr id="10" name="TextBox 9"/>
+          <p:cNvSpPr txBox="1"/>
+          <p:nvPr/>
+        </p:nvSpPr>
+        <p:spPr>
+          <a:xfrm>
+            <a:off x="822960" y="5486400"/>
+            <a:ext cx="5852160" cy="822960"/>
+          </a:xfrm>
+          <a:prstGeom prst="rect">
+            <a:avLst/>
+          </a:prstGeom>
+          <a:noFill/>
+        </p:spPr>
+        <p:txBody>
+          <a:bodyPr wrap="square" anchor="t" lIns="25400" rIns="25400" tIns="0" bIns="0">
+            <a:spAutoFit/>
+          </a:bodyPr>
+          <a:lstStyle/>
+          <a:p>
+            <a:pPr algn="l">
+              <a:lnSpc>
+                <a:spcPct val="125000"/>
+              </a:lnSpc>
+            </a:pPr>
+            <a:r>
+              <a:rPr sz="1000" b="0">
+                <a:solidFill>
+                  <a:srgbClr val="94A3B8"/>
+                </a:solidFill>
+                <a:latin typeface="Segoe UI"/>
+              </a:rPr>
+              <a:t>Implementación de Soluciones para Plataformas Web · ISP-08-2025
+Docente: Dr. Jack Harry Peralta Cáceres · 19/10/2026</a:t>
             </a:r>
           </a:p>
         </p:txBody>
@@ -4309,20 +3470,210 @@
       <p:grpSpPr/>
       <p:sp>
         <p:nvSpPr>
-          <p:cNvPr id="2" name="Title 1"/>
-          <p:cNvSpPr>
-            <a:spLocks noGrp="1"/>
-          </p:cNvSpPr>
-          <p:nvPr>
-            <p:ph type="title"/>
-          </p:nvPr>
-        </p:nvSpPr>
-        <p:spPr/>
-        <p:txBody>
-          <a:bodyPr/>
-          <a:lstStyle/>
-          <a:p>
-            <a:r>
+          <p:cNvPr id="2" name="Rectangle 1"/>
+          <p:cNvSpPr/>
+          <p:nvPr/>
+        </p:nvSpPr>
+        <p:spPr>
+          <a:xfrm>
+            <a:off x="0" y="0"/>
+            <a:ext cx="12191695" cy="6858000"/>
+          </a:xfrm>
+          <a:prstGeom prst="rect">
+            <a:avLst/>
+          </a:prstGeom>
+          <a:solidFill>
+            <a:srgbClr val="0B1220"/>
+          </a:solidFill>
+          <a:ln>
+            <a:noFill/>
+          </a:ln>
+        </p:spPr>
+        <p:style>
+          <a:lnRef idx="1">
+            <a:schemeClr val="accent1"/>
+          </a:lnRef>
+          <a:fillRef idx="3">
+            <a:schemeClr val="accent1"/>
+          </a:fillRef>
+          <a:effectRef idx="2">
+            <a:schemeClr val="accent1"/>
+          </a:effectRef>
+          <a:fontRef idx="minor">
+            <a:schemeClr val="lt1"/>
+          </a:fontRef>
+        </p:style>
+        <p:txBody>
+          <a:bodyPr rtlCol="0" anchor="ctr"/>
+          <a:lstStyle/>
+          <a:p>
+            <a:pPr algn="ctr"/>
+          </a:p>
+        </p:txBody>
+      </p:sp>
+      <p:sp>
+        <p:nvSpPr>
+          <p:cNvPr id="3" name="Rectangle 2"/>
+          <p:cNvSpPr/>
+          <p:nvPr/>
+        </p:nvSpPr>
+        <p:spPr>
+          <a:xfrm>
+            <a:off x="0" y="0"/>
+            <a:ext cx="12191695" cy="41148"/>
+          </a:xfrm>
+          <a:prstGeom prst="rect">
+            <a:avLst/>
+          </a:prstGeom>
+          <a:solidFill>
+            <a:srgbClr val="22D3EE"/>
+          </a:solidFill>
+          <a:ln>
+            <a:noFill/>
+          </a:ln>
+        </p:spPr>
+        <p:style>
+          <a:lnRef idx="1">
+            <a:schemeClr val="accent1"/>
+          </a:lnRef>
+          <a:fillRef idx="3">
+            <a:schemeClr val="accent1"/>
+          </a:fillRef>
+          <a:effectRef idx="2">
+            <a:schemeClr val="accent1"/>
+          </a:effectRef>
+          <a:fontRef idx="minor">
+            <a:schemeClr val="lt1"/>
+          </a:fontRef>
+        </p:style>
+        <p:txBody>
+          <a:bodyPr rtlCol="0" anchor="ctr"/>
+          <a:lstStyle/>
+          <a:p>
+            <a:pPr algn="ctr"/>
+          </a:p>
+        </p:txBody>
+      </p:sp>
+      <p:sp>
+        <p:nvSpPr>
+          <p:cNvPr id="4" name="Rounded Rectangle 3"/>
+          <p:cNvSpPr/>
+          <p:nvPr/>
+        </p:nvSpPr>
+        <p:spPr>
+          <a:xfrm>
+            <a:off x="548640" y="384048"/>
+            <a:ext cx="566928" cy="310896"/>
+          </a:xfrm>
+          <a:prstGeom prst="roundRect">
+            <a:avLst>
+              <a:gd name="adj" fmla="val 30000"/>
+            </a:avLst>
+          </a:prstGeom>
+          <a:solidFill>
+            <a:srgbClr val="111C2E"/>
+          </a:solidFill>
+          <a:ln w="12700">
+            <a:solidFill>
+              <a:srgbClr val="22D3EE"/>
+            </a:solidFill>
+          </a:ln>
+        </p:spPr>
+        <p:style>
+          <a:lnRef idx="1">
+            <a:schemeClr val="accent1"/>
+          </a:lnRef>
+          <a:fillRef idx="3">
+            <a:schemeClr val="accent1"/>
+          </a:fillRef>
+          <a:effectRef idx="2">
+            <a:schemeClr val="accent1"/>
+          </a:effectRef>
+          <a:fontRef idx="minor">
+            <a:schemeClr val="lt1"/>
+          </a:fontRef>
+        </p:style>
+        <p:txBody>
+          <a:bodyPr rtlCol="0" anchor="ctr"/>
+          <a:lstStyle/>
+          <a:p>
+            <a:pPr algn="ctr"/>
+          </a:p>
+        </p:txBody>
+      </p:sp>
+      <p:sp>
+        <p:nvSpPr>
+          <p:cNvPr id="5" name="TextBox 4"/>
+          <p:cNvSpPr txBox="1"/>
+          <p:nvPr/>
+        </p:nvSpPr>
+        <p:spPr>
+          <a:xfrm>
+            <a:off x="548640" y="411480"/>
+            <a:ext cx="566928" cy="256032"/>
+          </a:xfrm>
+          <a:prstGeom prst="rect">
+            <a:avLst/>
+          </a:prstGeom>
+          <a:noFill/>
+        </p:spPr>
+        <p:txBody>
+          <a:bodyPr wrap="square" anchor="t" lIns="25400" rIns="25400" tIns="0" bIns="0">
+            <a:spAutoFit/>
+          </a:bodyPr>
+          <a:lstStyle/>
+          <a:p>
+            <a:pPr algn="ctr">
+              <a:lnSpc>
+                <a:spcPct val="112000"/>
+              </a:lnSpc>
+            </a:pPr>
+            <a:r>
+              <a:rPr sz="1000" b="1">
+                <a:solidFill>
+                  <a:srgbClr val="22D3EE"/>
+                </a:solidFill>
+                <a:latin typeface="Segoe UI"/>
+              </a:rPr>
+              <a:t>10</a:t>
+            </a:r>
+          </a:p>
+        </p:txBody>
+      </p:sp>
+      <p:sp>
+        <p:nvSpPr>
+          <p:cNvPr id="6" name="TextBox 5"/>
+          <p:cNvSpPr txBox="1"/>
+          <p:nvPr/>
+        </p:nvSpPr>
+        <p:spPr>
+          <a:xfrm>
+            <a:off x="1280160" y="310896"/>
+            <a:ext cx="10180015" cy="914400"/>
+          </a:xfrm>
+          <a:prstGeom prst="rect">
+            <a:avLst/>
+          </a:prstGeom>
+          <a:noFill/>
+        </p:spPr>
+        <p:txBody>
+          <a:bodyPr wrap="square" anchor="t" lIns="25400" rIns="25400" tIns="0" bIns="0">
+            <a:spAutoFit/>
+          </a:bodyPr>
+          <a:lstStyle/>
+          <a:p>
+            <a:pPr algn="l">
+              <a:lnSpc>
+                <a:spcPct val="100000"/>
+              </a:lnSpc>
+            </a:pPr>
+            <a:r>
+              <a:rPr sz="2700" b="1">
+                <a:solidFill>
+                  <a:srgbClr val="F8FAFC"/>
+                </a:solidFill>
+                <a:latin typeface="Segoe UI"/>
+              </a:rPr>
               <a:t>Kubernetes local y observabilidad</a:t>
             </a:r>
           </a:p>
@@ -4330,44 +3681,285 @@
       </p:sp>
       <p:sp>
         <p:nvSpPr>
-          <p:cNvPr id="3" name="Content Placeholder 2"/>
-          <p:cNvSpPr>
-            <a:spLocks noGrp="1"/>
-          </p:cNvSpPr>
-          <p:nvPr>
-            <p:ph idx="1"/>
-          </p:nvPr>
-        </p:nvSpPr>
-        <p:spPr/>
-        <p:txBody>
-          <a:bodyPr/>
-          <a:lstStyle/>
-          <a:p>
-            <a:pPr/>
-            <a:r>
-              <a:rPr sz="1500"/>
+          <p:cNvPr id="7" name="TextBox 6"/>
+          <p:cNvSpPr txBox="1"/>
+          <p:nvPr/>
+        </p:nvSpPr>
+        <p:spPr>
+          <a:xfrm>
+            <a:off x="548640" y="1828800"/>
+            <a:ext cx="6492240" cy="4114800"/>
+          </a:xfrm>
+          <a:prstGeom prst="rect">
+            <a:avLst/>
+          </a:prstGeom>
+          <a:noFill/>
+        </p:spPr>
+        <p:txBody>
+          <a:bodyPr wrap="square" lIns="0" rIns="0">
+            <a:spAutoFit/>
+          </a:bodyPr>
+          <a:lstStyle/>
+          <a:p>
+            <a:pPr marL="233680" indent="-233680">
+              <a:lnSpc>
+                <a:spcPct val="118000"/>
+              </a:lnSpc>
+              <a:spcAft>
+                <a:spcPts val="1500"/>
+              </a:spcAft>
+            </a:pPr>
+            <a:r>
+              <a:rPr sz="1380">
+                <a:solidFill>
+                  <a:srgbClr val="22D3EE"/>
+                </a:solidFill>
+                <a:latin typeface="Segoe UI"/>
+              </a:rPr>
+              <a:t>▸  </a:t>
+            </a:r>
+            <a:r>
+              <a:rPr sz="1380">
+                <a:solidFill>
+                  <a:srgbClr val="E2E8F0"/>
+                </a:solidFill>
+                <a:latin typeface="Segoe UI"/>
+              </a:rPr>
               <a:t>11 objetos definidos y validados offline con kustomize: Namespace, ConfigMap, PVC, Job de migraciones, Deployments, Services e Ingress.</a:t>
             </a:r>
           </a:p>
           <a:p>
-            <a:pPr/>
-            <a:r>
-              <a:rPr sz="1500"/>
+            <a:pPr marL="233680" indent="-233680">
+              <a:lnSpc>
+                <a:spcPct val="118000"/>
+              </a:lnSpc>
+              <a:spcAft>
+                <a:spcPts val="1500"/>
+              </a:spcAft>
+            </a:pPr>
+            <a:r>
+              <a:rPr sz="1380">
+                <a:solidFill>
+                  <a:srgbClr val="22D3EE"/>
+                </a:solidFill>
+                <a:latin typeface="Segoe UI"/>
+              </a:rPr>
+              <a:t>▸  </a:t>
+            </a:r>
+            <a:r>
+              <a:rPr sz="1380">
+                <a:solidFill>
+                  <a:srgbClr val="E2E8F0"/>
+                </a:solidFill>
+                <a:latin typeface="Segoe UI"/>
+              </a:rPr>
               <a:t>En el cluster el esquema lo aplica Alembic con el Job de migraciones, no los scripts de inicialización.</a:t>
             </a:r>
           </a:p>
           <a:p>
-            <a:pPr/>
-            <a:r>
-              <a:rPr sz="1500"/>
+            <a:pPr marL="233680" indent="-233680">
+              <a:lnSpc>
+                <a:spcPct val="118000"/>
+              </a:lnSpc>
+              <a:spcAft>
+                <a:spcPts val="1500"/>
+              </a:spcAft>
+            </a:pPr>
+            <a:r>
+              <a:rPr sz="1380">
+                <a:solidFill>
+                  <a:srgbClr val="22D3EE"/>
+                </a:solidFill>
+                <a:latin typeface="Segoe UI"/>
+              </a:rPr>
+              <a:t>▸  </a:t>
+            </a:r>
+            <a:r>
+              <a:rPr sz="1380">
+                <a:solidFill>
+                  <a:srgbClr val="E2E8F0"/>
+                </a:solidFill>
+                <a:latin typeface="Segoe UI"/>
+              </a:rPr>
               <a:t>Observabilidad corriendo: 3 targets up y un dashboard API RED con 9 paneles con datos, provisionado desde el repositorio.</a:t>
             </a:r>
           </a:p>
           <a:p>
-            <a:pPr/>
-            <a:r>
-              <a:rPr sz="1500" b="1"/>
+            <a:pPr marL="233680" indent="-233680">
+              <a:lnSpc>
+                <a:spcPct val="118000"/>
+              </a:lnSpc>
+              <a:spcAft>
+                <a:spcPts val="1500"/>
+              </a:spcAft>
+            </a:pPr>
+            <a:r>
+              <a:rPr sz="1380">
+                <a:solidFill>
+                  <a:srgbClr val="22D3EE"/>
+                </a:solidFill>
+                <a:latin typeface="Segoe UI"/>
+              </a:rPr>
+              <a:t>▸  </a:t>
+            </a:r>
+            <a:r>
+              <a:rPr sz="1380">
+                <a:solidFill>
+                  <a:srgbClr val="E2E8F0"/>
+                </a:solidFill>
+                <a:latin typeface="Segoe UI"/>
+              </a:rPr>
               <a:t>ESTADO REAL: el cluster NO está desplegado en esta máquina — minikube no está instalado y espera aprobación (A-02).</a:t>
+            </a:r>
+          </a:p>
+        </p:txBody>
+      </p:sp>
+      <p:pic>
+        <p:nvPicPr>
+          <p:cNvPr id="8" name="Picture 7" descr="_recorte_arq_484x415.jpg"/>
+          <p:cNvPicPr>
+            <a:picLocks noChangeAspect="1"/>
+          </p:cNvPicPr>
+          <p:nvPr/>
+        </p:nvPicPr>
+        <p:blipFill>
+          <a:blip r:embed="rId2"/>
+          <a:stretch>
+            <a:fillRect/>
+          </a:stretch>
+        </p:blipFill>
+        <p:spPr>
+          <a:xfrm>
+            <a:off x="7269480" y="1737360"/>
+            <a:ext cx="4434840" cy="3794760"/>
+          </a:xfrm>
+          <a:prstGeom prst="rect">
+            <a:avLst/>
+          </a:prstGeom>
+          <a:ln w="12700">
+            <a:solidFill>
+              <a:srgbClr val="1E293B"/>
+            </a:solidFill>
+          </a:ln>
+        </p:spPr>
+      </p:pic>
+      <p:sp>
+        <p:nvSpPr>
+          <p:cNvPr id="9" name="Rectangle 8"/>
+          <p:cNvSpPr/>
+          <p:nvPr/>
+        </p:nvSpPr>
+        <p:spPr>
+          <a:xfrm>
+            <a:off x="548640" y="6272784"/>
+            <a:ext cx="11094415" cy="9525"/>
+          </a:xfrm>
+          <a:prstGeom prst="rect">
+            <a:avLst/>
+          </a:prstGeom>
+          <a:solidFill>
+            <a:srgbClr val="1E293B"/>
+          </a:solidFill>
+          <a:ln>
+            <a:noFill/>
+          </a:ln>
+        </p:spPr>
+        <p:style>
+          <a:lnRef idx="1">
+            <a:schemeClr val="accent1"/>
+          </a:lnRef>
+          <a:fillRef idx="3">
+            <a:schemeClr val="accent1"/>
+          </a:fillRef>
+          <a:effectRef idx="2">
+            <a:schemeClr val="accent1"/>
+          </a:effectRef>
+          <a:fontRef idx="minor">
+            <a:schemeClr val="lt1"/>
+          </a:fontRef>
+        </p:style>
+        <p:txBody>
+          <a:bodyPr rtlCol="0" anchor="ctr"/>
+          <a:lstStyle/>
+          <a:p>
+            <a:pPr algn="ctr"/>
+          </a:p>
+        </p:txBody>
+      </p:sp>
+      <p:sp>
+        <p:nvSpPr>
+          <p:cNvPr id="10" name="TextBox 9"/>
+          <p:cNvSpPr txBox="1"/>
+          <p:nvPr/>
+        </p:nvSpPr>
+        <p:spPr>
+          <a:xfrm>
+            <a:off x="548640" y="6355080"/>
+            <a:ext cx="8229600" cy="274320"/>
+          </a:xfrm>
+          <a:prstGeom prst="rect">
+            <a:avLst/>
+          </a:prstGeom>
+          <a:noFill/>
+        </p:spPr>
+        <p:txBody>
+          <a:bodyPr wrap="square" anchor="t" lIns="25400" rIns="25400" tIns="0" bIns="0">
+            <a:spAutoFit/>
+          </a:bodyPr>
+          <a:lstStyle/>
+          <a:p>
+            <a:pPr algn="l">
+              <a:lnSpc>
+                <a:spcPct val="112000"/>
+              </a:lnSpc>
+            </a:pPr>
+            <a:r>
+              <a:rPr sz="900" b="0">
+                <a:solidFill>
+                  <a:srgbClr val="94A3B8"/>
+                </a:solidFill>
+                <a:latin typeface="Segoe UI"/>
+              </a:rPr>
+              <a:t>GS08 · Matrículas y Notas — Trabajo colaborativo · Arteaga Rullier · Inocencio Gargate</a:t>
+            </a:r>
+          </a:p>
+        </p:txBody>
+      </p:sp>
+      <p:sp>
+        <p:nvSpPr>
+          <p:cNvPr id="11" name="TextBox 10"/>
+          <p:cNvSpPr txBox="1"/>
+          <p:nvPr/>
+        </p:nvSpPr>
+        <p:spPr>
+          <a:xfrm>
+            <a:off x="10728655" y="6355080"/>
+            <a:ext cx="914400" cy="274320"/>
+          </a:xfrm>
+          <a:prstGeom prst="rect">
+            <a:avLst/>
+          </a:prstGeom>
+          <a:noFill/>
+        </p:spPr>
+        <p:txBody>
+          <a:bodyPr wrap="square" anchor="t" lIns="25400" rIns="25400" tIns="0" bIns="0">
+            <a:spAutoFit/>
+          </a:bodyPr>
+          <a:lstStyle/>
+          <a:p>
+            <a:pPr algn="r">
+              <a:lnSpc>
+                <a:spcPct val="112000"/>
+              </a:lnSpc>
+            </a:pPr>
+            <a:r>
+              <a:rPr sz="900" b="0">
+                <a:solidFill>
+                  <a:srgbClr val="94A3B8"/>
+                </a:solidFill>
+                <a:latin typeface="Segoe UI"/>
+              </a:rPr>
+              <a:t>10 / 13</a:t>
             </a:r>
           </a:p>
         </p:txBody>
@@ -4392,20 +3984,210 @@
       <p:grpSpPr/>
       <p:sp>
         <p:nvSpPr>
-          <p:cNvPr id="2" name="Title 1"/>
-          <p:cNvSpPr>
-            <a:spLocks noGrp="1"/>
-          </p:cNvSpPr>
-          <p:nvPr>
-            <p:ph type="title"/>
-          </p:nvPr>
-        </p:nvSpPr>
-        <p:spPr/>
-        <p:txBody>
-          <a:bodyPr/>
-          <a:lstStyle/>
-          <a:p>
-            <a:r>
+          <p:cNvPr id="2" name="Rectangle 1"/>
+          <p:cNvSpPr/>
+          <p:nvPr/>
+        </p:nvSpPr>
+        <p:spPr>
+          <a:xfrm>
+            <a:off x="0" y="0"/>
+            <a:ext cx="12191695" cy="6858000"/>
+          </a:xfrm>
+          <a:prstGeom prst="rect">
+            <a:avLst/>
+          </a:prstGeom>
+          <a:solidFill>
+            <a:srgbClr val="0B1220"/>
+          </a:solidFill>
+          <a:ln>
+            <a:noFill/>
+          </a:ln>
+        </p:spPr>
+        <p:style>
+          <a:lnRef idx="1">
+            <a:schemeClr val="accent1"/>
+          </a:lnRef>
+          <a:fillRef idx="3">
+            <a:schemeClr val="accent1"/>
+          </a:fillRef>
+          <a:effectRef idx="2">
+            <a:schemeClr val="accent1"/>
+          </a:effectRef>
+          <a:fontRef idx="minor">
+            <a:schemeClr val="lt1"/>
+          </a:fontRef>
+        </p:style>
+        <p:txBody>
+          <a:bodyPr rtlCol="0" anchor="ctr"/>
+          <a:lstStyle/>
+          <a:p>
+            <a:pPr algn="ctr"/>
+          </a:p>
+        </p:txBody>
+      </p:sp>
+      <p:sp>
+        <p:nvSpPr>
+          <p:cNvPr id="3" name="Rectangle 2"/>
+          <p:cNvSpPr/>
+          <p:nvPr/>
+        </p:nvSpPr>
+        <p:spPr>
+          <a:xfrm>
+            <a:off x="0" y="0"/>
+            <a:ext cx="12191695" cy="41148"/>
+          </a:xfrm>
+          <a:prstGeom prst="rect">
+            <a:avLst/>
+          </a:prstGeom>
+          <a:solidFill>
+            <a:srgbClr val="22D3EE"/>
+          </a:solidFill>
+          <a:ln>
+            <a:noFill/>
+          </a:ln>
+        </p:spPr>
+        <p:style>
+          <a:lnRef idx="1">
+            <a:schemeClr val="accent1"/>
+          </a:lnRef>
+          <a:fillRef idx="3">
+            <a:schemeClr val="accent1"/>
+          </a:fillRef>
+          <a:effectRef idx="2">
+            <a:schemeClr val="accent1"/>
+          </a:effectRef>
+          <a:fontRef idx="minor">
+            <a:schemeClr val="lt1"/>
+          </a:fontRef>
+        </p:style>
+        <p:txBody>
+          <a:bodyPr rtlCol="0" anchor="ctr"/>
+          <a:lstStyle/>
+          <a:p>
+            <a:pPr algn="ctr"/>
+          </a:p>
+        </p:txBody>
+      </p:sp>
+      <p:sp>
+        <p:nvSpPr>
+          <p:cNvPr id="4" name="Rounded Rectangle 3"/>
+          <p:cNvSpPr/>
+          <p:nvPr/>
+        </p:nvSpPr>
+        <p:spPr>
+          <a:xfrm>
+            <a:off x="548640" y="384048"/>
+            <a:ext cx="566928" cy="310896"/>
+          </a:xfrm>
+          <a:prstGeom prst="roundRect">
+            <a:avLst>
+              <a:gd name="adj" fmla="val 30000"/>
+            </a:avLst>
+          </a:prstGeom>
+          <a:solidFill>
+            <a:srgbClr val="111C2E"/>
+          </a:solidFill>
+          <a:ln w="12700">
+            <a:solidFill>
+              <a:srgbClr val="22D3EE"/>
+            </a:solidFill>
+          </a:ln>
+        </p:spPr>
+        <p:style>
+          <a:lnRef idx="1">
+            <a:schemeClr val="accent1"/>
+          </a:lnRef>
+          <a:fillRef idx="3">
+            <a:schemeClr val="accent1"/>
+          </a:fillRef>
+          <a:effectRef idx="2">
+            <a:schemeClr val="accent1"/>
+          </a:effectRef>
+          <a:fontRef idx="minor">
+            <a:schemeClr val="lt1"/>
+          </a:fontRef>
+        </p:style>
+        <p:txBody>
+          <a:bodyPr rtlCol="0" anchor="ctr"/>
+          <a:lstStyle/>
+          <a:p>
+            <a:pPr algn="ctr"/>
+          </a:p>
+        </p:txBody>
+      </p:sp>
+      <p:sp>
+        <p:nvSpPr>
+          <p:cNvPr id="5" name="TextBox 4"/>
+          <p:cNvSpPr txBox="1"/>
+          <p:nvPr/>
+        </p:nvSpPr>
+        <p:spPr>
+          <a:xfrm>
+            <a:off x="548640" y="411480"/>
+            <a:ext cx="566928" cy="256032"/>
+          </a:xfrm>
+          <a:prstGeom prst="rect">
+            <a:avLst/>
+          </a:prstGeom>
+          <a:noFill/>
+        </p:spPr>
+        <p:txBody>
+          <a:bodyPr wrap="square" anchor="t" lIns="25400" rIns="25400" tIns="0" bIns="0">
+            <a:spAutoFit/>
+          </a:bodyPr>
+          <a:lstStyle/>
+          <a:p>
+            <a:pPr algn="ctr">
+              <a:lnSpc>
+                <a:spcPct val="112000"/>
+              </a:lnSpc>
+            </a:pPr>
+            <a:r>
+              <a:rPr sz="1000" b="1">
+                <a:solidFill>
+                  <a:srgbClr val="22D3EE"/>
+                </a:solidFill>
+                <a:latin typeface="Segoe UI"/>
+              </a:rPr>
+              <a:t>11</a:t>
+            </a:r>
+          </a:p>
+        </p:txBody>
+      </p:sp>
+      <p:sp>
+        <p:nvSpPr>
+          <p:cNvPr id="6" name="TextBox 5"/>
+          <p:cNvSpPr txBox="1"/>
+          <p:nvPr/>
+        </p:nvSpPr>
+        <p:spPr>
+          <a:xfrm>
+            <a:off x="1280160" y="310896"/>
+            <a:ext cx="10180015" cy="914400"/>
+          </a:xfrm>
+          <a:prstGeom prst="rect">
+            <a:avLst/>
+          </a:prstGeom>
+          <a:noFill/>
+        </p:spPr>
+        <p:txBody>
+          <a:bodyPr wrap="square" anchor="t" lIns="25400" rIns="25400" tIns="0" bIns="0">
+            <a:spAutoFit/>
+          </a:bodyPr>
+          <a:lstStyle/>
+          <a:p>
+            <a:pPr algn="l">
+              <a:lnSpc>
+                <a:spcPct val="100000"/>
+              </a:lnSpc>
+            </a:pPr>
+            <a:r>
+              <a:rPr sz="2700" b="1">
+                <a:solidFill>
+                  <a:srgbClr val="F8FAFC"/>
+                </a:solidFill>
+                <a:latin typeface="Segoe UI"/>
+              </a:rPr>
               <a:t>Calidad: 39 criterios y lo que apareció probando</a:t>
             </a:r>
           </a:p>
@@ -4413,44 +4195,285 @@
       </p:sp>
       <p:sp>
         <p:nvSpPr>
-          <p:cNvPr id="3" name="Content Placeholder 2"/>
-          <p:cNvSpPr>
-            <a:spLocks noGrp="1"/>
-          </p:cNvSpPr>
-          <p:nvPr>
-            <p:ph idx="1"/>
-          </p:nvPr>
-        </p:nvSpPr>
-        <p:spPr/>
-        <p:txBody>
-          <a:bodyPr/>
-          <a:lstStyle/>
-          <a:p>
-            <a:pPr/>
-            <a:r>
-              <a:rPr sz="1500"/>
+          <p:cNvPr id="7" name="TextBox 6"/>
+          <p:cNvSpPr txBox="1"/>
+          <p:nvPr/>
+        </p:nvSpPr>
+        <p:spPr>
+          <a:xfrm>
+            <a:off x="548640" y="1828800"/>
+            <a:ext cx="6492240" cy="4114800"/>
+          </a:xfrm>
+          <a:prstGeom prst="rect">
+            <a:avLst/>
+          </a:prstGeom>
+          <a:noFill/>
+        </p:spPr>
+        <p:txBody>
+          <a:bodyPr wrap="square" lIns="0" rIns="0">
+            <a:spAutoFit/>
+          </a:bodyPr>
+          <a:lstStyle/>
+          <a:p>
+            <a:pPr marL="233680" indent="-233680">
+              <a:lnSpc>
+                <a:spcPct val="118000"/>
+              </a:lnSpc>
+              <a:spcAft>
+                <a:spcPts val="1500"/>
+              </a:spcAft>
+            </a:pPr>
+            <a:r>
+              <a:rPr sz="1320">
+                <a:solidFill>
+                  <a:srgbClr val="22D3EE"/>
+                </a:solidFill>
+                <a:latin typeface="Segoe UI"/>
+              </a:rPr>
+              <a:t>▸  </a:t>
+            </a:r>
+            <a:r>
+              <a:rPr sz="1320">
+                <a:solidFill>
+                  <a:srgbClr val="E2E8F0"/>
+                </a:solidFill>
+                <a:latin typeface="Segoe UI"/>
+              </a:rPr>
               <a:t>Los 39 criterios del alcance quedan cubiertos con corrida real: recorrido E2E de 39 OK y las pruebas automatizadas (121 del backend con 90 % de cobertura y 25 del SPA).</a:t>
             </a:r>
           </a:p>
           <a:p>
-            <a:pPr/>
-            <a:r>
-              <a:rPr sz="1500"/>
+            <a:pPr marL="233680" indent="-233680">
+              <a:lnSpc>
+                <a:spcPct val="118000"/>
+              </a:lnSpc>
+              <a:spcAft>
+                <a:spcPts val="1500"/>
+              </a:spcAft>
+            </a:pPr>
+            <a:r>
+              <a:rPr sz="1320">
+                <a:solidFill>
+                  <a:srgbClr val="22D3EE"/>
+                </a:solidFill>
+                <a:latin typeface="Segoe UI"/>
+              </a:rPr>
+              <a:t>▸  </a:t>
+            </a:r>
+            <a:r>
+              <a:rPr sz="1320">
+                <a:solidFill>
+                  <a:srgbClr val="E2E8F0"/>
+                </a:solidFill>
+                <a:latin typeface="Segoe UI"/>
+              </a:rPr>
               <a:t>9 bugs del sistema y 4 del propio script de pruebas, todos cerrados con evidencia: un bug no se cierra por decisión, se cierra con la corrida verde pegada.</a:t>
             </a:r>
           </a:p>
           <a:p>
-            <a:pPr/>
-            <a:r>
-              <a:rPr sz="1500"/>
+            <a:pPr marL="233680" indent="-233680">
+              <a:lnSpc>
+                <a:spcPct val="118000"/>
+              </a:lnSpc>
+              <a:spcAft>
+                <a:spcPts val="1500"/>
+              </a:spcAft>
+            </a:pPr>
+            <a:r>
+              <a:rPr sz="1320">
+                <a:solidFill>
+                  <a:srgbClr val="22D3EE"/>
+                </a:solidFill>
+                <a:latin typeface="Segoe UI"/>
+              </a:rPr>
+              <a:t>▸  </a:t>
+            </a:r>
+            <a:r>
+              <a:rPr sz="1320">
+                <a:solidFill>
+                  <a:srgbClr val="E2E8F0"/>
+                </a:solidFill>
+                <a:latin typeface="Segoe UI"/>
+              </a:rPr>
               <a:t>Verificar en el navegador encontró 3 cosas que las pruebas simuladas no ven (D-31): un fallo transitorio de Mongo o Redis apagaba la bitácora para siempre, la pantalla de Auditoría decía «apagada» cuando la consulta había fallado, y una sesión vencida dejaba un estado falso.</a:t>
             </a:r>
           </a:p>
           <a:p>
-            <a:pPr/>
-            <a:r>
-              <a:rPr sz="1500" b="1"/>
+            <a:pPr marL="233680" indent="-233680">
+              <a:lnSpc>
+                <a:spcPct val="118000"/>
+              </a:lnSpc>
+              <a:spcAft>
+                <a:spcPts val="1500"/>
+              </a:spcAft>
+            </a:pPr>
+            <a:r>
+              <a:rPr sz="1320">
+                <a:solidFill>
+                  <a:srgbClr val="22D3EE"/>
+                </a:solidFill>
+                <a:latin typeface="Segoe UI"/>
+              </a:rPr>
+              <a:t>▸  </a:t>
+            </a:r>
+            <a:r>
+              <a:rPr sz="1320">
+                <a:solidFill>
+                  <a:srgbClr val="E2E8F0"/>
+                </a:solidFill>
+                <a:latin typeface="Segoe UI"/>
+              </a:rPr>
               <a:t>Regla de la casa: un bug no se cierra por decisión, se cierra con la corrida verde pegada.</a:t>
+            </a:r>
+          </a:p>
+        </p:txBody>
+      </p:sp>
+      <p:pic>
+        <p:nvPicPr>
+          <p:cNvPr id="8" name="Picture 7" descr="_recorte_api_484x415.jpg"/>
+          <p:cNvPicPr>
+            <a:picLocks noChangeAspect="1"/>
+          </p:cNvPicPr>
+          <p:nvPr/>
+        </p:nvPicPr>
+        <p:blipFill>
+          <a:blip r:embed="rId2"/>
+          <a:stretch>
+            <a:fillRect/>
+          </a:stretch>
+        </p:blipFill>
+        <p:spPr>
+          <a:xfrm>
+            <a:off x="7269480" y="1737360"/>
+            <a:ext cx="4434840" cy="3794760"/>
+          </a:xfrm>
+          <a:prstGeom prst="rect">
+            <a:avLst/>
+          </a:prstGeom>
+          <a:ln w="12700">
+            <a:solidFill>
+              <a:srgbClr val="1E293B"/>
+            </a:solidFill>
+          </a:ln>
+        </p:spPr>
+      </p:pic>
+      <p:sp>
+        <p:nvSpPr>
+          <p:cNvPr id="9" name="Rectangle 8"/>
+          <p:cNvSpPr/>
+          <p:nvPr/>
+        </p:nvSpPr>
+        <p:spPr>
+          <a:xfrm>
+            <a:off x="548640" y="6272784"/>
+            <a:ext cx="11094415" cy="9525"/>
+          </a:xfrm>
+          <a:prstGeom prst="rect">
+            <a:avLst/>
+          </a:prstGeom>
+          <a:solidFill>
+            <a:srgbClr val="1E293B"/>
+          </a:solidFill>
+          <a:ln>
+            <a:noFill/>
+          </a:ln>
+        </p:spPr>
+        <p:style>
+          <a:lnRef idx="1">
+            <a:schemeClr val="accent1"/>
+          </a:lnRef>
+          <a:fillRef idx="3">
+            <a:schemeClr val="accent1"/>
+          </a:fillRef>
+          <a:effectRef idx="2">
+            <a:schemeClr val="accent1"/>
+          </a:effectRef>
+          <a:fontRef idx="minor">
+            <a:schemeClr val="lt1"/>
+          </a:fontRef>
+        </p:style>
+        <p:txBody>
+          <a:bodyPr rtlCol="0" anchor="ctr"/>
+          <a:lstStyle/>
+          <a:p>
+            <a:pPr algn="ctr"/>
+          </a:p>
+        </p:txBody>
+      </p:sp>
+      <p:sp>
+        <p:nvSpPr>
+          <p:cNvPr id="10" name="TextBox 9"/>
+          <p:cNvSpPr txBox="1"/>
+          <p:nvPr/>
+        </p:nvSpPr>
+        <p:spPr>
+          <a:xfrm>
+            <a:off x="548640" y="6355080"/>
+            <a:ext cx="8229600" cy="274320"/>
+          </a:xfrm>
+          <a:prstGeom prst="rect">
+            <a:avLst/>
+          </a:prstGeom>
+          <a:noFill/>
+        </p:spPr>
+        <p:txBody>
+          <a:bodyPr wrap="square" anchor="t" lIns="25400" rIns="25400" tIns="0" bIns="0">
+            <a:spAutoFit/>
+          </a:bodyPr>
+          <a:lstStyle/>
+          <a:p>
+            <a:pPr algn="l">
+              <a:lnSpc>
+                <a:spcPct val="112000"/>
+              </a:lnSpc>
+            </a:pPr>
+            <a:r>
+              <a:rPr sz="900" b="0">
+                <a:solidFill>
+                  <a:srgbClr val="94A3B8"/>
+                </a:solidFill>
+                <a:latin typeface="Segoe UI"/>
+              </a:rPr>
+              <a:t>GS08 · Matrículas y Notas — Trabajo colaborativo · Arteaga Rullier · Inocencio Gargate</a:t>
+            </a:r>
+          </a:p>
+        </p:txBody>
+      </p:sp>
+      <p:sp>
+        <p:nvSpPr>
+          <p:cNvPr id="11" name="TextBox 10"/>
+          <p:cNvSpPr txBox="1"/>
+          <p:nvPr/>
+        </p:nvSpPr>
+        <p:spPr>
+          <a:xfrm>
+            <a:off x="10728655" y="6355080"/>
+            <a:ext cx="914400" cy="274320"/>
+          </a:xfrm>
+          <a:prstGeom prst="rect">
+            <a:avLst/>
+          </a:prstGeom>
+          <a:noFill/>
+        </p:spPr>
+        <p:txBody>
+          <a:bodyPr wrap="square" anchor="t" lIns="25400" rIns="25400" tIns="0" bIns="0">
+            <a:spAutoFit/>
+          </a:bodyPr>
+          <a:lstStyle/>
+          <a:p>
+            <a:pPr algn="r">
+              <a:lnSpc>
+                <a:spcPct val="112000"/>
+              </a:lnSpc>
+            </a:pPr>
+            <a:r>
+              <a:rPr sz="900" b="0">
+                <a:solidFill>
+                  <a:srgbClr val="94A3B8"/>
+                </a:solidFill>
+                <a:latin typeface="Segoe UI"/>
+              </a:rPr>
+              <a:t>11 / 13</a:t>
             </a:r>
           </a:p>
         </p:txBody>
@@ -4475,54 +4498,210 @@
       <p:grpSpPr/>
       <p:sp>
         <p:nvSpPr>
-          <p:cNvPr id="2" name="Title 1"/>
-          <p:cNvSpPr>
-            <a:spLocks noGrp="1"/>
-          </p:cNvSpPr>
-          <p:nvPr>
-            <p:ph type="title"/>
-          </p:nvPr>
-        </p:nvSpPr>
-        <p:spPr/>
-        <p:txBody>
-          <a:bodyPr/>
-          <a:lstStyle/>
-          <a:p/>
-        </p:txBody>
-      </p:sp>
-      <p:sp>
-        <p:nvSpPr>
-          <p:cNvPr id="3" name="Content Placeholder 2"/>
-          <p:cNvSpPr>
-            <a:spLocks noGrp="1"/>
-          </p:cNvSpPr>
-          <p:nvPr>
-            <p:ph idx="1"/>
-          </p:nvPr>
-        </p:nvSpPr>
-        <p:spPr/>
-        <p:txBody>
-          <a:bodyPr/>
-          <a:lstStyle/>
-          <a:p/>
-        </p:txBody>
-      </p:sp>
-      <p:sp>
-        <p:nvSpPr>
-          <p:cNvPr id="2" name="Title 1"/>
-          <p:cNvSpPr>
-            <a:spLocks noGrp="1"/>
-          </p:cNvSpPr>
-          <p:nvPr>
-            <p:ph type="title"/>
-          </p:nvPr>
-        </p:nvSpPr>
-        <p:spPr/>
-        <p:txBody>
-          <a:bodyPr/>
-          <a:lstStyle/>
-          <a:p>
-            <a:r>
+          <p:cNvPr id="2" name="Rectangle 1"/>
+          <p:cNvSpPr/>
+          <p:nvPr/>
+        </p:nvSpPr>
+        <p:spPr>
+          <a:xfrm>
+            <a:off x="0" y="0"/>
+            <a:ext cx="12191695" cy="6858000"/>
+          </a:xfrm>
+          <a:prstGeom prst="rect">
+            <a:avLst/>
+          </a:prstGeom>
+          <a:solidFill>
+            <a:srgbClr val="0B1220"/>
+          </a:solidFill>
+          <a:ln>
+            <a:noFill/>
+          </a:ln>
+        </p:spPr>
+        <p:style>
+          <a:lnRef idx="1">
+            <a:schemeClr val="accent1"/>
+          </a:lnRef>
+          <a:fillRef idx="3">
+            <a:schemeClr val="accent1"/>
+          </a:fillRef>
+          <a:effectRef idx="2">
+            <a:schemeClr val="accent1"/>
+          </a:effectRef>
+          <a:fontRef idx="minor">
+            <a:schemeClr val="lt1"/>
+          </a:fontRef>
+        </p:style>
+        <p:txBody>
+          <a:bodyPr rtlCol="0" anchor="ctr"/>
+          <a:lstStyle/>
+          <a:p>
+            <a:pPr algn="ctr"/>
+          </a:p>
+        </p:txBody>
+      </p:sp>
+      <p:sp>
+        <p:nvSpPr>
+          <p:cNvPr id="3" name="Rectangle 2"/>
+          <p:cNvSpPr/>
+          <p:nvPr/>
+        </p:nvSpPr>
+        <p:spPr>
+          <a:xfrm>
+            <a:off x="0" y="0"/>
+            <a:ext cx="12191695" cy="41148"/>
+          </a:xfrm>
+          <a:prstGeom prst="rect">
+            <a:avLst/>
+          </a:prstGeom>
+          <a:solidFill>
+            <a:srgbClr val="22D3EE"/>
+          </a:solidFill>
+          <a:ln>
+            <a:noFill/>
+          </a:ln>
+        </p:spPr>
+        <p:style>
+          <a:lnRef idx="1">
+            <a:schemeClr val="accent1"/>
+          </a:lnRef>
+          <a:fillRef idx="3">
+            <a:schemeClr val="accent1"/>
+          </a:fillRef>
+          <a:effectRef idx="2">
+            <a:schemeClr val="accent1"/>
+          </a:effectRef>
+          <a:fontRef idx="minor">
+            <a:schemeClr val="lt1"/>
+          </a:fontRef>
+        </p:style>
+        <p:txBody>
+          <a:bodyPr rtlCol="0" anchor="ctr"/>
+          <a:lstStyle/>
+          <a:p>
+            <a:pPr algn="ctr"/>
+          </a:p>
+        </p:txBody>
+      </p:sp>
+      <p:sp>
+        <p:nvSpPr>
+          <p:cNvPr id="4" name="Rounded Rectangle 3"/>
+          <p:cNvSpPr/>
+          <p:nvPr/>
+        </p:nvSpPr>
+        <p:spPr>
+          <a:xfrm>
+            <a:off x="548640" y="384048"/>
+            <a:ext cx="566928" cy="310896"/>
+          </a:xfrm>
+          <a:prstGeom prst="roundRect">
+            <a:avLst>
+              <a:gd name="adj" fmla="val 30000"/>
+            </a:avLst>
+          </a:prstGeom>
+          <a:solidFill>
+            <a:srgbClr val="111C2E"/>
+          </a:solidFill>
+          <a:ln w="12700">
+            <a:solidFill>
+              <a:srgbClr val="22D3EE"/>
+            </a:solidFill>
+          </a:ln>
+        </p:spPr>
+        <p:style>
+          <a:lnRef idx="1">
+            <a:schemeClr val="accent1"/>
+          </a:lnRef>
+          <a:fillRef idx="3">
+            <a:schemeClr val="accent1"/>
+          </a:fillRef>
+          <a:effectRef idx="2">
+            <a:schemeClr val="accent1"/>
+          </a:effectRef>
+          <a:fontRef idx="minor">
+            <a:schemeClr val="lt1"/>
+          </a:fontRef>
+        </p:style>
+        <p:txBody>
+          <a:bodyPr rtlCol="0" anchor="ctr"/>
+          <a:lstStyle/>
+          <a:p>
+            <a:pPr algn="ctr"/>
+          </a:p>
+        </p:txBody>
+      </p:sp>
+      <p:sp>
+        <p:nvSpPr>
+          <p:cNvPr id="5" name="TextBox 4"/>
+          <p:cNvSpPr txBox="1"/>
+          <p:nvPr/>
+        </p:nvSpPr>
+        <p:spPr>
+          <a:xfrm>
+            <a:off x="548640" y="411480"/>
+            <a:ext cx="566928" cy="256032"/>
+          </a:xfrm>
+          <a:prstGeom prst="rect">
+            <a:avLst/>
+          </a:prstGeom>
+          <a:noFill/>
+        </p:spPr>
+        <p:txBody>
+          <a:bodyPr wrap="square" anchor="t" lIns="25400" rIns="25400" tIns="0" bIns="0">
+            <a:spAutoFit/>
+          </a:bodyPr>
+          <a:lstStyle/>
+          <a:p>
+            <a:pPr algn="ctr">
+              <a:lnSpc>
+                <a:spcPct val="112000"/>
+              </a:lnSpc>
+            </a:pPr>
+            <a:r>
+              <a:rPr sz="1000" b="1">
+                <a:solidFill>
+                  <a:srgbClr val="22D3EE"/>
+                </a:solidFill>
+                <a:latin typeface="Segoe UI"/>
+              </a:rPr>
+              <a:t>12</a:t>
+            </a:r>
+          </a:p>
+        </p:txBody>
+      </p:sp>
+      <p:sp>
+        <p:nvSpPr>
+          <p:cNvPr id="6" name="TextBox 5"/>
+          <p:cNvSpPr txBox="1"/>
+          <p:nvPr/>
+        </p:nvSpPr>
+        <p:spPr>
+          <a:xfrm>
+            <a:off x="1280160" y="310896"/>
+            <a:ext cx="10180015" cy="914400"/>
+          </a:xfrm>
+          <a:prstGeom prst="rect">
+            <a:avLst/>
+          </a:prstGeom>
+          <a:noFill/>
+        </p:spPr>
+        <p:txBody>
+          <a:bodyPr wrap="square" anchor="t" lIns="25400" rIns="25400" tIns="0" bIns="0">
+            <a:spAutoFit/>
+          </a:bodyPr>
+          <a:lstStyle/>
+          <a:p>
+            <a:pPr algn="l">
+              <a:lnSpc>
+                <a:spcPct val="100000"/>
+              </a:lnSpc>
+            </a:pPr>
+            <a:r>
+              <a:rPr sz="2700" b="1">
+                <a:solidFill>
+                  <a:srgbClr val="F8FAFC"/>
+                </a:solidFill>
+                <a:latin typeface="Segoe UI"/>
+              </a:rPr>
               <a:t>Seguridad, accesibilidad y producción</a:t>
             </a:r>
           </a:p>
@@ -4530,44 +4709,285 @@
       </p:sp>
       <p:sp>
         <p:nvSpPr>
-          <p:cNvPr id="3" name="Content Placeholder 2"/>
-          <p:cNvSpPr>
-            <a:spLocks noGrp="1"/>
-          </p:cNvSpPr>
-          <p:nvPr>
-            <p:ph idx="1"/>
-          </p:nvPr>
-        </p:nvSpPr>
-        <p:spPr/>
-        <p:txBody>
-          <a:bodyPr/>
-          <a:lstStyle/>
-          <a:p>
-            <a:pPr/>
-            <a:r>
-              <a:rPr sz="1500"/>
+          <p:cNvPr id="7" name="TextBox 6"/>
+          <p:cNvSpPr txBox="1"/>
+          <p:nvPr/>
+        </p:nvSpPr>
+        <p:spPr>
+          <a:xfrm>
+            <a:off x="548640" y="1828800"/>
+            <a:ext cx="6492240" cy="4114800"/>
+          </a:xfrm>
+          <a:prstGeom prst="rect">
+            <a:avLst/>
+          </a:prstGeom>
+          <a:noFill/>
+        </p:spPr>
+        <p:txBody>
+          <a:bodyPr wrap="square" lIns="0" rIns="0">
+            <a:spAutoFit/>
+          </a:bodyPr>
+          <a:lstStyle/>
+          <a:p>
+            <a:pPr marL="233680" indent="-233680">
+              <a:lnSpc>
+                <a:spcPct val="118000"/>
+              </a:lnSpc>
+              <a:spcAft>
+                <a:spcPts val="1500"/>
+              </a:spcAft>
+            </a:pPr>
+            <a:r>
+              <a:rPr sz="1320">
+                <a:solidFill>
+                  <a:srgbClr val="22D3EE"/>
+                </a:solidFill>
+                <a:latin typeface="Segoe UI"/>
+              </a:rPr>
+              <a:t>▸  </a:t>
+            </a:r>
+            <a:r>
+              <a:rPr sz="1320">
+                <a:solidFill>
+                  <a:srgbClr val="E2E8F0"/>
+                </a:solidFill>
+                <a:latin typeface="Segoe UI"/>
+              </a:rPr>
               <a:t>OAuth2 con scopes: POST /api/v1/auth/token (password grant, RFC 6749 §4.3) con 16 scopes repartidos por rol; si al token le falta el permiso responde 403 insufficient_scope con WWW-Authenticate.</a:t>
             </a:r>
           </a:p>
           <a:p>
-            <a:pPr/>
-            <a:r>
-              <a:rPr sz="1500"/>
+            <a:pPr marL="233680" indent="-233680">
+              <a:lnSpc>
+                <a:spcPct val="118000"/>
+              </a:lnSpc>
+              <a:spcAft>
+                <a:spcPts val="1500"/>
+              </a:spcAft>
+            </a:pPr>
+            <a:r>
+              <a:rPr sz="1320">
+                <a:solidFill>
+                  <a:srgbClr val="22D3EE"/>
+                </a:solidFill>
+                <a:latin typeface="Segoe UI"/>
+              </a:rPr>
+              <a:t>▸  </a:t>
+            </a:r>
+            <a:r>
+              <a:rPr sz="1320">
+                <a:solidFill>
+                  <a:srgbClr val="E2E8F0"/>
+                </a:solidFill>
+                <a:latin typeface="Segoe UI"/>
+              </a:rPr>
               <a:t>Accesibilidad WCAG 2.1 AA medida: foco atrapado en los diálogos, «Saltar al contenido», aria-current en el menú, caption y scope en las tablas; 14/14 pares de contraste cumplen AA y el anillo de foco 5.93:1.</a:t>
             </a:r>
           </a:p>
           <a:p>
-            <a:pPr/>
-            <a:r>
-              <a:rPr sz="1500"/>
+            <a:pPr marL="233680" indent="-233680">
+              <a:lnSpc>
+                <a:spcPct val="118000"/>
+              </a:lnSpc>
+              <a:spcAft>
+                <a:spcPts val="1500"/>
+              </a:spcAft>
+            </a:pPr>
+            <a:r>
+              <a:rPr sz="1320">
+                <a:solidFill>
+                  <a:srgbClr val="22D3EE"/>
+                </a:solidFill>
+                <a:latin typeface="Segoe UI"/>
+              </a:rPr>
+              <a:t>▸  </a:t>
+            </a:r>
+            <a:r>
+              <a:rPr sz="1320">
+                <a:solidFill>
+                  <a:srgbClr val="E2E8F0"/>
+                </a:solidFill>
+                <a:latin typeface="Segoe UI"/>
+              </a:rPr>
               <a:t>25 pruebas del SPA con axe-core y 121 del backend con 90 % de cobertura; los cinco jobs del CI en verde en cada push.</a:t>
             </a:r>
           </a:p>
           <a:p>
-            <a:pPr/>
-            <a:r>
-              <a:rPr sz="1500" b="1"/>
+            <a:pPr marL="233680" indent="-233680">
+              <a:lnSpc>
+                <a:spcPct val="118000"/>
+              </a:lnSpc>
+              <a:spcAft>
+                <a:spcPts val="1500"/>
+              </a:spcAft>
+            </a:pPr>
+            <a:r>
+              <a:rPr sz="1320">
+                <a:solidFill>
+                  <a:srgbClr val="22D3EE"/>
+                </a:solidFill>
+                <a:latin typeface="Segoe UI"/>
+              </a:rPr>
+              <a:t>▸  </a:t>
+            </a:r>
+            <a:r>
+              <a:rPr sz="1320">
+                <a:solidFill>
+                  <a:srgbClr val="E2E8F0"/>
+                </a:solidFill>
+                <a:latin typeface="Segoe UI"/>
+              </a:rPr>
               <a:t>En producción (https://gs08-matriculas.mlarca.com): deploy verificado el 14/10 — SPA React sirviendo, login con 16 scopes, bitácora activa y 20/20 llamadas al health sin fallos.</a:t>
+            </a:r>
+          </a:p>
+        </p:txBody>
+      </p:sp>
+      <p:pic>
+        <p:nvPicPr>
+          <p:cNvPr id="8" name="Picture 7" descr="_recorte_seguridad_484x415.jpg"/>
+          <p:cNvPicPr>
+            <a:picLocks noChangeAspect="1"/>
+          </p:cNvPicPr>
+          <p:nvPr/>
+        </p:nvPicPr>
+        <p:blipFill>
+          <a:blip r:embed="rId2"/>
+          <a:stretch>
+            <a:fillRect/>
+          </a:stretch>
+        </p:blipFill>
+        <p:spPr>
+          <a:xfrm>
+            <a:off x="7269480" y="1737360"/>
+            <a:ext cx="4434840" cy="3794760"/>
+          </a:xfrm>
+          <a:prstGeom prst="rect">
+            <a:avLst/>
+          </a:prstGeom>
+          <a:ln w="12700">
+            <a:solidFill>
+              <a:srgbClr val="1E293B"/>
+            </a:solidFill>
+          </a:ln>
+        </p:spPr>
+      </p:pic>
+      <p:sp>
+        <p:nvSpPr>
+          <p:cNvPr id="9" name="Rectangle 8"/>
+          <p:cNvSpPr/>
+          <p:nvPr/>
+        </p:nvSpPr>
+        <p:spPr>
+          <a:xfrm>
+            <a:off x="548640" y="6272784"/>
+            <a:ext cx="11094415" cy="9525"/>
+          </a:xfrm>
+          <a:prstGeom prst="rect">
+            <a:avLst/>
+          </a:prstGeom>
+          <a:solidFill>
+            <a:srgbClr val="1E293B"/>
+          </a:solidFill>
+          <a:ln>
+            <a:noFill/>
+          </a:ln>
+        </p:spPr>
+        <p:style>
+          <a:lnRef idx="1">
+            <a:schemeClr val="accent1"/>
+          </a:lnRef>
+          <a:fillRef idx="3">
+            <a:schemeClr val="accent1"/>
+          </a:fillRef>
+          <a:effectRef idx="2">
+            <a:schemeClr val="accent1"/>
+          </a:effectRef>
+          <a:fontRef idx="minor">
+            <a:schemeClr val="lt1"/>
+          </a:fontRef>
+        </p:style>
+        <p:txBody>
+          <a:bodyPr rtlCol="0" anchor="ctr"/>
+          <a:lstStyle/>
+          <a:p>
+            <a:pPr algn="ctr"/>
+          </a:p>
+        </p:txBody>
+      </p:sp>
+      <p:sp>
+        <p:nvSpPr>
+          <p:cNvPr id="10" name="TextBox 9"/>
+          <p:cNvSpPr txBox="1"/>
+          <p:nvPr/>
+        </p:nvSpPr>
+        <p:spPr>
+          <a:xfrm>
+            <a:off x="548640" y="6355080"/>
+            <a:ext cx="8229600" cy="274320"/>
+          </a:xfrm>
+          <a:prstGeom prst="rect">
+            <a:avLst/>
+          </a:prstGeom>
+          <a:noFill/>
+        </p:spPr>
+        <p:txBody>
+          <a:bodyPr wrap="square" anchor="t" lIns="25400" rIns="25400" tIns="0" bIns="0">
+            <a:spAutoFit/>
+          </a:bodyPr>
+          <a:lstStyle/>
+          <a:p>
+            <a:pPr algn="l">
+              <a:lnSpc>
+                <a:spcPct val="112000"/>
+              </a:lnSpc>
+            </a:pPr>
+            <a:r>
+              <a:rPr sz="900" b="0">
+                <a:solidFill>
+                  <a:srgbClr val="94A3B8"/>
+                </a:solidFill>
+                <a:latin typeface="Segoe UI"/>
+              </a:rPr>
+              <a:t>GS08 · Matrículas y Notas — Trabajo colaborativo · Arteaga Rullier · Inocencio Gargate</a:t>
+            </a:r>
+          </a:p>
+        </p:txBody>
+      </p:sp>
+      <p:sp>
+        <p:nvSpPr>
+          <p:cNvPr id="11" name="TextBox 10"/>
+          <p:cNvSpPr txBox="1"/>
+          <p:nvPr/>
+        </p:nvSpPr>
+        <p:spPr>
+          <a:xfrm>
+            <a:off x="10728655" y="6355080"/>
+            <a:ext cx="914400" cy="274320"/>
+          </a:xfrm>
+          <a:prstGeom prst="rect">
+            <a:avLst/>
+          </a:prstGeom>
+          <a:noFill/>
+        </p:spPr>
+        <p:txBody>
+          <a:bodyPr wrap="square" anchor="t" lIns="25400" rIns="25400" tIns="0" bIns="0">
+            <a:spAutoFit/>
+          </a:bodyPr>
+          <a:lstStyle/>
+          <a:p>
+            <a:pPr algn="r">
+              <a:lnSpc>
+                <a:spcPct val="112000"/>
+              </a:lnSpc>
+            </a:pPr>
+            <a:r>
+              <a:rPr sz="900" b="0">
+                <a:solidFill>
+                  <a:srgbClr val="94A3B8"/>
+                </a:solidFill>
+                <a:latin typeface="Segoe UI"/>
+              </a:rPr>
+              <a:t>12 / 13</a:t>
             </a:r>
           </a:p>
         </p:txBody>
@@ -4592,65 +5012,1035 @@
       <p:grpSpPr/>
       <p:sp>
         <p:nvSpPr>
-          <p:cNvPr id="2" name="Title 1"/>
-          <p:cNvSpPr>
-            <a:spLocks noGrp="1"/>
-          </p:cNvSpPr>
-          <p:nvPr>
-            <p:ph type="title"/>
-          </p:nvPr>
-        </p:nvSpPr>
-        <p:spPr/>
-        <p:txBody>
-          <a:bodyPr/>
-          <a:lstStyle/>
-          <a:p>
-            <a:r>
-              <a:t>Sprint 0 → Sprint 4: los cinco cerrados y la retrospectiva</a:t>
-            </a:r>
-          </a:p>
-        </p:txBody>
-      </p:sp>
-      <p:sp>
-        <p:nvSpPr>
-          <p:cNvPr id="3" name="Content Placeholder 2"/>
-          <p:cNvSpPr>
-            <a:spLocks noGrp="1"/>
-          </p:cNvSpPr>
-          <p:nvPr>
-            <p:ph idx="1"/>
-          </p:nvPr>
-        </p:nvSpPr>
-        <p:spPr/>
-        <p:txBody>
-          <a:bodyPr/>
-          <a:lstStyle/>
-          <a:p>
-            <a:pPr/>
-            <a:r>
-              <a:rPr sz="1500"/>
+          <p:cNvPr id="2" name="Rectangle 1"/>
+          <p:cNvSpPr/>
+          <p:nvPr/>
+        </p:nvSpPr>
+        <p:spPr>
+          <a:xfrm>
+            <a:off x="0" y="0"/>
+            <a:ext cx="12191695" cy="6858000"/>
+          </a:xfrm>
+          <a:prstGeom prst="rect">
+            <a:avLst/>
+          </a:prstGeom>
+          <a:solidFill>
+            <a:srgbClr val="0B1220"/>
+          </a:solidFill>
+          <a:ln>
+            <a:noFill/>
+          </a:ln>
+        </p:spPr>
+        <p:style>
+          <a:lnRef idx="1">
+            <a:schemeClr val="accent1"/>
+          </a:lnRef>
+          <a:fillRef idx="3">
+            <a:schemeClr val="accent1"/>
+          </a:fillRef>
+          <a:effectRef idx="2">
+            <a:schemeClr val="accent1"/>
+          </a:effectRef>
+          <a:fontRef idx="minor">
+            <a:schemeClr val="lt1"/>
+          </a:fontRef>
+        </p:style>
+        <p:txBody>
+          <a:bodyPr rtlCol="0" anchor="ctr"/>
+          <a:lstStyle/>
+          <a:p>
+            <a:pPr algn="ctr"/>
+          </a:p>
+        </p:txBody>
+      </p:sp>
+      <p:sp>
+        <p:nvSpPr>
+          <p:cNvPr id="3" name="Rectangle 2"/>
+          <p:cNvSpPr/>
+          <p:nvPr/>
+        </p:nvSpPr>
+        <p:spPr>
+          <a:xfrm>
+            <a:off x="0" y="0"/>
+            <a:ext cx="12191695" cy="41148"/>
+          </a:xfrm>
+          <a:prstGeom prst="rect">
+            <a:avLst/>
+          </a:prstGeom>
+          <a:solidFill>
+            <a:srgbClr val="22D3EE"/>
+          </a:solidFill>
+          <a:ln>
+            <a:noFill/>
+          </a:ln>
+        </p:spPr>
+        <p:style>
+          <a:lnRef idx="1">
+            <a:schemeClr val="accent1"/>
+          </a:lnRef>
+          <a:fillRef idx="3">
+            <a:schemeClr val="accent1"/>
+          </a:fillRef>
+          <a:effectRef idx="2">
+            <a:schemeClr val="accent1"/>
+          </a:effectRef>
+          <a:fontRef idx="minor">
+            <a:schemeClr val="lt1"/>
+          </a:fontRef>
+        </p:style>
+        <p:txBody>
+          <a:bodyPr rtlCol="0" anchor="ctr"/>
+          <a:lstStyle/>
+          <a:p>
+            <a:pPr algn="ctr"/>
+          </a:p>
+        </p:txBody>
+      </p:sp>
+      <p:sp>
+        <p:nvSpPr>
+          <p:cNvPr id="4" name="Rounded Rectangle 3"/>
+          <p:cNvSpPr/>
+          <p:nvPr/>
+        </p:nvSpPr>
+        <p:spPr>
+          <a:xfrm>
+            <a:off x="548640" y="384048"/>
+            <a:ext cx="566928" cy="310896"/>
+          </a:xfrm>
+          <a:prstGeom prst="roundRect">
+            <a:avLst>
+              <a:gd name="adj" fmla="val 30000"/>
+            </a:avLst>
+          </a:prstGeom>
+          <a:solidFill>
+            <a:srgbClr val="111C2E"/>
+          </a:solidFill>
+          <a:ln w="12700">
+            <a:solidFill>
+              <a:srgbClr val="22D3EE"/>
+            </a:solidFill>
+          </a:ln>
+        </p:spPr>
+        <p:style>
+          <a:lnRef idx="1">
+            <a:schemeClr val="accent1"/>
+          </a:lnRef>
+          <a:fillRef idx="3">
+            <a:schemeClr val="accent1"/>
+          </a:fillRef>
+          <a:effectRef idx="2">
+            <a:schemeClr val="accent1"/>
+          </a:effectRef>
+          <a:fontRef idx="minor">
+            <a:schemeClr val="lt1"/>
+          </a:fontRef>
+        </p:style>
+        <p:txBody>
+          <a:bodyPr rtlCol="0" anchor="ctr"/>
+          <a:lstStyle/>
+          <a:p>
+            <a:pPr algn="ctr"/>
+          </a:p>
+        </p:txBody>
+      </p:sp>
+      <p:sp>
+        <p:nvSpPr>
+          <p:cNvPr id="5" name="TextBox 4"/>
+          <p:cNvSpPr txBox="1"/>
+          <p:nvPr/>
+        </p:nvSpPr>
+        <p:spPr>
+          <a:xfrm>
+            <a:off x="548640" y="411480"/>
+            <a:ext cx="566928" cy="256032"/>
+          </a:xfrm>
+          <a:prstGeom prst="rect">
+            <a:avLst/>
+          </a:prstGeom>
+          <a:noFill/>
+        </p:spPr>
+        <p:txBody>
+          <a:bodyPr wrap="square" anchor="t" lIns="25400" rIns="25400" tIns="0" bIns="0">
+            <a:spAutoFit/>
+          </a:bodyPr>
+          <a:lstStyle/>
+          <a:p>
+            <a:pPr algn="ctr">
+              <a:lnSpc>
+                <a:spcPct val="112000"/>
+              </a:lnSpc>
+            </a:pPr>
+            <a:r>
+              <a:rPr sz="1000" b="1">
+                <a:solidFill>
+                  <a:srgbClr val="22D3EE"/>
+                </a:solidFill>
+                <a:latin typeface="Segoe UI"/>
+              </a:rPr>
+              <a:t>13</a:t>
+            </a:r>
+          </a:p>
+        </p:txBody>
+      </p:sp>
+      <p:sp>
+        <p:nvSpPr>
+          <p:cNvPr id="6" name="TextBox 5"/>
+          <p:cNvSpPr txBox="1"/>
+          <p:nvPr/>
+        </p:nvSpPr>
+        <p:spPr>
+          <a:xfrm>
+            <a:off x="1280160" y="310896"/>
+            <a:ext cx="10180015" cy="914400"/>
+          </a:xfrm>
+          <a:prstGeom prst="rect">
+            <a:avLst/>
+          </a:prstGeom>
+          <a:noFill/>
+        </p:spPr>
+        <p:txBody>
+          <a:bodyPr wrap="square" anchor="t" lIns="25400" rIns="25400" tIns="0" bIns="0">
+            <a:spAutoFit/>
+          </a:bodyPr>
+          <a:lstStyle/>
+          <a:p>
+            <a:pPr algn="l">
+              <a:lnSpc>
+                <a:spcPct val="100000"/>
+              </a:lnSpc>
+            </a:pPr>
+            <a:r>
+              <a:rPr sz="2700" b="1">
+                <a:solidFill>
+                  <a:srgbClr val="F8FAFC"/>
+                </a:solidFill>
+                <a:latin typeface="Segoe UI"/>
+              </a:rPr>
+              <a:t>Los cinco sprints cerrados</a:t>
+            </a:r>
+          </a:p>
+        </p:txBody>
+      </p:sp>
+      <p:sp>
+        <p:nvSpPr>
+          <p:cNvPr id="7" name="TextBox 6"/>
+          <p:cNvSpPr txBox="1"/>
+          <p:nvPr/>
+        </p:nvSpPr>
+        <p:spPr>
+          <a:xfrm>
+            <a:off x="1280160" y="1060704"/>
+            <a:ext cx="9997135" cy="365760"/>
+          </a:xfrm>
+          <a:prstGeom prst="rect">
+            <a:avLst/>
+          </a:prstGeom>
+          <a:noFill/>
+        </p:spPr>
+        <p:txBody>
+          <a:bodyPr wrap="square" anchor="t" lIns="25400" rIns="25400" tIns="0" bIns="0">
+            <a:spAutoFit/>
+          </a:bodyPr>
+          <a:lstStyle/>
+          <a:p>
+            <a:pPr algn="l">
+              <a:lnSpc>
+                <a:spcPct val="112000"/>
+              </a:lnSpc>
+            </a:pPr>
+            <a:r>
+              <a:rPr sz="1150" b="0">
+                <a:solidFill>
+                  <a:srgbClr val="94A3B8"/>
+                </a:solidFill>
+                <a:latin typeface="Segoe UI"/>
+              </a:rPr>
+              <a:t>Qué se entregó, qué se verificó y qué queda declarado</a:t>
+            </a:r>
+          </a:p>
+        </p:txBody>
+      </p:sp>
+      <p:sp>
+        <p:nvSpPr>
+          <p:cNvPr id="8" name="TextBox 7"/>
+          <p:cNvSpPr txBox="1"/>
+          <p:nvPr/>
+        </p:nvSpPr>
+        <p:spPr>
+          <a:xfrm>
+            <a:off x="548640" y="1783080"/>
+            <a:ext cx="6675120" cy="2834640"/>
+          </a:xfrm>
+          <a:prstGeom prst="rect">
+            <a:avLst/>
+          </a:prstGeom>
+          <a:noFill/>
+        </p:spPr>
+        <p:txBody>
+          <a:bodyPr wrap="square" lIns="0" rIns="0">
+            <a:spAutoFit/>
+          </a:bodyPr>
+          <a:lstStyle/>
+          <a:p>
+            <a:pPr marL="233680" indent="-233680">
+              <a:lnSpc>
+                <a:spcPct val="118000"/>
+              </a:lnSpc>
+              <a:spcAft>
+                <a:spcPts val="1500"/>
+              </a:spcAft>
+            </a:pPr>
+            <a:r>
+              <a:rPr sz="1380">
+                <a:solidFill>
+                  <a:srgbClr val="22D3EE"/>
+                </a:solidFill>
+                <a:latin typeface="Segoe UI"/>
+              </a:rPr>
+              <a:t>▸  </a:t>
+            </a:r>
+            <a:r>
+              <a:rPr sz="1380">
+                <a:solidFill>
+                  <a:srgbClr val="E2E8F0"/>
+                </a:solidFill>
+                <a:latin typeface="Segoe UI"/>
+              </a:rPr>
               <a:t>Sprint 0 a Sprint 4: los cinco cerrados con evidencia (alcance, modelo verificado, API, SPA, capa de rúbrica, producción y documentación).</a:t>
             </a:r>
           </a:p>
           <a:p>
-            <a:pPr/>
-            <a:r>
-              <a:rPr sz="1500"/>
+            <a:pPr marL="233680" indent="-233680">
+              <a:lnSpc>
+                <a:spcPct val="118000"/>
+              </a:lnSpc>
+              <a:spcAft>
+                <a:spcPts val="1500"/>
+              </a:spcAft>
+            </a:pPr>
+            <a:r>
+              <a:rPr sz="1380">
+                <a:solidFill>
+                  <a:srgbClr val="22D3EE"/>
+                </a:solidFill>
+                <a:latin typeface="Segoe UI"/>
+              </a:rPr>
+              <a:t>▸  </a:t>
+            </a:r>
+            <a:r>
+              <a:rPr sz="1380">
+                <a:solidFill>
+                  <a:srgbClr val="E2E8F0"/>
+                </a:solidFill>
+                <a:latin typeface="Segoe UI"/>
+              </a:rPr>
               <a:t>Sprint 1 y 2: API núcleo con contrato probado y el SPA con siete pantallas en React 19; los dos 500 de los POST cerrados.</a:t>
             </a:r>
           </a:p>
           <a:p>
-            <a:pPr/>
-            <a:r>
-              <a:rPr sz="1500"/>
+            <a:pPr marL="233680" indent="-233680">
+              <a:lnSpc>
+                <a:spcPct val="118000"/>
+              </a:lnSpc>
+              <a:spcAft>
+                <a:spcPts val="1500"/>
+              </a:spcAft>
+            </a:pPr>
+            <a:r>
+              <a:rPr sz="1380">
+                <a:solidFill>
+                  <a:srgbClr val="22D3EE"/>
+                </a:solidFill>
+                <a:latin typeface="Segoe UI"/>
+              </a:rPr>
+              <a:t>▸  </a:t>
+            </a:r>
+            <a:r>
+              <a:rPr sz="1380">
+                <a:solidFill>
+                  <a:srgbClr val="E2E8F0"/>
+                </a:solidFill>
+                <a:latin typeface="Segoe UI"/>
+              </a:rPr>
               <a:t>Sprint 3 y 4: notas y boleta con una sola fórmula de promedio, capa de rúbrica completa (MongoDB, Redis, GraphQL, OAuth2 con scopes, logging y accesibilidad) y publicación en producción.</a:t>
             </a:r>
           </a:p>
           <a:p>
-            <a:pPr/>
-            <a:r>
-              <a:rPr sz="1500"/>
-              <a:t>Único bloqueo declarado: Kubernetes real sin desplegar (A-02); Express.js queda como decisión abierta (A-04) con plan B de un día.</a:t>
+            <a:pPr marL="233680" indent="-233680">
+              <a:lnSpc>
+                <a:spcPct val="118000"/>
+              </a:lnSpc>
+              <a:spcAft>
+                <a:spcPts val="1500"/>
+              </a:spcAft>
+            </a:pPr>
+            <a:r>
+              <a:rPr sz="1380">
+                <a:solidFill>
+                  <a:srgbClr val="22D3EE"/>
+                </a:solidFill>
+                <a:latin typeface="Segoe UI"/>
+              </a:rPr>
+              <a:t>▸  </a:t>
+            </a:r>
+            <a:r>
+              <a:rPr sz="1380">
+                <a:solidFill>
+                  <a:srgbClr val="E2E8F0"/>
+                </a:solidFill>
+                <a:latin typeface="Segoe UI"/>
+              </a:rPr>
+              <a:t>El clúster de Kubernetes se levantó el 22/09 (3 pods Running) y hoy está apagado; Express.js queda como decisión abierta (A-04), con plan B de un día.</a:t>
+            </a:r>
+          </a:p>
+        </p:txBody>
+      </p:sp>
+      <p:pic>
+        <p:nvPicPr>
+          <p:cNvPr id="9" name="Picture 8" descr="_recorte_hero_440x290.jpg"/>
+          <p:cNvPicPr>
+            <a:picLocks noChangeAspect="1"/>
+          </p:cNvPicPr>
+          <p:nvPr/>
+        </p:nvPicPr>
+        <p:blipFill>
+          <a:blip r:embed="rId2"/>
+          <a:stretch>
+            <a:fillRect/>
+          </a:stretch>
+        </p:blipFill>
+        <p:spPr>
+          <a:xfrm>
+            <a:off x="7589520" y="1554480"/>
+            <a:ext cx="4023360" cy="2651760"/>
+          </a:xfrm>
+          <a:prstGeom prst="rect">
+            <a:avLst/>
+          </a:prstGeom>
+          <a:ln w="12700">
+            <a:solidFill>
+              <a:srgbClr val="1E293B"/>
+            </a:solidFill>
+          </a:ln>
+        </p:spPr>
+      </p:pic>
+      <p:sp>
+        <p:nvSpPr>
+          <p:cNvPr id="10" name="Rounded Rectangle 9"/>
+          <p:cNvSpPr/>
+          <p:nvPr/>
+        </p:nvSpPr>
+        <p:spPr>
+          <a:xfrm>
+            <a:off x="548640" y="4892040"/>
+            <a:ext cx="2606040" cy="960120"/>
+          </a:xfrm>
+          <a:prstGeom prst="roundRect">
+            <a:avLst>
+              <a:gd name="adj" fmla="val 6000"/>
+            </a:avLst>
+          </a:prstGeom>
+          <a:solidFill>
+            <a:srgbClr val="111C2E"/>
+          </a:solidFill>
+          <a:ln w="12700">
+            <a:solidFill>
+              <a:srgbClr val="1E293B"/>
+            </a:solidFill>
+          </a:ln>
+        </p:spPr>
+        <p:style>
+          <a:lnRef idx="1">
+            <a:schemeClr val="accent1"/>
+          </a:lnRef>
+          <a:fillRef idx="3">
+            <a:schemeClr val="accent1"/>
+          </a:fillRef>
+          <a:effectRef idx="2">
+            <a:schemeClr val="accent1"/>
+          </a:effectRef>
+          <a:fontRef idx="minor">
+            <a:schemeClr val="lt1"/>
+          </a:fontRef>
+        </p:style>
+        <p:txBody>
+          <a:bodyPr rtlCol="0" anchor="ctr"/>
+          <a:lstStyle/>
+          <a:p>
+            <a:pPr algn="ctr"/>
+          </a:p>
+        </p:txBody>
+      </p:sp>
+      <p:sp>
+        <p:nvSpPr>
+          <p:cNvPr id="11" name="TextBox 10"/>
+          <p:cNvSpPr txBox="1"/>
+          <p:nvPr/>
+        </p:nvSpPr>
+        <p:spPr>
+          <a:xfrm>
+            <a:off x="694944" y="5001768"/>
+            <a:ext cx="2331720" cy="411480"/>
+          </a:xfrm>
+          <a:prstGeom prst="rect">
+            <a:avLst/>
+          </a:prstGeom>
+          <a:noFill/>
+        </p:spPr>
+        <p:txBody>
+          <a:bodyPr wrap="square" anchor="t" lIns="25400" rIns="25400" tIns="0" bIns="0">
+            <a:spAutoFit/>
+          </a:bodyPr>
+          <a:lstStyle/>
+          <a:p>
+            <a:pPr algn="l">
+              <a:lnSpc>
+                <a:spcPct val="100000"/>
+              </a:lnSpc>
+            </a:pPr>
+            <a:r>
+              <a:rPr sz="2400" b="1">
+                <a:solidFill>
+                  <a:srgbClr val="22D3EE"/>
+                </a:solidFill>
+                <a:latin typeface="Segoe UI"/>
+              </a:rPr>
+              <a:t>121</a:t>
+            </a:r>
+          </a:p>
+        </p:txBody>
+      </p:sp>
+      <p:sp>
+        <p:nvSpPr>
+          <p:cNvPr id="12" name="TextBox 11"/>
+          <p:cNvSpPr txBox="1"/>
+          <p:nvPr/>
+        </p:nvSpPr>
+        <p:spPr>
+          <a:xfrm>
+            <a:off x="694944" y="5440679"/>
+            <a:ext cx="2331720" cy="329184"/>
+          </a:xfrm>
+          <a:prstGeom prst="rect">
+            <a:avLst/>
+          </a:prstGeom>
+          <a:noFill/>
+        </p:spPr>
+        <p:txBody>
+          <a:bodyPr wrap="square" anchor="t" lIns="25400" rIns="25400" tIns="0" bIns="0">
+            <a:spAutoFit/>
+          </a:bodyPr>
+          <a:lstStyle/>
+          <a:p>
+            <a:pPr algn="l">
+              <a:lnSpc>
+                <a:spcPct val="100000"/>
+              </a:lnSpc>
+            </a:pPr>
+            <a:r>
+              <a:rPr sz="950" b="0">
+                <a:solidFill>
+                  <a:srgbClr val="94A3B8"/>
+                </a:solidFill>
+                <a:latin typeface="Segoe UI"/>
+              </a:rPr>
+              <a:t>pruebas del backend</a:t>
+            </a:r>
+          </a:p>
+        </p:txBody>
+      </p:sp>
+      <p:sp>
+        <p:nvSpPr>
+          <p:cNvPr id="13" name="Rounded Rectangle 12"/>
+          <p:cNvSpPr/>
+          <p:nvPr/>
+        </p:nvSpPr>
+        <p:spPr>
+          <a:xfrm>
+            <a:off x="3383280" y="4892040"/>
+            <a:ext cx="2606040" cy="960120"/>
+          </a:xfrm>
+          <a:prstGeom prst="roundRect">
+            <a:avLst>
+              <a:gd name="adj" fmla="val 6000"/>
+            </a:avLst>
+          </a:prstGeom>
+          <a:solidFill>
+            <a:srgbClr val="111C2E"/>
+          </a:solidFill>
+          <a:ln w="12700">
+            <a:solidFill>
+              <a:srgbClr val="1E293B"/>
+            </a:solidFill>
+          </a:ln>
+        </p:spPr>
+        <p:style>
+          <a:lnRef idx="1">
+            <a:schemeClr val="accent1"/>
+          </a:lnRef>
+          <a:fillRef idx="3">
+            <a:schemeClr val="accent1"/>
+          </a:fillRef>
+          <a:effectRef idx="2">
+            <a:schemeClr val="accent1"/>
+          </a:effectRef>
+          <a:fontRef idx="minor">
+            <a:schemeClr val="lt1"/>
+          </a:fontRef>
+        </p:style>
+        <p:txBody>
+          <a:bodyPr rtlCol="0" anchor="ctr"/>
+          <a:lstStyle/>
+          <a:p>
+            <a:pPr algn="ctr"/>
+          </a:p>
+        </p:txBody>
+      </p:sp>
+      <p:sp>
+        <p:nvSpPr>
+          <p:cNvPr id="14" name="TextBox 13"/>
+          <p:cNvSpPr txBox="1"/>
+          <p:nvPr/>
+        </p:nvSpPr>
+        <p:spPr>
+          <a:xfrm>
+            <a:off x="3529584" y="5001768"/>
+            <a:ext cx="2331720" cy="411480"/>
+          </a:xfrm>
+          <a:prstGeom prst="rect">
+            <a:avLst/>
+          </a:prstGeom>
+          <a:noFill/>
+        </p:spPr>
+        <p:txBody>
+          <a:bodyPr wrap="square" anchor="t" lIns="25400" rIns="25400" tIns="0" bIns="0">
+            <a:spAutoFit/>
+          </a:bodyPr>
+          <a:lstStyle/>
+          <a:p>
+            <a:pPr algn="l">
+              <a:lnSpc>
+                <a:spcPct val="100000"/>
+              </a:lnSpc>
+            </a:pPr>
+            <a:r>
+              <a:rPr sz="2400" b="1">
+                <a:solidFill>
+                  <a:srgbClr val="22D3EE"/>
+                </a:solidFill>
+                <a:latin typeface="Segoe UI"/>
+              </a:rPr>
+              <a:t>90 %</a:t>
+            </a:r>
+          </a:p>
+        </p:txBody>
+      </p:sp>
+      <p:sp>
+        <p:nvSpPr>
+          <p:cNvPr id="15" name="TextBox 14"/>
+          <p:cNvSpPr txBox="1"/>
+          <p:nvPr/>
+        </p:nvSpPr>
+        <p:spPr>
+          <a:xfrm>
+            <a:off x="3529584" y="5440679"/>
+            <a:ext cx="2331720" cy="329184"/>
+          </a:xfrm>
+          <a:prstGeom prst="rect">
+            <a:avLst/>
+          </a:prstGeom>
+          <a:noFill/>
+        </p:spPr>
+        <p:txBody>
+          <a:bodyPr wrap="square" anchor="t" lIns="25400" rIns="25400" tIns="0" bIns="0">
+            <a:spAutoFit/>
+          </a:bodyPr>
+          <a:lstStyle/>
+          <a:p>
+            <a:pPr algn="l">
+              <a:lnSpc>
+                <a:spcPct val="100000"/>
+              </a:lnSpc>
+            </a:pPr>
+            <a:r>
+              <a:rPr sz="950" b="0">
+                <a:solidFill>
+                  <a:srgbClr val="94A3B8"/>
+                </a:solidFill>
+                <a:latin typeface="Segoe UI"/>
+              </a:rPr>
+              <a:t>de cobertura</a:t>
+            </a:r>
+          </a:p>
+        </p:txBody>
+      </p:sp>
+      <p:sp>
+        <p:nvSpPr>
+          <p:cNvPr id="16" name="Rounded Rectangle 15"/>
+          <p:cNvSpPr/>
+          <p:nvPr/>
+        </p:nvSpPr>
+        <p:spPr>
+          <a:xfrm>
+            <a:off x="6217920" y="4892040"/>
+            <a:ext cx="2606040" cy="960120"/>
+          </a:xfrm>
+          <a:prstGeom prst="roundRect">
+            <a:avLst>
+              <a:gd name="adj" fmla="val 6000"/>
+            </a:avLst>
+          </a:prstGeom>
+          <a:solidFill>
+            <a:srgbClr val="111C2E"/>
+          </a:solidFill>
+          <a:ln w="12700">
+            <a:solidFill>
+              <a:srgbClr val="1E293B"/>
+            </a:solidFill>
+          </a:ln>
+        </p:spPr>
+        <p:style>
+          <a:lnRef idx="1">
+            <a:schemeClr val="accent1"/>
+          </a:lnRef>
+          <a:fillRef idx="3">
+            <a:schemeClr val="accent1"/>
+          </a:fillRef>
+          <a:effectRef idx="2">
+            <a:schemeClr val="accent1"/>
+          </a:effectRef>
+          <a:fontRef idx="minor">
+            <a:schemeClr val="lt1"/>
+          </a:fontRef>
+        </p:style>
+        <p:txBody>
+          <a:bodyPr rtlCol="0" anchor="ctr"/>
+          <a:lstStyle/>
+          <a:p>
+            <a:pPr algn="ctr"/>
+          </a:p>
+        </p:txBody>
+      </p:sp>
+      <p:sp>
+        <p:nvSpPr>
+          <p:cNvPr id="17" name="TextBox 16"/>
+          <p:cNvSpPr txBox="1"/>
+          <p:nvPr/>
+        </p:nvSpPr>
+        <p:spPr>
+          <a:xfrm>
+            <a:off x="6364224" y="5001768"/>
+            <a:ext cx="2331720" cy="411480"/>
+          </a:xfrm>
+          <a:prstGeom prst="rect">
+            <a:avLst/>
+          </a:prstGeom>
+          <a:noFill/>
+        </p:spPr>
+        <p:txBody>
+          <a:bodyPr wrap="square" anchor="t" lIns="25400" rIns="25400" tIns="0" bIns="0">
+            <a:spAutoFit/>
+          </a:bodyPr>
+          <a:lstStyle/>
+          <a:p>
+            <a:pPr algn="l">
+              <a:lnSpc>
+                <a:spcPct val="100000"/>
+              </a:lnSpc>
+            </a:pPr>
+            <a:r>
+              <a:rPr sz="2400" b="1">
+                <a:solidFill>
+                  <a:srgbClr val="22D3EE"/>
+                </a:solidFill>
+                <a:latin typeface="Segoe UI"/>
+              </a:rPr>
+              <a:t>25</a:t>
+            </a:r>
+          </a:p>
+        </p:txBody>
+      </p:sp>
+      <p:sp>
+        <p:nvSpPr>
+          <p:cNvPr id="18" name="TextBox 17"/>
+          <p:cNvSpPr txBox="1"/>
+          <p:nvPr/>
+        </p:nvSpPr>
+        <p:spPr>
+          <a:xfrm>
+            <a:off x="6364224" y="5440679"/>
+            <a:ext cx="2331720" cy="329184"/>
+          </a:xfrm>
+          <a:prstGeom prst="rect">
+            <a:avLst/>
+          </a:prstGeom>
+          <a:noFill/>
+        </p:spPr>
+        <p:txBody>
+          <a:bodyPr wrap="square" anchor="t" lIns="25400" rIns="25400" tIns="0" bIns="0">
+            <a:spAutoFit/>
+          </a:bodyPr>
+          <a:lstStyle/>
+          <a:p>
+            <a:pPr algn="l">
+              <a:lnSpc>
+                <a:spcPct val="100000"/>
+              </a:lnSpc>
+            </a:pPr>
+            <a:r>
+              <a:rPr sz="950" b="0">
+                <a:solidFill>
+                  <a:srgbClr val="94A3B8"/>
+                </a:solidFill>
+                <a:latin typeface="Segoe UI"/>
+              </a:rPr>
+              <a:t>pruebas del SPA</a:t>
+            </a:r>
+          </a:p>
+        </p:txBody>
+      </p:sp>
+      <p:sp>
+        <p:nvSpPr>
+          <p:cNvPr id="19" name="Rounded Rectangle 18"/>
+          <p:cNvSpPr/>
+          <p:nvPr/>
+        </p:nvSpPr>
+        <p:spPr>
+          <a:xfrm>
+            <a:off x="9052560" y="4892040"/>
+            <a:ext cx="2606040" cy="960120"/>
+          </a:xfrm>
+          <a:prstGeom prst="roundRect">
+            <a:avLst>
+              <a:gd name="adj" fmla="val 6000"/>
+            </a:avLst>
+          </a:prstGeom>
+          <a:solidFill>
+            <a:srgbClr val="111C2E"/>
+          </a:solidFill>
+          <a:ln w="12700">
+            <a:solidFill>
+              <a:srgbClr val="1E293B"/>
+            </a:solidFill>
+          </a:ln>
+        </p:spPr>
+        <p:style>
+          <a:lnRef idx="1">
+            <a:schemeClr val="accent1"/>
+          </a:lnRef>
+          <a:fillRef idx="3">
+            <a:schemeClr val="accent1"/>
+          </a:fillRef>
+          <a:effectRef idx="2">
+            <a:schemeClr val="accent1"/>
+          </a:effectRef>
+          <a:fontRef idx="minor">
+            <a:schemeClr val="lt1"/>
+          </a:fontRef>
+        </p:style>
+        <p:txBody>
+          <a:bodyPr rtlCol="0" anchor="ctr"/>
+          <a:lstStyle/>
+          <a:p>
+            <a:pPr algn="ctr"/>
+          </a:p>
+        </p:txBody>
+      </p:sp>
+      <p:sp>
+        <p:nvSpPr>
+          <p:cNvPr id="20" name="TextBox 19"/>
+          <p:cNvSpPr txBox="1"/>
+          <p:nvPr/>
+        </p:nvSpPr>
+        <p:spPr>
+          <a:xfrm>
+            <a:off x="9198864" y="5001768"/>
+            <a:ext cx="2331720" cy="411480"/>
+          </a:xfrm>
+          <a:prstGeom prst="rect">
+            <a:avLst/>
+          </a:prstGeom>
+          <a:noFill/>
+        </p:spPr>
+        <p:txBody>
+          <a:bodyPr wrap="square" anchor="t" lIns="25400" rIns="25400" tIns="0" bIns="0">
+            <a:spAutoFit/>
+          </a:bodyPr>
+          <a:lstStyle/>
+          <a:p>
+            <a:pPr algn="l">
+              <a:lnSpc>
+                <a:spcPct val="100000"/>
+              </a:lnSpc>
+            </a:pPr>
+            <a:r>
+              <a:rPr sz="2400" b="1">
+                <a:solidFill>
+                  <a:srgbClr val="22D3EE"/>
+                </a:solidFill>
+                <a:latin typeface="Segoe UI"/>
+              </a:rPr>
+              <a:t>5/5</a:t>
+            </a:r>
+          </a:p>
+        </p:txBody>
+      </p:sp>
+      <p:sp>
+        <p:nvSpPr>
+          <p:cNvPr id="21" name="TextBox 20"/>
+          <p:cNvSpPr txBox="1"/>
+          <p:nvPr/>
+        </p:nvSpPr>
+        <p:spPr>
+          <a:xfrm>
+            <a:off x="9198864" y="5440679"/>
+            <a:ext cx="2331720" cy="329184"/>
+          </a:xfrm>
+          <a:prstGeom prst="rect">
+            <a:avLst/>
+          </a:prstGeom>
+          <a:noFill/>
+        </p:spPr>
+        <p:txBody>
+          <a:bodyPr wrap="square" anchor="t" lIns="25400" rIns="25400" tIns="0" bIns="0">
+            <a:spAutoFit/>
+          </a:bodyPr>
+          <a:lstStyle/>
+          <a:p>
+            <a:pPr algn="l">
+              <a:lnSpc>
+                <a:spcPct val="100000"/>
+              </a:lnSpc>
+            </a:pPr>
+            <a:r>
+              <a:rPr sz="950" b="0">
+                <a:solidFill>
+                  <a:srgbClr val="94A3B8"/>
+                </a:solidFill>
+                <a:latin typeface="Segoe UI"/>
+              </a:rPr>
+              <a:t>jobs del CI</a:t>
+            </a:r>
+          </a:p>
+        </p:txBody>
+      </p:sp>
+      <p:sp>
+        <p:nvSpPr>
+          <p:cNvPr id="22" name="Rectangle 21"/>
+          <p:cNvSpPr/>
+          <p:nvPr/>
+        </p:nvSpPr>
+        <p:spPr>
+          <a:xfrm>
+            <a:off x="548640" y="6272784"/>
+            <a:ext cx="11094415" cy="9525"/>
+          </a:xfrm>
+          <a:prstGeom prst="rect">
+            <a:avLst/>
+          </a:prstGeom>
+          <a:solidFill>
+            <a:srgbClr val="1E293B"/>
+          </a:solidFill>
+          <a:ln>
+            <a:noFill/>
+          </a:ln>
+        </p:spPr>
+        <p:style>
+          <a:lnRef idx="1">
+            <a:schemeClr val="accent1"/>
+          </a:lnRef>
+          <a:fillRef idx="3">
+            <a:schemeClr val="accent1"/>
+          </a:fillRef>
+          <a:effectRef idx="2">
+            <a:schemeClr val="accent1"/>
+          </a:effectRef>
+          <a:fontRef idx="minor">
+            <a:schemeClr val="lt1"/>
+          </a:fontRef>
+        </p:style>
+        <p:txBody>
+          <a:bodyPr rtlCol="0" anchor="ctr"/>
+          <a:lstStyle/>
+          <a:p>
+            <a:pPr algn="ctr"/>
+          </a:p>
+        </p:txBody>
+      </p:sp>
+      <p:sp>
+        <p:nvSpPr>
+          <p:cNvPr id="23" name="TextBox 22"/>
+          <p:cNvSpPr txBox="1"/>
+          <p:nvPr/>
+        </p:nvSpPr>
+        <p:spPr>
+          <a:xfrm>
+            <a:off x="548640" y="6355080"/>
+            <a:ext cx="8229600" cy="274320"/>
+          </a:xfrm>
+          <a:prstGeom prst="rect">
+            <a:avLst/>
+          </a:prstGeom>
+          <a:noFill/>
+        </p:spPr>
+        <p:txBody>
+          <a:bodyPr wrap="square" anchor="t" lIns="25400" rIns="25400" tIns="0" bIns="0">
+            <a:spAutoFit/>
+          </a:bodyPr>
+          <a:lstStyle/>
+          <a:p>
+            <a:pPr algn="l">
+              <a:lnSpc>
+                <a:spcPct val="112000"/>
+              </a:lnSpc>
+            </a:pPr>
+            <a:r>
+              <a:rPr sz="900" b="0">
+                <a:solidFill>
+                  <a:srgbClr val="94A3B8"/>
+                </a:solidFill>
+                <a:latin typeface="Segoe UI"/>
+              </a:rPr>
+              <a:t>GS08 · Matrículas y Notas — Trabajo colaborativo · Arteaga Rullier · Inocencio Gargate</a:t>
+            </a:r>
+          </a:p>
+        </p:txBody>
+      </p:sp>
+      <p:sp>
+        <p:nvSpPr>
+          <p:cNvPr id="24" name="TextBox 23"/>
+          <p:cNvSpPr txBox="1"/>
+          <p:nvPr/>
+        </p:nvSpPr>
+        <p:spPr>
+          <a:xfrm>
+            <a:off x="10728655" y="6355080"/>
+            <a:ext cx="914400" cy="274320"/>
+          </a:xfrm>
+          <a:prstGeom prst="rect">
+            <a:avLst/>
+          </a:prstGeom>
+          <a:noFill/>
+        </p:spPr>
+        <p:txBody>
+          <a:bodyPr wrap="square" anchor="t" lIns="25400" rIns="25400" tIns="0" bIns="0">
+            <a:spAutoFit/>
+          </a:bodyPr>
+          <a:lstStyle/>
+          <a:p>
+            <a:pPr algn="r">
+              <a:lnSpc>
+                <a:spcPct val="112000"/>
+              </a:lnSpc>
+            </a:pPr>
+            <a:r>
+              <a:rPr sz="900" b="0">
+                <a:solidFill>
+                  <a:srgbClr val="94A3B8"/>
+                </a:solidFill>
+                <a:latin typeface="Segoe UI"/>
+              </a:rPr>
+              <a:t>13 / 13</a:t>
             </a:r>
           </a:p>
         </p:txBody>
@@ -4675,20 +6065,210 @@
       <p:grpSpPr/>
       <p:sp>
         <p:nvSpPr>
-          <p:cNvPr id="2" name="Title 1"/>
-          <p:cNvSpPr>
-            <a:spLocks noGrp="1"/>
-          </p:cNvSpPr>
-          <p:nvPr>
-            <p:ph type="title"/>
-          </p:nvPr>
-        </p:nvSpPr>
-        <p:spPr/>
-        <p:txBody>
-          <a:bodyPr/>
-          <a:lstStyle/>
-          <a:p>
-            <a:r>
+          <p:cNvPr id="2" name="Rectangle 1"/>
+          <p:cNvSpPr/>
+          <p:nvPr/>
+        </p:nvSpPr>
+        <p:spPr>
+          <a:xfrm>
+            <a:off x="0" y="0"/>
+            <a:ext cx="12191695" cy="6858000"/>
+          </a:xfrm>
+          <a:prstGeom prst="rect">
+            <a:avLst/>
+          </a:prstGeom>
+          <a:solidFill>
+            <a:srgbClr val="0B1220"/>
+          </a:solidFill>
+          <a:ln>
+            <a:noFill/>
+          </a:ln>
+        </p:spPr>
+        <p:style>
+          <a:lnRef idx="1">
+            <a:schemeClr val="accent1"/>
+          </a:lnRef>
+          <a:fillRef idx="3">
+            <a:schemeClr val="accent1"/>
+          </a:fillRef>
+          <a:effectRef idx="2">
+            <a:schemeClr val="accent1"/>
+          </a:effectRef>
+          <a:fontRef idx="minor">
+            <a:schemeClr val="lt1"/>
+          </a:fontRef>
+        </p:style>
+        <p:txBody>
+          <a:bodyPr rtlCol="0" anchor="ctr"/>
+          <a:lstStyle/>
+          <a:p>
+            <a:pPr algn="ctr"/>
+          </a:p>
+        </p:txBody>
+      </p:sp>
+      <p:sp>
+        <p:nvSpPr>
+          <p:cNvPr id="3" name="Rectangle 2"/>
+          <p:cNvSpPr/>
+          <p:nvPr/>
+        </p:nvSpPr>
+        <p:spPr>
+          <a:xfrm>
+            <a:off x="0" y="0"/>
+            <a:ext cx="12191695" cy="41148"/>
+          </a:xfrm>
+          <a:prstGeom prst="rect">
+            <a:avLst/>
+          </a:prstGeom>
+          <a:solidFill>
+            <a:srgbClr val="22D3EE"/>
+          </a:solidFill>
+          <a:ln>
+            <a:noFill/>
+          </a:ln>
+        </p:spPr>
+        <p:style>
+          <a:lnRef idx="1">
+            <a:schemeClr val="accent1"/>
+          </a:lnRef>
+          <a:fillRef idx="3">
+            <a:schemeClr val="accent1"/>
+          </a:fillRef>
+          <a:effectRef idx="2">
+            <a:schemeClr val="accent1"/>
+          </a:effectRef>
+          <a:fontRef idx="minor">
+            <a:schemeClr val="lt1"/>
+          </a:fontRef>
+        </p:style>
+        <p:txBody>
+          <a:bodyPr rtlCol="0" anchor="ctr"/>
+          <a:lstStyle/>
+          <a:p>
+            <a:pPr algn="ctr"/>
+          </a:p>
+        </p:txBody>
+      </p:sp>
+      <p:sp>
+        <p:nvSpPr>
+          <p:cNvPr id="4" name="Rounded Rectangle 3"/>
+          <p:cNvSpPr/>
+          <p:nvPr/>
+        </p:nvSpPr>
+        <p:spPr>
+          <a:xfrm>
+            <a:off x="548640" y="384048"/>
+            <a:ext cx="566928" cy="310896"/>
+          </a:xfrm>
+          <a:prstGeom prst="roundRect">
+            <a:avLst>
+              <a:gd name="adj" fmla="val 30000"/>
+            </a:avLst>
+          </a:prstGeom>
+          <a:solidFill>
+            <a:srgbClr val="111C2E"/>
+          </a:solidFill>
+          <a:ln w="12700">
+            <a:solidFill>
+              <a:srgbClr val="22D3EE"/>
+            </a:solidFill>
+          </a:ln>
+        </p:spPr>
+        <p:style>
+          <a:lnRef idx="1">
+            <a:schemeClr val="accent1"/>
+          </a:lnRef>
+          <a:fillRef idx="3">
+            <a:schemeClr val="accent1"/>
+          </a:fillRef>
+          <a:effectRef idx="2">
+            <a:schemeClr val="accent1"/>
+          </a:effectRef>
+          <a:fontRef idx="minor">
+            <a:schemeClr val="lt1"/>
+          </a:fontRef>
+        </p:style>
+        <p:txBody>
+          <a:bodyPr rtlCol="0" anchor="ctr"/>
+          <a:lstStyle/>
+          <a:p>
+            <a:pPr algn="ctr"/>
+          </a:p>
+        </p:txBody>
+      </p:sp>
+      <p:sp>
+        <p:nvSpPr>
+          <p:cNvPr id="5" name="TextBox 4"/>
+          <p:cNvSpPr txBox="1"/>
+          <p:nvPr/>
+        </p:nvSpPr>
+        <p:spPr>
+          <a:xfrm>
+            <a:off x="548640" y="411480"/>
+            <a:ext cx="566928" cy="256032"/>
+          </a:xfrm>
+          <a:prstGeom prst="rect">
+            <a:avLst/>
+          </a:prstGeom>
+          <a:noFill/>
+        </p:spPr>
+        <p:txBody>
+          <a:bodyPr wrap="square" anchor="t" lIns="25400" rIns="25400" tIns="0" bIns="0">
+            <a:spAutoFit/>
+          </a:bodyPr>
+          <a:lstStyle/>
+          <a:p>
+            <a:pPr algn="ctr">
+              <a:lnSpc>
+                <a:spcPct val="112000"/>
+              </a:lnSpc>
+            </a:pPr>
+            <a:r>
+              <a:rPr sz="1000" b="1">
+                <a:solidFill>
+                  <a:srgbClr val="22D3EE"/>
+                </a:solidFill>
+                <a:latin typeface="Segoe UI"/>
+              </a:rPr>
+              <a:t>02</a:t>
+            </a:r>
+          </a:p>
+        </p:txBody>
+      </p:sp>
+      <p:sp>
+        <p:nvSpPr>
+          <p:cNvPr id="6" name="TextBox 5"/>
+          <p:cNvSpPr txBox="1"/>
+          <p:nvPr/>
+        </p:nvSpPr>
+        <p:spPr>
+          <a:xfrm>
+            <a:off x="1280160" y="310896"/>
+            <a:ext cx="10180015" cy="914400"/>
+          </a:xfrm>
+          <a:prstGeom prst="rect">
+            <a:avLst/>
+          </a:prstGeom>
+          <a:noFill/>
+        </p:spPr>
+        <p:txBody>
+          <a:bodyPr wrap="square" anchor="t" lIns="25400" rIns="25400" tIns="0" bIns="0">
+            <a:spAutoFit/>
+          </a:bodyPr>
+          <a:lstStyle/>
+          <a:p>
+            <a:pPr algn="l">
+              <a:lnSpc>
+                <a:spcPct val="100000"/>
+              </a:lnSpc>
+            </a:pPr>
+            <a:r>
+              <a:rPr sz="2700" b="1">
+                <a:solidFill>
+                  <a:srgbClr val="F8FAFC"/>
+                </a:solidFill>
+                <a:latin typeface="Segoe UI"/>
+              </a:rPr>
               <a:t>El problema y el alcance del MVP</a:t>
             </a:r>
           </a:p>
@@ -4696,44 +6276,285 @@
       </p:sp>
       <p:sp>
         <p:nvSpPr>
-          <p:cNvPr id="3" name="Content Placeholder 2"/>
-          <p:cNvSpPr>
-            <a:spLocks noGrp="1"/>
-          </p:cNvSpPr>
-          <p:nvPr>
-            <p:ph idx="1"/>
-          </p:nvPr>
-        </p:nvSpPr>
-        <p:spPr/>
-        <p:txBody>
-          <a:bodyPr/>
-          <a:lstStyle/>
-          <a:p>
-            <a:pPr/>
-            <a:r>
-              <a:rPr sz="1500"/>
+          <p:cNvPr id="7" name="TextBox 6"/>
+          <p:cNvSpPr txBox="1"/>
+          <p:nvPr/>
+        </p:nvSpPr>
+        <p:spPr>
+          <a:xfrm>
+            <a:off x="548640" y="1828800"/>
+            <a:ext cx="6492240" cy="4114800"/>
+          </a:xfrm>
+          <a:prstGeom prst="rect">
+            <a:avLst/>
+          </a:prstGeom>
+          <a:noFill/>
+        </p:spPr>
+        <p:txBody>
+          <a:bodyPr wrap="square" lIns="0" rIns="0">
+            <a:spAutoFit/>
+          </a:bodyPr>
+          <a:lstStyle/>
+          <a:p>
+            <a:pPr marL="233680" indent="-233680">
+              <a:lnSpc>
+                <a:spcPct val="118000"/>
+              </a:lnSpc>
+              <a:spcAft>
+                <a:spcPts val="1500"/>
+              </a:spcAft>
+            </a:pPr>
+            <a:r>
+              <a:rPr sz="1380">
+                <a:solidFill>
+                  <a:srgbClr val="22D3EE"/>
+                </a:solidFill>
+                <a:latin typeface="Segoe UI"/>
+              </a:rPr>
+              <a:t>▸  </a:t>
+            </a:r>
+            <a:r>
+              <a:rPr sz="1380">
+                <a:solidFill>
+                  <a:srgbClr val="E2E8F0"/>
+                </a:solidFill>
+                <a:latin typeface="Segoe UI"/>
+              </a:rPr>
               <a:t>Hoy: PHP + MySQL sin API, sin paginado, reglas dispersas en PHP, buscador LIKE que en PostgreSQL devuelve 0 filas sin avisar, y sin notas.</a:t>
             </a:r>
           </a:p>
           <a:p>
-            <a:pPr/>
-            <a:r>
-              <a:rPr sz="1500"/>
+            <a:pPr marL="233680" indent="-233680">
+              <a:lnSpc>
+                <a:spcPct val="118000"/>
+              </a:lnSpc>
+              <a:spcAft>
+                <a:spcPts val="1500"/>
+              </a:spcAft>
+            </a:pPr>
+            <a:r>
+              <a:rPr sz="1380">
+                <a:solidFill>
+                  <a:srgbClr val="22D3EE"/>
+                </a:solidFill>
+                <a:latin typeface="Segoe UI"/>
+              </a:rPr>
+              <a:t>▸  </a:t>
+            </a:r>
+            <a:r>
+              <a:rPr sz="1380">
+                <a:solidFill>
+                  <a:srgbClr val="E2E8F0"/>
+                </a:solidFill>
+                <a:latin typeface="Segoe UI"/>
+              </a:rPr>
               <a:t>Entra: autenticación, panel con KPIs, estudiantes, cursos, matrículas, usuarios, NOTAS y boleta, más contenedores, CI y Kubernetes.</a:t>
             </a:r>
           </a:p>
           <a:p>
-            <a:pPr/>
-            <a:r>
-              <a:rPr sz="1500"/>
+            <a:pPr marL="233680" indent="-233680">
+              <a:lnSpc>
+                <a:spcPct val="118000"/>
+              </a:lnSpc>
+              <a:spcAft>
+                <a:spcPts val="1500"/>
+              </a:spcAft>
+            </a:pPr>
+            <a:r>
+              <a:rPr sz="1380">
+                <a:solidFill>
+                  <a:srgbClr val="22D3EE"/>
+                </a:solidFill>
+                <a:latin typeface="Segoe UI"/>
+              </a:rPr>
+              <a:t>▸  </a:t>
+            </a:r>
+            <a:r>
+              <a:rPr sz="1380">
+                <a:solidFill>
+                  <a:srgbClr val="E2E8F0"/>
+                </a:solidFill>
+                <a:latin typeface="Segoe UI"/>
+              </a:rPr>
               <a:t>39 criterios de aceptación con ID único (C-01…C-39): cada uno es un comando o una cifra que se puede comprobar.</a:t>
             </a:r>
           </a:p>
           <a:p>
-            <a:pPr/>
-            <a:r>
-              <a:rPr sz="1500"/>
+            <a:pPr marL="233680" indent="-233680">
+              <a:lnSpc>
+                <a:spcPct val="118000"/>
+              </a:lnSpc>
+              <a:spcAft>
+                <a:spcPts val="1500"/>
+              </a:spcAft>
+            </a:pPr>
+            <a:r>
+              <a:rPr sz="1380">
+                <a:solidFill>
+                  <a:srgbClr val="22D3EE"/>
+                </a:solidFill>
+                <a:latin typeface="Segoe UI"/>
+              </a:rPr>
+              <a:t>▸  </a:t>
+            </a:r>
+            <a:r>
+              <a:rPr sz="1380">
+                <a:solidFill>
+                  <a:srgbClr val="E2E8F0"/>
+                </a:solidFill>
+                <a:latin typeface="Segoe UI"/>
+              </a:rPr>
               <a:t>NO entra (20 puntos, por decisión): portal del estudiante, rol docente, pagos, horarios, 2FA, app móvil, nube, backups.</a:t>
+            </a:r>
+          </a:p>
+        </p:txBody>
+      </p:sp>
+      <p:pic>
+        <p:nvPicPr>
+          <p:cNvPr id="8" name="Picture 7" descr="_recorte_hero_484x415.jpg"/>
+          <p:cNvPicPr>
+            <a:picLocks noChangeAspect="1"/>
+          </p:cNvPicPr>
+          <p:nvPr/>
+        </p:nvPicPr>
+        <p:blipFill>
+          <a:blip r:embed="rId2"/>
+          <a:stretch>
+            <a:fillRect/>
+          </a:stretch>
+        </p:blipFill>
+        <p:spPr>
+          <a:xfrm>
+            <a:off x="7269480" y="1737360"/>
+            <a:ext cx="4434840" cy="3794760"/>
+          </a:xfrm>
+          <a:prstGeom prst="rect">
+            <a:avLst/>
+          </a:prstGeom>
+          <a:ln w="12700">
+            <a:solidFill>
+              <a:srgbClr val="1E293B"/>
+            </a:solidFill>
+          </a:ln>
+        </p:spPr>
+      </p:pic>
+      <p:sp>
+        <p:nvSpPr>
+          <p:cNvPr id="9" name="Rectangle 8"/>
+          <p:cNvSpPr/>
+          <p:nvPr/>
+        </p:nvSpPr>
+        <p:spPr>
+          <a:xfrm>
+            <a:off x="548640" y="6272784"/>
+            <a:ext cx="11094415" cy="9525"/>
+          </a:xfrm>
+          <a:prstGeom prst="rect">
+            <a:avLst/>
+          </a:prstGeom>
+          <a:solidFill>
+            <a:srgbClr val="1E293B"/>
+          </a:solidFill>
+          <a:ln>
+            <a:noFill/>
+          </a:ln>
+        </p:spPr>
+        <p:style>
+          <a:lnRef idx="1">
+            <a:schemeClr val="accent1"/>
+          </a:lnRef>
+          <a:fillRef idx="3">
+            <a:schemeClr val="accent1"/>
+          </a:fillRef>
+          <a:effectRef idx="2">
+            <a:schemeClr val="accent1"/>
+          </a:effectRef>
+          <a:fontRef idx="minor">
+            <a:schemeClr val="lt1"/>
+          </a:fontRef>
+        </p:style>
+        <p:txBody>
+          <a:bodyPr rtlCol="0" anchor="ctr"/>
+          <a:lstStyle/>
+          <a:p>
+            <a:pPr algn="ctr"/>
+          </a:p>
+        </p:txBody>
+      </p:sp>
+      <p:sp>
+        <p:nvSpPr>
+          <p:cNvPr id="10" name="TextBox 9"/>
+          <p:cNvSpPr txBox="1"/>
+          <p:nvPr/>
+        </p:nvSpPr>
+        <p:spPr>
+          <a:xfrm>
+            <a:off x="548640" y="6355080"/>
+            <a:ext cx="8229600" cy="274320"/>
+          </a:xfrm>
+          <a:prstGeom prst="rect">
+            <a:avLst/>
+          </a:prstGeom>
+          <a:noFill/>
+        </p:spPr>
+        <p:txBody>
+          <a:bodyPr wrap="square" anchor="t" lIns="25400" rIns="25400" tIns="0" bIns="0">
+            <a:spAutoFit/>
+          </a:bodyPr>
+          <a:lstStyle/>
+          <a:p>
+            <a:pPr algn="l">
+              <a:lnSpc>
+                <a:spcPct val="112000"/>
+              </a:lnSpc>
+            </a:pPr>
+            <a:r>
+              <a:rPr sz="900" b="0">
+                <a:solidFill>
+                  <a:srgbClr val="94A3B8"/>
+                </a:solidFill>
+                <a:latin typeface="Segoe UI"/>
+              </a:rPr>
+              <a:t>GS08 · Matrículas y Notas — Trabajo colaborativo · Arteaga Rullier · Inocencio Gargate</a:t>
+            </a:r>
+          </a:p>
+        </p:txBody>
+      </p:sp>
+      <p:sp>
+        <p:nvSpPr>
+          <p:cNvPr id="11" name="TextBox 10"/>
+          <p:cNvSpPr txBox="1"/>
+          <p:nvPr/>
+        </p:nvSpPr>
+        <p:spPr>
+          <a:xfrm>
+            <a:off x="10728655" y="6355080"/>
+            <a:ext cx="914400" cy="274320"/>
+          </a:xfrm>
+          <a:prstGeom prst="rect">
+            <a:avLst/>
+          </a:prstGeom>
+          <a:noFill/>
+        </p:spPr>
+        <p:txBody>
+          <a:bodyPr wrap="square" anchor="t" lIns="25400" rIns="25400" tIns="0" bIns="0">
+            <a:spAutoFit/>
+          </a:bodyPr>
+          <a:lstStyle/>
+          <a:p>
+            <a:pPr algn="r">
+              <a:lnSpc>
+                <a:spcPct val="112000"/>
+              </a:lnSpc>
+            </a:pPr>
+            <a:r>
+              <a:rPr sz="900" b="0">
+                <a:solidFill>
+                  <a:srgbClr val="94A3B8"/>
+                </a:solidFill>
+                <a:latin typeface="Segoe UI"/>
+              </a:rPr>
+              <a:t>02 / 13</a:t>
             </a:r>
           </a:p>
         </p:txBody>
@@ -4758,20 +6579,210 @@
       <p:grpSpPr/>
       <p:sp>
         <p:nvSpPr>
-          <p:cNvPr id="2" name="Title 1"/>
-          <p:cNvSpPr>
-            <a:spLocks noGrp="1"/>
-          </p:cNvSpPr>
-          <p:nvPr>
-            <p:ph type="title"/>
-          </p:nvPr>
-        </p:nvSpPr>
-        <p:spPr/>
-        <p:txBody>
-          <a:bodyPr/>
-          <a:lstStyle/>
-          <a:p>
-            <a:r>
+          <p:cNvPr id="2" name="Rectangle 1"/>
+          <p:cNvSpPr/>
+          <p:nvPr/>
+        </p:nvSpPr>
+        <p:spPr>
+          <a:xfrm>
+            <a:off x="0" y="0"/>
+            <a:ext cx="12191695" cy="6858000"/>
+          </a:xfrm>
+          <a:prstGeom prst="rect">
+            <a:avLst/>
+          </a:prstGeom>
+          <a:solidFill>
+            <a:srgbClr val="0B1220"/>
+          </a:solidFill>
+          <a:ln>
+            <a:noFill/>
+          </a:ln>
+        </p:spPr>
+        <p:style>
+          <a:lnRef idx="1">
+            <a:schemeClr val="accent1"/>
+          </a:lnRef>
+          <a:fillRef idx="3">
+            <a:schemeClr val="accent1"/>
+          </a:fillRef>
+          <a:effectRef idx="2">
+            <a:schemeClr val="accent1"/>
+          </a:effectRef>
+          <a:fontRef idx="minor">
+            <a:schemeClr val="lt1"/>
+          </a:fontRef>
+        </p:style>
+        <p:txBody>
+          <a:bodyPr rtlCol="0" anchor="ctr"/>
+          <a:lstStyle/>
+          <a:p>
+            <a:pPr algn="ctr"/>
+          </a:p>
+        </p:txBody>
+      </p:sp>
+      <p:sp>
+        <p:nvSpPr>
+          <p:cNvPr id="3" name="Rectangle 2"/>
+          <p:cNvSpPr/>
+          <p:nvPr/>
+        </p:nvSpPr>
+        <p:spPr>
+          <a:xfrm>
+            <a:off x="0" y="0"/>
+            <a:ext cx="12191695" cy="41148"/>
+          </a:xfrm>
+          <a:prstGeom prst="rect">
+            <a:avLst/>
+          </a:prstGeom>
+          <a:solidFill>
+            <a:srgbClr val="22D3EE"/>
+          </a:solidFill>
+          <a:ln>
+            <a:noFill/>
+          </a:ln>
+        </p:spPr>
+        <p:style>
+          <a:lnRef idx="1">
+            <a:schemeClr val="accent1"/>
+          </a:lnRef>
+          <a:fillRef idx="3">
+            <a:schemeClr val="accent1"/>
+          </a:fillRef>
+          <a:effectRef idx="2">
+            <a:schemeClr val="accent1"/>
+          </a:effectRef>
+          <a:fontRef idx="minor">
+            <a:schemeClr val="lt1"/>
+          </a:fontRef>
+        </p:style>
+        <p:txBody>
+          <a:bodyPr rtlCol="0" anchor="ctr"/>
+          <a:lstStyle/>
+          <a:p>
+            <a:pPr algn="ctr"/>
+          </a:p>
+        </p:txBody>
+      </p:sp>
+      <p:sp>
+        <p:nvSpPr>
+          <p:cNvPr id="4" name="Rounded Rectangle 3"/>
+          <p:cNvSpPr/>
+          <p:nvPr/>
+        </p:nvSpPr>
+        <p:spPr>
+          <a:xfrm>
+            <a:off x="548640" y="384048"/>
+            <a:ext cx="566928" cy="310896"/>
+          </a:xfrm>
+          <a:prstGeom prst="roundRect">
+            <a:avLst>
+              <a:gd name="adj" fmla="val 30000"/>
+            </a:avLst>
+          </a:prstGeom>
+          <a:solidFill>
+            <a:srgbClr val="111C2E"/>
+          </a:solidFill>
+          <a:ln w="12700">
+            <a:solidFill>
+              <a:srgbClr val="22D3EE"/>
+            </a:solidFill>
+          </a:ln>
+        </p:spPr>
+        <p:style>
+          <a:lnRef idx="1">
+            <a:schemeClr val="accent1"/>
+          </a:lnRef>
+          <a:fillRef idx="3">
+            <a:schemeClr val="accent1"/>
+          </a:fillRef>
+          <a:effectRef idx="2">
+            <a:schemeClr val="accent1"/>
+          </a:effectRef>
+          <a:fontRef idx="minor">
+            <a:schemeClr val="lt1"/>
+          </a:fontRef>
+        </p:style>
+        <p:txBody>
+          <a:bodyPr rtlCol="0" anchor="ctr"/>
+          <a:lstStyle/>
+          <a:p>
+            <a:pPr algn="ctr"/>
+          </a:p>
+        </p:txBody>
+      </p:sp>
+      <p:sp>
+        <p:nvSpPr>
+          <p:cNvPr id="5" name="TextBox 4"/>
+          <p:cNvSpPr txBox="1"/>
+          <p:nvPr/>
+        </p:nvSpPr>
+        <p:spPr>
+          <a:xfrm>
+            <a:off x="548640" y="411480"/>
+            <a:ext cx="566928" cy="256032"/>
+          </a:xfrm>
+          <a:prstGeom prst="rect">
+            <a:avLst/>
+          </a:prstGeom>
+          <a:noFill/>
+        </p:spPr>
+        <p:txBody>
+          <a:bodyPr wrap="square" anchor="t" lIns="25400" rIns="25400" tIns="0" bIns="0">
+            <a:spAutoFit/>
+          </a:bodyPr>
+          <a:lstStyle/>
+          <a:p>
+            <a:pPr algn="ctr">
+              <a:lnSpc>
+                <a:spcPct val="112000"/>
+              </a:lnSpc>
+            </a:pPr>
+            <a:r>
+              <a:rPr sz="1000" b="1">
+                <a:solidFill>
+                  <a:srgbClr val="22D3EE"/>
+                </a:solidFill>
+                <a:latin typeface="Segoe UI"/>
+              </a:rPr>
+              <a:t>03</a:t>
+            </a:r>
+          </a:p>
+        </p:txBody>
+      </p:sp>
+      <p:sp>
+        <p:nvSpPr>
+          <p:cNvPr id="6" name="TextBox 5"/>
+          <p:cNvSpPr txBox="1"/>
+          <p:nvPr/>
+        </p:nvSpPr>
+        <p:spPr>
+          <a:xfrm>
+            <a:off x="1280160" y="310896"/>
+            <a:ext cx="10180015" cy="914400"/>
+          </a:xfrm>
+          <a:prstGeom prst="rect">
+            <a:avLst/>
+          </a:prstGeom>
+          <a:noFill/>
+        </p:spPr>
+        <p:txBody>
+          <a:bodyPr wrap="square" anchor="t" lIns="25400" rIns="25400" tIns="0" bIns="0">
+            <a:spAutoFit/>
+          </a:bodyPr>
+          <a:lstStyle/>
+          <a:p>
+            <a:pPr algn="l">
+              <a:lnSpc>
+                <a:spcPct val="100000"/>
+              </a:lnSpc>
+            </a:pPr>
+            <a:r>
+              <a:rPr sz="2700" b="1">
+                <a:solidFill>
+                  <a:srgbClr val="F8FAFC"/>
+                </a:solidFill>
+                <a:latin typeface="Segoe UI"/>
+              </a:rPr>
               <a:t>Arquitectura y stack</a:t>
             </a:r>
           </a:p>
@@ -4779,40 +6790,285 @@
       </p:sp>
       <p:sp>
         <p:nvSpPr>
-          <p:cNvPr id="3" name="Content Placeholder 2"/>
-          <p:cNvSpPr>
-            <a:spLocks noGrp="1"/>
-          </p:cNvSpPr>
-          <p:nvPr>
-            <p:ph idx="1"/>
-          </p:nvPr>
-        </p:nvSpPr>
-        <p:spPr/>
-        <p:txBody>
-          <a:bodyPr/>
-          <a:lstStyle/>
-          <a:p>
-            <a:r>
-              <a:rPr sz="1500"/>
+          <p:cNvPr id="7" name="TextBox 6"/>
+          <p:cNvSpPr txBox="1"/>
+          <p:nvPr/>
+        </p:nvSpPr>
+        <p:spPr>
+          <a:xfrm>
+            <a:off x="548640" y="1828800"/>
+            <a:ext cx="6492240" cy="4114800"/>
+          </a:xfrm>
+          <a:prstGeom prst="rect">
+            <a:avLst/>
+          </a:prstGeom>
+          <a:noFill/>
+        </p:spPr>
+        <p:txBody>
+          <a:bodyPr wrap="square" lIns="0" rIns="0">
+            <a:spAutoFit/>
+          </a:bodyPr>
+          <a:lstStyle/>
+          <a:p>
+            <a:pPr marL="233680" indent="-233680">
+              <a:lnSpc>
+                <a:spcPct val="118000"/>
+              </a:lnSpc>
+              <a:spcAft>
+                <a:spcPts val="1500"/>
+              </a:spcAft>
+            </a:pPr>
+            <a:r>
+              <a:rPr sz="1380">
+                <a:solidFill>
+                  <a:srgbClr val="22D3EE"/>
+                </a:solidFill>
+                <a:latin typeface="Segoe UI"/>
+              </a:rPr>
+              <a:t>▸  </a:t>
+            </a:r>
+            <a:r>
+              <a:rPr sz="1380">
+                <a:solidFill>
+                  <a:srgbClr val="E2E8F0"/>
+                </a:solidFill>
+                <a:latin typeface="Segoe UI"/>
+              </a:rPr>
               <a:t>SPA React 19 + nginx → 2 instancias del API FastAPI → PostgreSQL 16, todo en contenedores sobre una red Docker.</a:t>
             </a:r>
           </a:p>
           <a:p>
-            <a:r>
-              <a:rPr sz="1500"/>
+            <a:pPr marL="233680" indent="-233680">
+              <a:lnSpc>
+                <a:spcPct val="118000"/>
+              </a:lnSpc>
+              <a:spcAft>
+                <a:spcPts val="1500"/>
+              </a:spcAft>
+            </a:pPr>
+            <a:r>
+              <a:rPr sz="1380">
+                <a:solidFill>
+                  <a:srgbClr val="22D3EE"/>
+                </a:solidFill>
+                <a:latin typeface="Segoe UI"/>
+              </a:rPr>
+              <a:t>▸  </a:t>
+            </a:r>
+            <a:r>
+              <a:rPr sz="1380">
+                <a:solidFill>
+                  <a:srgbClr val="E2E8F0"/>
+                </a:solidFill>
+                <a:latin typeface="Segoe UI"/>
+              </a:rPr>
               <a:t>FastAPI 0.141.1 · PostgreSQL 16.15 · React 19 + Vite + Tailwind · Docker 29.8.0 · Prometheus v3.13.3 + Grafana 12.4.11.</a:t>
             </a:r>
           </a:p>
           <a:p>
-            <a:r>
-              <a:rPr sz="1500"/>
+            <a:pPr marL="233680" indent="-233680">
+              <a:lnSpc>
+                <a:spcPct val="118000"/>
+              </a:lnSpc>
+              <a:spcAft>
+                <a:spcPts val="1500"/>
+              </a:spcAft>
+            </a:pPr>
+            <a:r>
+              <a:rPr sz="1380">
+                <a:solidFill>
+                  <a:srgbClr val="22D3EE"/>
+                </a:solidFill>
+                <a:latin typeface="Segoe UI"/>
+              </a:rPr>
+              <a:t>▸  </a:t>
+            </a:r>
+            <a:r>
+              <a:rPr sz="1380">
+                <a:solidFill>
+                  <a:srgbClr val="E2E8F0"/>
+                </a:solidFill>
+                <a:latin typeface="Segoe UI"/>
+              </a:rPr>
               <a:t>Cinco diagramas documentados y verificados: los 5 renderizan sin error.</a:t>
             </a:r>
           </a:p>
           <a:p>
-            <a:r>
-              <a:rPr sz="1500"/>
+            <a:pPr marL="233680" indent="-233680">
+              <a:lnSpc>
+                <a:spcPct val="118000"/>
+              </a:lnSpc>
+              <a:spcAft>
+                <a:spcPts val="1500"/>
+              </a:spcAft>
+            </a:pPr>
+            <a:r>
+              <a:rPr sz="1380">
+                <a:solidFill>
+                  <a:srgbClr val="22D3EE"/>
+                </a:solidFill>
+                <a:latin typeface="Segoe UI"/>
+              </a:rPr>
+              <a:t>▸  </a:t>
+            </a:r>
+            <a:r>
+              <a:rPr sz="1380">
+                <a:solidFill>
+                  <a:srgbClr val="E2E8F0"/>
+                </a:solidFill>
+                <a:latin typeface="Segoe UI"/>
+              </a:rPr>
               <a:t>Decisión central: se reimplementa el legacy, no se migra — se conservan el modelo de datos y la UX, no el código.</a:t>
+            </a:r>
+          </a:p>
+        </p:txBody>
+      </p:sp>
+      <p:pic>
+        <p:nvPicPr>
+          <p:cNvPr id="8" name="Picture 7" descr="_recorte_arq_484x415.jpg"/>
+          <p:cNvPicPr>
+            <a:picLocks noChangeAspect="1"/>
+          </p:cNvPicPr>
+          <p:nvPr/>
+        </p:nvPicPr>
+        <p:blipFill>
+          <a:blip r:embed="rId2"/>
+          <a:stretch>
+            <a:fillRect/>
+          </a:stretch>
+        </p:blipFill>
+        <p:spPr>
+          <a:xfrm>
+            <a:off x="7269480" y="1737360"/>
+            <a:ext cx="4434840" cy="3794760"/>
+          </a:xfrm>
+          <a:prstGeom prst="rect">
+            <a:avLst/>
+          </a:prstGeom>
+          <a:ln w="12700">
+            <a:solidFill>
+              <a:srgbClr val="1E293B"/>
+            </a:solidFill>
+          </a:ln>
+        </p:spPr>
+      </p:pic>
+      <p:sp>
+        <p:nvSpPr>
+          <p:cNvPr id="9" name="Rectangle 8"/>
+          <p:cNvSpPr/>
+          <p:nvPr/>
+        </p:nvSpPr>
+        <p:spPr>
+          <a:xfrm>
+            <a:off x="548640" y="6272784"/>
+            <a:ext cx="11094415" cy="9525"/>
+          </a:xfrm>
+          <a:prstGeom prst="rect">
+            <a:avLst/>
+          </a:prstGeom>
+          <a:solidFill>
+            <a:srgbClr val="1E293B"/>
+          </a:solidFill>
+          <a:ln>
+            <a:noFill/>
+          </a:ln>
+        </p:spPr>
+        <p:style>
+          <a:lnRef idx="1">
+            <a:schemeClr val="accent1"/>
+          </a:lnRef>
+          <a:fillRef idx="3">
+            <a:schemeClr val="accent1"/>
+          </a:fillRef>
+          <a:effectRef idx="2">
+            <a:schemeClr val="accent1"/>
+          </a:effectRef>
+          <a:fontRef idx="minor">
+            <a:schemeClr val="lt1"/>
+          </a:fontRef>
+        </p:style>
+        <p:txBody>
+          <a:bodyPr rtlCol="0" anchor="ctr"/>
+          <a:lstStyle/>
+          <a:p>
+            <a:pPr algn="ctr"/>
+          </a:p>
+        </p:txBody>
+      </p:sp>
+      <p:sp>
+        <p:nvSpPr>
+          <p:cNvPr id="10" name="TextBox 9"/>
+          <p:cNvSpPr txBox="1"/>
+          <p:nvPr/>
+        </p:nvSpPr>
+        <p:spPr>
+          <a:xfrm>
+            <a:off x="548640" y="6355080"/>
+            <a:ext cx="8229600" cy="274320"/>
+          </a:xfrm>
+          <a:prstGeom prst="rect">
+            <a:avLst/>
+          </a:prstGeom>
+          <a:noFill/>
+        </p:spPr>
+        <p:txBody>
+          <a:bodyPr wrap="square" anchor="t" lIns="25400" rIns="25400" tIns="0" bIns="0">
+            <a:spAutoFit/>
+          </a:bodyPr>
+          <a:lstStyle/>
+          <a:p>
+            <a:pPr algn="l">
+              <a:lnSpc>
+                <a:spcPct val="112000"/>
+              </a:lnSpc>
+            </a:pPr>
+            <a:r>
+              <a:rPr sz="900" b="0">
+                <a:solidFill>
+                  <a:srgbClr val="94A3B8"/>
+                </a:solidFill>
+                <a:latin typeface="Segoe UI"/>
+              </a:rPr>
+              <a:t>GS08 · Matrículas y Notas — Trabajo colaborativo · Arteaga Rullier · Inocencio Gargate</a:t>
+            </a:r>
+          </a:p>
+        </p:txBody>
+      </p:sp>
+      <p:sp>
+        <p:nvSpPr>
+          <p:cNvPr id="11" name="TextBox 10"/>
+          <p:cNvSpPr txBox="1"/>
+          <p:nvPr/>
+        </p:nvSpPr>
+        <p:spPr>
+          <a:xfrm>
+            <a:off x="10728655" y="6355080"/>
+            <a:ext cx="914400" cy="274320"/>
+          </a:xfrm>
+          <a:prstGeom prst="rect">
+            <a:avLst/>
+          </a:prstGeom>
+          <a:noFill/>
+        </p:spPr>
+        <p:txBody>
+          <a:bodyPr wrap="square" anchor="t" lIns="25400" rIns="25400" tIns="0" bIns="0">
+            <a:spAutoFit/>
+          </a:bodyPr>
+          <a:lstStyle/>
+          <a:p>
+            <a:pPr algn="r">
+              <a:lnSpc>
+                <a:spcPct val="112000"/>
+              </a:lnSpc>
+            </a:pPr>
+            <a:r>
+              <a:rPr sz="900" b="0">
+                <a:solidFill>
+                  <a:srgbClr val="94A3B8"/>
+                </a:solidFill>
+                <a:latin typeface="Segoe UI"/>
+              </a:rPr>
+              <a:t>03 / 13</a:t>
             </a:r>
           </a:p>
         </p:txBody>
@@ -4837,20 +7093,210 @@
       <p:grpSpPr/>
       <p:sp>
         <p:nvSpPr>
-          <p:cNvPr id="2" name="Title 1"/>
-          <p:cNvSpPr>
-            <a:spLocks noGrp="1"/>
-          </p:cNvSpPr>
-          <p:nvPr>
-            <p:ph type="title"/>
-          </p:nvPr>
-        </p:nvSpPr>
-        <p:spPr/>
-        <p:txBody>
-          <a:bodyPr/>
-          <a:lstStyle/>
-          <a:p>
-            <a:r>
+          <p:cNvPr id="2" name="Rectangle 1"/>
+          <p:cNvSpPr/>
+          <p:nvPr/>
+        </p:nvSpPr>
+        <p:spPr>
+          <a:xfrm>
+            <a:off x="0" y="0"/>
+            <a:ext cx="12191695" cy="6858000"/>
+          </a:xfrm>
+          <a:prstGeom prst="rect">
+            <a:avLst/>
+          </a:prstGeom>
+          <a:solidFill>
+            <a:srgbClr val="0B1220"/>
+          </a:solidFill>
+          <a:ln>
+            <a:noFill/>
+          </a:ln>
+        </p:spPr>
+        <p:style>
+          <a:lnRef idx="1">
+            <a:schemeClr val="accent1"/>
+          </a:lnRef>
+          <a:fillRef idx="3">
+            <a:schemeClr val="accent1"/>
+          </a:fillRef>
+          <a:effectRef idx="2">
+            <a:schemeClr val="accent1"/>
+          </a:effectRef>
+          <a:fontRef idx="minor">
+            <a:schemeClr val="lt1"/>
+          </a:fontRef>
+        </p:style>
+        <p:txBody>
+          <a:bodyPr rtlCol="0" anchor="ctr"/>
+          <a:lstStyle/>
+          <a:p>
+            <a:pPr algn="ctr"/>
+          </a:p>
+        </p:txBody>
+      </p:sp>
+      <p:sp>
+        <p:nvSpPr>
+          <p:cNvPr id="3" name="Rectangle 2"/>
+          <p:cNvSpPr/>
+          <p:nvPr/>
+        </p:nvSpPr>
+        <p:spPr>
+          <a:xfrm>
+            <a:off x="0" y="0"/>
+            <a:ext cx="12191695" cy="41148"/>
+          </a:xfrm>
+          <a:prstGeom prst="rect">
+            <a:avLst/>
+          </a:prstGeom>
+          <a:solidFill>
+            <a:srgbClr val="22D3EE"/>
+          </a:solidFill>
+          <a:ln>
+            <a:noFill/>
+          </a:ln>
+        </p:spPr>
+        <p:style>
+          <a:lnRef idx="1">
+            <a:schemeClr val="accent1"/>
+          </a:lnRef>
+          <a:fillRef idx="3">
+            <a:schemeClr val="accent1"/>
+          </a:fillRef>
+          <a:effectRef idx="2">
+            <a:schemeClr val="accent1"/>
+          </a:effectRef>
+          <a:fontRef idx="minor">
+            <a:schemeClr val="lt1"/>
+          </a:fontRef>
+        </p:style>
+        <p:txBody>
+          <a:bodyPr rtlCol="0" anchor="ctr"/>
+          <a:lstStyle/>
+          <a:p>
+            <a:pPr algn="ctr"/>
+          </a:p>
+        </p:txBody>
+      </p:sp>
+      <p:sp>
+        <p:nvSpPr>
+          <p:cNvPr id="4" name="Rounded Rectangle 3"/>
+          <p:cNvSpPr/>
+          <p:nvPr/>
+        </p:nvSpPr>
+        <p:spPr>
+          <a:xfrm>
+            <a:off x="548640" y="384048"/>
+            <a:ext cx="566928" cy="310896"/>
+          </a:xfrm>
+          <a:prstGeom prst="roundRect">
+            <a:avLst>
+              <a:gd name="adj" fmla="val 30000"/>
+            </a:avLst>
+          </a:prstGeom>
+          <a:solidFill>
+            <a:srgbClr val="111C2E"/>
+          </a:solidFill>
+          <a:ln w="12700">
+            <a:solidFill>
+              <a:srgbClr val="22D3EE"/>
+            </a:solidFill>
+          </a:ln>
+        </p:spPr>
+        <p:style>
+          <a:lnRef idx="1">
+            <a:schemeClr val="accent1"/>
+          </a:lnRef>
+          <a:fillRef idx="3">
+            <a:schemeClr val="accent1"/>
+          </a:fillRef>
+          <a:effectRef idx="2">
+            <a:schemeClr val="accent1"/>
+          </a:effectRef>
+          <a:fontRef idx="minor">
+            <a:schemeClr val="lt1"/>
+          </a:fontRef>
+        </p:style>
+        <p:txBody>
+          <a:bodyPr rtlCol="0" anchor="ctr"/>
+          <a:lstStyle/>
+          <a:p>
+            <a:pPr algn="ctr"/>
+          </a:p>
+        </p:txBody>
+      </p:sp>
+      <p:sp>
+        <p:nvSpPr>
+          <p:cNvPr id="5" name="TextBox 4"/>
+          <p:cNvSpPr txBox="1"/>
+          <p:nvPr/>
+        </p:nvSpPr>
+        <p:spPr>
+          <a:xfrm>
+            <a:off x="548640" y="411480"/>
+            <a:ext cx="566928" cy="256032"/>
+          </a:xfrm>
+          <a:prstGeom prst="rect">
+            <a:avLst/>
+          </a:prstGeom>
+          <a:noFill/>
+        </p:spPr>
+        <p:txBody>
+          <a:bodyPr wrap="square" anchor="t" lIns="25400" rIns="25400" tIns="0" bIns="0">
+            <a:spAutoFit/>
+          </a:bodyPr>
+          <a:lstStyle/>
+          <a:p>
+            <a:pPr algn="ctr">
+              <a:lnSpc>
+                <a:spcPct val="112000"/>
+              </a:lnSpc>
+            </a:pPr>
+            <a:r>
+              <a:rPr sz="1000" b="1">
+                <a:solidFill>
+                  <a:srgbClr val="22D3EE"/>
+                </a:solidFill>
+                <a:latin typeface="Segoe UI"/>
+              </a:rPr>
+              <a:t>04</a:t>
+            </a:r>
+          </a:p>
+        </p:txBody>
+      </p:sp>
+      <p:sp>
+        <p:nvSpPr>
+          <p:cNvPr id="6" name="TextBox 5"/>
+          <p:cNvSpPr txBox="1"/>
+          <p:nvPr/>
+        </p:nvSpPr>
+        <p:spPr>
+          <a:xfrm>
+            <a:off x="1280160" y="310896"/>
+            <a:ext cx="10180015" cy="914400"/>
+          </a:xfrm>
+          <a:prstGeom prst="rect">
+            <a:avLst/>
+          </a:prstGeom>
+          <a:noFill/>
+        </p:spPr>
+        <p:txBody>
+          <a:bodyPr wrap="square" anchor="t" lIns="25400" rIns="25400" tIns="0" bIns="0">
+            <a:spAutoFit/>
+          </a:bodyPr>
+          <a:lstStyle/>
+          <a:p>
+            <a:pPr algn="l">
+              <a:lnSpc>
+                <a:spcPct val="100000"/>
+              </a:lnSpc>
+            </a:pPr>
+            <a:r>
+              <a:rPr sz="2700" b="1">
+                <a:solidFill>
+                  <a:srgbClr val="F8FAFC"/>
+                </a:solidFill>
+                <a:latin typeface="Segoe UI"/>
+              </a:rPr>
               <a:t>Modelo de datos y reglas de negocio</a:t>
             </a:r>
           </a:p>
@@ -4858,44 +7304,285 @@
       </p:sp>
       <p:sp>
         <p:nvSpPr>
-          <p:cNvPr id="3" name="Content Placeholder 2"/>
-          <p:cNvSpPr>
-            <a:spLocks noGrp="1"/>
-          </p:cNvSpPr>
-          <p:nvPr>
-            <p:ph idx="1"/>
-          </p:nvPr>
-        </p:nvSpPr>
-        <p:spPr/>
-        <p:txBody>
-          <a:bodyPr/>
-          <a:lstStyle/>
-          <a:p>
-            <a:pPr/>
-            <a:r>
-              <a:rPr sz="1500"/>
+          <p:cNvPr id="7" name="TextBox 6"/>
+          <p:cNvSpPr txBox="1"/>
+          <p:nvPr/>
+        </p:nvSpPr>
+        <p:spPr>
+          <a:xfrm>
+            <a:off x="548640" y="1828800"/>
+            <a:ext cx="6492240" cy="4114800"/>
+          </a:xfrm>
+          <a:prstGeom prst="rect">
+            <a:avLst/>
+          </a:prstGeom>
+          <a:noFill/>
+        </p:spPr>
+        <p:txBody>
+          <a:bodyPr wrap="square" lIns="0" rIns="0">
+            <a:spAutoFit/>
+          </a:bodyPr>
+          <a:lstStyle/>
+          <a:p>
+            <a:pPr marL="233680" indent="-233680">
+              <a:lnSpc>
+                <a:spcPct val="118000"/>
+              </a:lnSpc>
+              <a:spcAft>
+                <a:spcPts val="1500"/>
+              </a:spcAft>
+            </a:pPr>
+            <a:r>
+              <a:rPr sz="1380">
+                <a:solidFill>
+                  <a:srgbClr val="22D3EE"/>
+                </a:solidFill>
+                <a:latin typeface="Segoe UI"/>
+              </a:rPr>
+              <a:t>▸  </a:t>
+            </a:r>
+            <a:r>
+              <a:rPr sz="1380">
+                <a:solidFill>
+                  <a:srgbClr val="E2E8F0"/>
+                </a:solidFill>
+                <a:latin typeface="Segoe UI"/>
+              </a:rPr>
               <a:t>4 tablas + 1 vista traducidas de MySQL 8 a PostgreSQL 16: 16 CHECK, 6 UNIQUE, 2 FK y 7 índices.</a:t>
             </a:r>
           </a:p>
           <a:p>
-            <a:pPr/>
-            <a:r>
-              <a:rPr sz="1500"/>
+            <a:pPr marL="233680" indent="-233680">
+              <a:lnSpc>
+                <a:spcPct val="118000"/>
+              </a:lnSpc>
+              <a:spcAft>
+                <a:spcPts val="1500"/>
+              </a:spcAft>
+            </a:pPr>
+            <a:r>
+              <a:rPr sz="1380">
+                <a:solidFill>
+                  <a:srgbClr val="22D3EE"/>
+                </a:solidFill>
+                <a:latin typeface="Segoe UI"/>
+              </a:rPr>
+              <a:t>▸  </a:t>
+            </a:r>
+            <a:r>
+              <a:rPr sz="1380">
+                <a:solidFill>
+                  <a:srgbClr val="E2E8F0"/>
+                </a:solidFill>
+                <a:latin typeface="Segoe UI"/>
+              </a:rPr>
               <a:t>Las reglas RN-01…RN-16 viven en la base (última línea de defensa); la API las repite para responder 422 con mensaje.</a:t>
             </a:r>
           </a:p>
           <a:p>
-            <a:pPr/>
-            <a:r>
-              <a:rPr sz="1500"/>
+            <a:pPr marL="233680" indent="-233680">
+              <a:lnSpc>
+                <a:spcPct val="118000"/>
+              </a:lnSpc>
+              <a:spcAft>
+                <a:spcPts val="1500"/>
+              </a:spcAft>
+            </a:pPr>
+            <a:r>
+              <a:rPr sz="1380">
+                <a:solidFill>
+                  <a:srgbClr val="22D3EE"/>
+                </a:solidFill>
+                <a:latin typeface="Segoe UI"/>
+              </a:rPr>
+              <a:t>▸  </a:t>
+            </a:r>
+            <a:r>
+              <a:rPr sz="1380">
+                <a:solidFill>
+                  <a:srgbClr val="E2E8F0"/>
+                </a:solidFill>
+                <a:latin typeface="Segoe UI"/>
+              </a:rPr>
               <a:t>Semilla oficial: 12 estudiantes, 7 cursos, 24 matrículas (23 activas + 1 retirada) y 1 usuario admin.</a:t>
             </a:r>
           </a:p>
           <a:p>
-            <a:pPr/>
-            <a:r>
-              <a:rPr sz="1500"/>
+            <a:pPr marL="233680" indent="-233680">
+              <a:lnSpc>
+                <a:spcPct val="118000"/>
+              </a:lnSpc>
+              <a:spcAft>
+                <a:spcPts val="1500"/>
+              </a:spcAft>
+            </a:pPr>
+            <a:r>
+              <a:rPr sz="1380">
+                <a:solidFill>
+                  <a:srgbClr val="22D3EE"/>
+                </a:solidFill>
+                <a:latin typeface="Segoe UI"/>
+              </a:rPr>
+              <a:t>▸  </a:t>
+            </a:r>
+            <a:r>
+              <a:rPr sz="1380">
+                <a:solidFill>
+                  <a:srgbClr val="E2E8F0"/>
+                </a:solidFill>
+                <a:latin typeface="Segoe UI"/>
+              </a:rPr>
               <a:t>54 comprobaciones del modelo y 32 de notas, con pruebas negativas que exigen que la base rechace cada regla violada: 0 fallas.</a:t>
+            </a:r>
+          </a:p>
+        </p:txBody>
+      </p:sp>
+      <p:pic>
+        <p:nvPicPr>
+          <p:cNvPr id="8" name="Picture 7" descr="_recorte_datos_484x415.jpg"/>
+          <p:cNvPicPr>
+            <a:picLocks noChangeAspect="1"/>
+          </p:cNvPicPr>
+          <p:nvPr/>
+        </p:nvPicPr>
+        <p:blipFill>
+          <a:blip r:embed="rId2"/>
+          <a:stretch>
+            <a:fillRect/>
+          </a:stretch>
+        </p:blipFill>
+        <p:spPr>
+          <a:xfrm>
+            <a:off x="7269480" y="1737360"/>
+            <a:ext cx="4434840" cy="3794760"/>
+          </a:xfrm>
+          <a:prstGeom prst="rect">
+            <a:avLst/>
+          </a:prstGeom>
+          <a:ln w="12700">
+            <a:solidFill>
+              <a:srgbClr val="1E293B"/>
+            </a:solidFill>
+          </a:ln>
+        </p:spPr>
+      </p:pic>
+      <p:sp>
+        <p:nvSpPr>
+          <p:cNvPr id="9" name="Rectangle 8"/>
+          <p:cNvSpPr/>
+          <p:nvPr/>
+        </p:nvSpPr>
+        <p:spPr>
+          <a:xfrm>
+            <a:off x="548640" y="6272784"/>
+            <a:ext cx="11094415" cy="9525"/>
+          </a:xfrm>
+          <a:prstGeom prst="rect">
+            <a:avLst/>
+          </a:prstGeom>
+          <a:solidFill>
+            <a:srgbClr val="1E293B"/>
+          </a:solidFill>
+          <a:ln>
+            <a:noFill/>
+          </a:ln>
+        </p:spPr>
+        <p:style>
+          <a:lnRef idx="1">
+            <a:schemeClr val="accent1"/>
+          </a:lnRef>
+          <a:fillRef idx="3">
+            <a:schemeClr val="accent1"/>
+          </a:fillRef>
+          <a:effectRef idx="2">
+            <a:schemeClr val="accent1"/>
+          </a:effectRef>
+          <a:fontRef idx="minor">
+            <a:schemeClr val="lt1"/>
+          </a:fontRef>
+        </p:style>
+        <p:txBody>
+          <a:bodyPr rtlCol="0" anchor="ctr"/>
+          <a:lstStyle/>
+          <a:p>
+            <a:pPr algn="ctr"/>
+          </a:p>
+        </p:txBody>
+      </p:sp>
+      <p:sp>
+        <p:nvSpPr>
+          <p:cNvPr id="10" name="TextBox 9"/>
+          <p:cNvSpPr txBox="1"/>
+          <p:nvPr/>
+        </p:nvSpPr>
+        <p:spPr>
+          <a:xfrm>
+            <a:off x="548640" y="6355080"/>
+            <a:ext cx="8229600" cy="274320"/>
+          </a:xfrm>
+          <a:prstGeom prst="rect">
+            <a:avLst/>
+          </a:prstGeom>
+          <a:noFill/>
+        </p:spPr>
+        <p:txBody>
+          <a:bodyPr wrap="square" anchor="t" lIns="25400" rIns="25400" tIns="0" bIns="0">
+            <a:spAutoFit/>
+          </a:bodyPr>
+          <a:lstStyle/>
+          <a:p>
+            <a:pPr algn="l">
+              <a:lnSpc>
+                <a:spcPct val="112000"/>
+              </a:lnSpc>
+            </a:pPr>
+            <a:r>
+              <a:rPr sz="900" b="0">
+                <a:solidFill>
+                  <a:srgbClr val="94A3B8"/>
+                </a:solidFill>
+                <a:latin typeface="Segoe UI"/>
+              </a:rPr>
+              <a:t>GS08 · Matrículas y Notas — Trabajo colaborativo · Arteaga Rullier · Inocencio Gargate</a:t>
+            </a:r>
+          </a:p>
+        </p:txBody>
+      </p:sp>
+      <p:sp>
+        <p:nvSpPr>
+          <p:cNvPr id="11" name="TextBox 10"/>
+          <p:cNvSpPr txBox="1"/>
+          <p:nvPr/>
+        </p:nvSpPr>
+        <p:spPr>
+          <a:xfrm>
+            <a:off x="10728655" y="6355080"/>
+            <a:ext cx="914400" cy="274320"/>
+          </a:xfrm>
+          <a:prstGeom prst="rect">
+            <a:avLst/>
+          </a:prstGeom>
+          <a:noFill/>
+        </p:spPr>
+        <p:txBody>
+          <a:bodyPr wrap="square" anchor="t" lIns="25400" rIns="25400" tIns="0" bIns="0">
+            <a:spAutoFit/>
+          </a:bodyPr>
+          <a:lstStyle/>
+          <a:p>
+            <a:pPr algn="r">
+              <a:lnSpc>
+                <a:spcPct val="112000"/>
+              </a:lnSpc>
+            </a:pPr>
+            <a:r>
+              <a:rPr sz="900" b="0">
+                <a:solidFill>
+                  <a:srgbClr val="94A3B8"/>
+                </a:solidFill>
+                <a:latin typeface="Segoe UI"/>
+              </a:rPr>
+              <a:t>04 / 13</a:t>
             </a:r>
           </a:p>
         </p:txBody>
@@ -4920,20 +7607,210 @@
       <p:grpSpPr/>
       <p:sp>
         <p:nvSpPr>
-          <p:cNvPr id="2" name="Title 1"/>
-          <p:cNvSpPr>
-            <a:spLocks noGrp="1"/>
-          </p:cNvSpPr>
-          <p:nvPr>
-            <p:ph type="title"/>
-          </p:nvPr>
-        </p:nvSpPr>
-        <p:spPr/>
-        <p:txBody>
-          <a:bodyPr/>
-          <a:lstStyle/>
-          <a:p>
-            <a:r>
+          <p:cNvPr id="2" name="Rectangle 1"/>
+          <p:cNvSpPr/>
+          <p:nvPr/>
+        </p:nvSpPr>
+        <p:spPr>
+          <a:xfrm>
+            <a:off x="0" y="0"/>
+            <a:ext cx="12191695" cy="6858000"/>
+          </a:xfrm>
+          <a:prstGeom prst="rect">
+            <a:avLst/>
+          </a:prstGeom>
+          <a:solidFill>
+            <a:srgbClr val="0B1220"/>
+          </a:solidFill>
+          <a:ln>
+            <a:noFill/>
+          </a:ln>
+        </p:spPr>
+        <p:style>
+          <a:lnRef idx="1">
+            <a:schemeClr val="accent1"/>
+          </a:lnRef>
+          <a:fillRef idx="3">
+            <a:schemeClr val="accent1"/>
+          </a:fillRef>
+          <a:effectRef idx="2">
+            <a:schemeClr val="accent1"/>
+          </a:effectRef>
+          <a:fontRef idx="minor">
+            <a:schemeClr val="lt1"/>
+          </a:fontRef>
+        </p:style>
+        <p:txBody>
+          <a:bodyPr rtlCol="0" anchor="ctr"/>
+          <a:lstStyle/>
+          <a:p>
+            <a:pPr algn="ctr"/>
+          </a:p>
+        </p:txBody>
+      </p:sp>
+      <p:sp>
+        <p:nvSpPr>
+          <p:cNvPr id="3" name="Rectangle 2"/>
+          <p:cNvSpPr/>
+          <p:nvPr/>
+        </p:nvSpPr>
+        <p:spPr>
+          <a:xfrm>
+            <a:off x="0" y="0"/>
+            <a:ext cx="12191695" cy="41148"/>
+          </a:xfrm>
+          <a:prstGeom prst="rect">
+            <a:avLst/>
+          </a:prstGeom>
+          <a:solidFill>
+            <a:srgbClr val="22D3EE"/>
+          </a:solidFill>
+          <a:ln>
+            <a:noFill/>
+          </a:ln>
+        </p:spPr>
+        <p:style>
+          <a:lnRef idx="1">
+            <a:schemeClr val="accent1"/>
+          </a:lnRef>
+          <a:fillRef idx="3">
+            <a:schemeClr val="accent1"/>
+          </a:fillRef>
+          <a:effectRef idx="2">
+            <a:schemeClr val="accent1"/>
+          </a:effectRef>
+          <a:fontRef idx="minor">
+            <a:schemeClr val="lt1"/>
+          </a:fontRef>
+        </p:style>
+        <p:txBody>
+          <a:bodyPr rtlCol="0" anchor="ctr"/>
+          <a:lstStyle/>
+          <a:p>
+            <a:pPr algn="ctr"/>
+          </a:p>
+        </p:txBody>
+      </p:sp>
+      <p:sp>
+        <p:nvSpPr>
+          <p:cNvPr id="4" name="Rounded Rectangle 3"/>
+          <p:cNvSpPr/>
+          <p:nvPr/>
+        </p:nvSpPr>
+        <p:spPr>
+          <a:xfrm>
+            <a:off x="548640" y="384048"/>
+            <a:ext cx="566928" cy="310896"/>
+          </a:xfrm>
+          <a:prstGeom prst="roundRect">
+            <a:avLst>
+              <a:gd name="adj" fmla="val 30000"/>
+            </a:avLst>
+          </a:prstGeom>
+          <a:solidFill>
+            <a:srgbClr val="111C2E"/>
+          </a:solidFill>
+          <a:ln w="12700">
+            <a:solidFill>
+              <a:srgbClr val="22D3EE"/>
+            </a:solidFill>
+          </a:ln>
+        </p:spPr>
+        <p:style>
+          <a:lnRef idx="1">
+            <a:schemeClr val="accent1"/>
+          </a:lnRef>
+          <a:fillRef idx="3">
+            <a:schemeClr val="accent1"/>
+          </a:fillRef>
+          <a:effectRef idx="2">
+            <a:schemeClr val="accent1"/>
+          </a:effectRef>
+          <a:fontRef idx="minor">
+            <a:schemeClr val="lt1"/>
+          </a:fontRef>
+        </p:style>
+        <p:txBody>
+          <a:bodyPr rtlCol="0" anchor="ctr"/>
+          <a:lstStyle/>
+          <a:p>
+            <a:pPr algn="ctr"/>
+          </a:p>
+        </p:txBody>
+      </p:sp>
+      <p:sp>
+        <p:nvSpPr>
+          <p:cNvPr id="5" name="TextBox 4"/>
+          <p:cNvSpPr txBox="1"/>
+          <p:nvPr/>
+        </p:nvSpPr>
+        <p:spPr>
+          <a:xfrm>
+            <a:off x="548640" y="411480"/>
+            <a:ext cx="566928" cy="256032"/>
+          </a:xfrm>
+          <a:prstGeom prst="rect">
+            <a:avLst/>
+          </a:prstGeom>
+          <a:noFill/>
+        </p:spPr>
+        <p:txBody>
+          <a:bodyPr wrap="square" anchor="t" lIns="25400" rIns="25400" tIns="0" bIns="0">
+            <a:spAutoFit/>
+          </a:bodyPr>
+          <a:lstStyle/>
+          <a:p>
+            <a:pPr algn="ctr">
+              <a:lnSpc>
+                <a:spcPct val="112000"/>
+              </a:lnSpc>
+            </a:pPr>
+            <a:r>
+              <a:rPr sz="1000" b="1">
+                <a:solidFill>
+                  <a:srgbClr val="22D3EE"/>
+                </a:solidFill>
+                <a:latin typeface="Segoe UI"/>
+              </a:rPr>
+              <a:t>05</a:t>
+            </a:r>
+          </a:p>
+        </p:txBody>
+      </p:sp>
+      <p:sp>
+        <p:nvSpPr>
+          <p:cNvPr id="6" name="TextBox 5"/>
+          <p:cNvSpPr txBox="1"/>
+          <p:nvPr/>
+        </p:nvSpPr>
+        <p:spPr>
+          <a:xfrm>
+            <a:off x="1280160" y="310896"/>
+            <a:ext cx="10180015" cy="914400"/>
+          </a:xfrm>
+          <a:prstGeom prst="rect">
+            <a:avLst/>
+          </a:prstGeom>
+          <a:noFill/>
+        </p:spPr>
+        <p:txBody>
+          <a:bodyPr wrap="square" anchor="t" lIns="25400" rIns="25400" tIns="0" bIns="0">
+            <a:spAutoFit/>
+          </a:bodyPr>
+          <a:lstStyle/>
+          <a:p>
+            <a:pPr algn="l">
+              <a:lnSpc>
+                <a:spcPct val="100000"/>
+              </a:lnSpc>
+            </a:pPr>
+            <a:r>
+              <a:rPr sz="2700" b="1">
+                <a:solidFill>
+                  <a:srgbClr val="F8FAFC"/>
+                </a:solidFill>
+                <a:latin typeface="Segoe UI"/>
+              </a:rPr>
               <a:t>API: contrato y comportamiento</a:t>
             </a:r>
           </a:p>
@@ -4941,40 +7818,285 @@
       </p:sp>
       <p:sp>
         <p:nvSpPr>
-          <p:cNvPr id="3" name="Content Placeholder 2"/>
-          <p:cNvSpPr>
-            <a:spLocks noGrp="1"/>
-          </p:cNvSpPr>
-          <p:nvPr>
-            <p:ph idx="1"/>
-          </p:nvPr>
-        </p:nvSpPr>
-        <p:spPr/>
-        <p:txBody>
-          <a:bodyPr/>
-          <a:lstStyle/>
-          <a:p>
-            <a:r>
-              <a:rPr sz="1500"/>
+          <p:cNvPr id="7" name="TextBox 6"/>
+          <p:cNvSpPr txBox="1"/>
+          <p:nvPr/>
+        </p:nvSpPr>
+        <p:spPr>
+          <a:xfrm>
+            <a:off x="548640" y="1828800"/>
+            <a:ext cx="6492240" cy="4114800"/>
+          </a:xfrm>
+          <a:prstGeom prst="rect">
+            <a:avLst/>
+          </a:prstGeom>
+          <a:noFill/>
+        </p:spPr>
+        <p:txBody>
+          <a:bodyPr wrap="square" lIns="0" rIns="0">
+            <a:spAutoFit/>
+          </a:bodyPr>
+          <a:lstStyle/>
+          <a:p>
+            <a:pPr marL="233680" indent="-233680">
+              <a:lnSpc>
+                <a:spcPct val="118000"/>
+              </a:lnSpc>
+              <a:spcAft>
+                <a:spcPts val="1500"/>
+              </a:spcAft>
+            </a:pPr>
+            <a:r>
+              <a:rPr sz="1380">
+                <a:solidFill>
+                  <a:srgbClr val="22D3EE"/>
+                </a:solidFill>
+                <a:latin typeface="Segoe UI"/>
+              </a:rPr>
+              <a:t>▸  </a:t>
+            </a:r>
+            <a:r>
+              <a:rPr sz="1380">
+                <a:solidFill>
+                  <a:srgbClr val="E2E8F0"/>
+                </a:solidFill>
+                <a:latin typeface="Segoe UI"/>
+              </a:rPr>
               <a:t>20 rutas y 35 operaciones en su propio OpenAPI (v0.3.0), más GraphQL en /graphql: salud, autenticación, panel, estudiantes, cursos, matrículas, usuarios, notas, boleta, auditoría y boleta archivada.</a:t>
             </a:r>
           </a:p>
           <a:p>
-            <a:r>
-              <a:rPr sz="1500"/>
+            <a:pPr marL="233680" indent="-233680">
+              <a:lnSpc>
+                <a:spcPct val="118000"/>
+              </a:lnSpc>
+              <a:spcAft>
+                <a:spcPts val="1500"/>
+              </a:spcAft>
+            </a:pPr>
+            <a:r>
+              <a:rPr sz="1380">
+                <a:solidFill>
+                  <a:srgbClr val="22D3EE"/>
+                </a:solidFill>
+                <a:latin typeface="Segoe UI"/>
+              </a:rPr>
+              <a:t>▸  </a:t>
+            </a:r>
+            <a:r>
+              <a:rPr sz="1380">
+                <a:solidFill>
+                  <a:srgbClr val="E2E8F0"/>
+                </a:solidFill>
+                <a:latin typeface="Segoe UI"/>
+              </a:rPr>
               <a:t>Códigos como contrato: 200/201/204 lo correcto · 400 invalid_grant o invalid_scope · 401 sin sesión · 403 por rol o por scope · 404 · 409 duplicado · 422 dato inválido.</a:t>
             </a:r>
           </a:p>
           <a:p>
-            <a:r>
-              <a:rPr sz="1500"/>
+            <a:pPr marL="233680" indent="-233680">
+              <a:lnSpc>
+                <a:spcPct val="118000"/>
+              </a:lnSpc>
+              <a:spcAft>
+                <a:spcPts val="1500"/>
+              </a:spcAft>
+            </a:pPr>
+            <a:r>
+              <a:rPr sz="1380">
+                <a:solidFill>
+                  <a:srgbClr val="22D3EE"/>
+                </a:solidFill>
+                <a:latin typeface="Segoe UI"/>
+              </a:rPr>
+              <a:t>▸  </a:t>
+            </a:r>
+            <a:r>
+              <a:rPr sz="1380">
+                <a:solidFill>
+                  <a:srgbClr val="E2E8F0"/>
+                </a:solidFill>
+                <a:latin typeface="Segoe UI"/>
+              </a:rPr>
               <a:t>Ningún dato del usuario puede provocar un 500: el mensaje del backend se muestra en pantalla.</a:t>
             </a:r>
           </a:p>
           <a:p>
-            <a:r>
-              <a:rPr sz="1500"/>
+            <a:pPr marL="233680" indent="-233680">
+              <a:lnSpc>
+                <a:spcPct val="118000"/>
+              </a:lnSpc>
+              <a:spcAft>
+                <a:spcPts val="1500"/>
+              </a:spcAft>
+            </a:pPr>
+            <a:r>
+              <a:rPr sz="1380">
+                <a:solidFill>
+                  <a:srgbClr val="22D3EE"/>
+                </a:solidFill>
+                <a:latin typeface="Segoe UI"/>
+              </a:rPr>
+              <a:t>▸  </a:t>
+            </a:r>
+            <a:r>
+              <a:rPr sz="1380">
+                <a:solidFill>
+                  <a:srgbClr val="E2E8F0"/>
+                </a:solidFill>
+                <a:latin typeface="Segoe UI"/>
+              </a:rPr>
               <a:t>Todas las operaciones se consumen desde el SPA y se verificaron contra la API real; los dos 500 de los POST de matrículas y usuarios quedaron cerrados.</a:t>
+            </a:r>
+          </a:p>
+        </p:txBody>
+      </p:sp>
+      <p:pic>
+        <p:nvPicPr>
+          <p:cNvPr id="8" name="Picture 7" descr="_recorte_api_484x415.jpg"/>
+          <p:cNvPicPr>
+            <a:picLocks noChangeAspect="1"/>
+          </p:cNvPicPr>
+          <p:nvPr/>
+        </p:nvPicPr>
+        <p:blipFill>
+          <a:blip r:embed="rId2"/>
+          <a:stretch>
+            <a:fillRect/>
+          </a:stretch>
+        </p:blipFill>
+        <p:spPr>
+          <a:xfrm>
+            <a:off x="7269480" y="1737360"/>
+            <a:ext cx="4434840" cy="3794760"/>
+          </a:xfrm>
+          <a:prstGeom prst="rect">
+            <a:avLst/>
+          </a:prstGeom>
+          <a:ln w="12700">
+            <a:solidFill>
+              <a:srgbClr val="1E293B"/>
+            </a:solidFill>
+          </a:ln>
+        </p:spPr>
+      </p:pic>
+      <p:sp>
+        <p:nvSpPr>
+          <p:cNvPr id="9" name="Rectangle 8"/>
+          <p:cNvSpPr/>
+          <p:nvPr/>
+        </p:nvSpPr>
+        <p:spPr>
+          <a:xfrm>
+            <a:off x="548640" y="6272784"/>
+            <a:ext cx="11094415" cy="9525"/>
+          </a:xfrm>
+          <a:prstGeom prst="rect">
+            <a:avLst/>
+          </a:prstGeom>
+          <a:solidFill>
+            <a:srgbClr val="1E293B"/>
+          </a:solidFill>
+          <a:ln>
+            <a:noFill/>
+          </a:ln>
+        </p:spPr>
+        <p:style>
+          <a:lnRef idx="1">
+            <a:schemeClr val="accent1"/>
+          </a:lnRef>
+          <a:fillRef idx="3">
+            <a:schemeClr val="accent1"/>
+          </a:fillRef>
+          <a:effectRef idx="2">
+            <a:schemeClr val="accent1"/>
+          </a:effectRef>
+          <a:fontRef idx="minor">
+            <a:schemeClr val="lt1"/>
+          </a:fontRef>
+        </p:style>
+        <p:txBody>
+          <a:bodyPr rtlCol="0" anchor="ctr"/>
+          <a:lstStyle/>
+          <a:p>
+            <a:pPr algn="ctr"/>
+          </a:p>
+        </p:txBody>
+      </p:sp>
+      <p:sp>
+        <p:nvSpPr>
+          <p:cNvPr id="10" name="TextBox 9"/>
+          <p:cNvSpPr txBox="1"/>
+          <p:nvPr/>
+        </p:nvSpPr>
+        <p:spPr>
+          <a:xfrm>
+            <a:off x="548640" y="6355080"/>
+            <a:ext cx="8229600" cy="274320"/>
+          </a:xfrm>
+          <a:prstGeom prst="rect">
+            <a:avLst/>
+          </a:prstGeom>
+          <a:noFill/>
+        </p:spPr>
+        <p:txBody>
+          <a:bodyPr wrap="square" anchor="t" lIns="25400" rIns="25400" tIns="0" bIns="0">
+            <a:spAutoFit/>
+          </a:bodyPr>
+          <a:lstStyle/>
+          <a:p>
+            <a:pPr algn="l">
+              <a:lnSpc>
+                <a:spcPct val="112000"/>
+              </a:lnSpc>
+            </a:pPr>
+            <a:r>
+              <a:rPr sz="900" b="0">
+                <a:solidFill>
+                  <a:srgbClr val="94A3B8"/>
+                </a:solidFill>
+                <a:latin typeface="Segoe UI"/>
+              </a:rPr>
+              <a:t>GS08 · Matrículas y Notas — Trabajo colaborativo · Arteaga Rullier · Inocencio Gargate</a:t>
+            </a:r>
+          </a:p>
+        </p:txBody>
+      </p:sp>
+      <p:sp>
+        <p:nvSpPr>
+          <p:cNvPr id="11" name="TextBox 10"/>
+          <p:cNvSpPr txBox="1"/>
+          <p:nvPr/>
+        </p:nvSpPr>
+        <p:spPr>
+          <a:xfrm>
+            <a:off x="10728655" y="6355080"/>
+            <a:ext cx="914400" cy="274320"/>
+          </a:xfrm>
+          <a:prstGeom prst="rect">
+            <a:avLst/>
+          </a:prstGeom>
+          <a:noFill/>
+        </p:spPr>
+        <p:txBody>
+          <a:bodyPr wrap="square" anchor="t" lIns="25400" rIns="25400" tIns="0" bIns="0">
+            <a:spAutoFit/>
+          </a:bodyPr>
+          <a:lstStyle/>
+          <a:p>
+            <a:pPr algn="r">
+              <a:lnSpc>
+                <a:spcPct val="112000"/>
+              </a:lnSpc>
+            </a:pPr>
+            <a:r>
+              <a:rPr sz="900" b="0">
+                <a:solidFill>
+                  <a:srgbClr val="94A3B8"/>
+                </a:solidFill>
+                <a:latin typeface="Segoe UI"/>
+              </a:rPr>
+              <a:t>05 / 13</a:t>
             </a:r>
           </a:p>
         </p:txBody>
@@ -4999,20 +8121,210 @@
       <p:grpSpPr/>
       <p:sp>
         <p:nvSpPr>
-          <p:cNvPr id="2" name="Title 1"/>
-          <p:cNvSpPr>
-            <a:spLocks noGrp="1"/>
-          </p:cNvSpPr>
-          <p:nvPr>
-            <p:ph type="title"/>
-          </p:nvPr>
-        </p:nvSpPr>
-        <p:spPr/>
-        <p:txBody>
-          <a:bodyPr/>
-          <a:lstStyle/>
-          <a:p>
-            <a:r>
+          <p:cNvPr id="2" name="Rectangle 1"/>
+          <p:cNvSpPr/>
+          <p:nvPr/>
+        </p:nvSpPr>
+        <p:spPr>
+          <a:xfrm>
+            <a:off x="0" y="0"/>
+            <a:ext cx="12191695" cy="6858000"/>
+          </a:xfrm>
+          <a:prstGeom prst="rect">
+            <a:avLst/>
+          </a:prstGeom>
+          <a:solidFill>
+            <a:srgbClr val="0B1220"/>
+          </a:solidFill>
+          <a:ln>
+            <a:noFill/>
+          </a:ln>
+        </p:spPr>
+        <p:style>
+          <a:lnRef idx="1">
+            <a:schemeClr val="accent1"/>
+          </a:lnRef>
+          <a:fillRef idx="3">
+            <a:schemeClr val="accent1"/>
+          </a:fillRef>
+          <a:effectRef idx="2">
+            <a:schemeClr val="accent1"/>
+          </a:effectRef>
+          <a:fontRef idx="minor">
+            <a:schemeClr val="lt1"/>
+          </a:fontRef>
+        </p:style>
+        <p:txBody>
+          <a:bodyPr rtlCol="0" anchor="ctr"/>
+          <a:lstStyle/>
+          <a:p>
+            <a:pPr algn="ctr"/>
+          </a:p>
+        </p:txBody>
+      </p:sp>
+      <p:sp>
+        <p:nvSpPr>
+          <p:cNvPr id="3" name="Rectangle 2"/>
+          <p:cNvSpPr/>
+          <p:nvPr/>
+        </p:nvSpPr>
+        <p:spPr>
+          <a:xfrm>
+            <a:off x="0" y="0"/>
+            <a:ext cx="12191695" cy="41148"/>
+          </a:xfrm>
+          <a:prstGeom prst="rect">
+            <a:avLst/>
+          </a:prstGeom>
+          <a:solidFill>
+            <a:srgbClr val="22D3EE"/>
+          </a:solidFill>
+          <a:ln>
+            <a:noFill/>
+          </a:ln>
+        </p:spPr>
+        <p:style>
+          <a:lnRef idx="1">
+            <a:schemeClr val="accent1"/>
+          </a:lnRef>
+          <a:fillRef idx="3">
+            <a:schemeClr val="accent1"/>
+          </a:fillRef>
+          <a:effectRef idx="2">
+            <a:schemeClr val="accent1"/>
+          </a:effectRef>
+          <a:fontRef idx="minor">
+            <a:schemeClr val="lt1"/>
+          </a:fontRef>
+        </p:style>
+        <p:txBody>
+          <a:bodyPr rtlCol="0" anchor="ctr"/>
+          <a:lstStyle/>
+          <a:p>
+            <a:pPr algn="ctr"/>
+          </a:p>
+        </p:txBody>
+      </p:sp>
+      <p:sp>
+        <p:nvSpPr>
+          <p:cNvPr id="4" name="Rounded Rectangle 3"/>
+          <p:cNvSpPr/>
+          <p:nvPr/>
+        </p:nvSpPr>
+        <p:spPr>
+          <a:xfrm>
+            <a:off x="548640" y="384048"/>
+            <a:ext cx="566928" cy="310896"/>
+          </a:xfrm>
+          <a:prstGeom prst="roundRect">
+            <a:avLst>
+              <a:gd name="adj" fmla="val 30000"/>
+            </a:avLst>
+          </a:prstGeom>
+          <a:solidFill>
+            <a:srgbClr val="111C2E"/>
+          </a:solidFill>
+          <a:ln w="12700">
+            <a:solidFill>
+              <a:srgbClr val="22D3EE"/>
+            </a:solidFill>
+          </a:ln>
+        </p:spPr>
+        <p:style>
+          <a:lnRef idx="1">
+            <a:schemeClr val="accent1"/>
+          </a:lnRef>
+          <a:fillRef idx="3">
+            <a:schemeClr val="accent1"/>
+          </a:fillRef>
+          <a:effectRef idx="2">
+            <a:schemeClr val="accent1"/>
+          </a:effectRef>
+          <a:fontRef idx="minor">
+            <a:schemeClr val="lt1"/>
+          </a:fontRef>
+        </p:style>
+        <p:txBody>
+          <a:bodyPr rtlCol="0" anchor="ctr"/>
+          <a:lstStyle/>
+          <a:p>
+            <a:pPr algn="ctr"/>
+          </a:p>
+        </p:txBody>
+      </p:sp>
+      <p:sp>
+        <p:nvSpPr>
+          <p:cNvPr id="5" name="TextBox 4"/>
+          <p:cNvSpPr txBox="1"/>
+          <p:nvPr/>
+        </p:nvSpPr>
+        <p:spPr>
+          <a:xfrm>
+            <a:off x="548640" y="411480"/>
+            <a:ext cx="566928" cy="256032"/>
+          </a:xfrm>
+          <a:prstGeom prst="rect">
+            <a:avLst/>
+          </a:prstGeom>
+          <a:noFill/>
+        </p:spPr>
+        <p:txBody>
+          <a:bodyPr wrap="square" anchor="t" lIns="25400" rIns="25400" tIns="0" bIns="0">
+            <a:spAutoFit/>
+          </a:bodyPr>
+          <a:lstStyle/>
+          <a:p>
+            <a:pPr algn="ctr">
+              <a:lnSpc>
+                <a:spcPct val="112000"/>
+              </a:lnSpc>
+            </a:pPr>
+            <a:r>
+              <a:rPr sz="1000" b="1">
+                <a:solidFill>
+                  <a:srgbClr val="22D3EE"/>
+                </a:solidFill>
+                <a:latin typeface="Segoe UI"/>
+              </a:rPr>
+              <a:t>06</a:t>
+            </a:r>
+          </a:p>
+        </p:txBody>
+      </p:sp>
+      <p:sp>
+        <p:nvSpPr>
+          <p:cNvPr id="6" name="TextBox 5"/>
+          <p:cNvSpPr txBox="1"/>
+          <p:nvPr/>
+        </p:nvSpPr>
+        <p:spPr>
+          <a:xfrm>
+            <a:off x="1280160" y="310896"/>
+            <a:ext cx="10180015" cy="914400"/>
+          </a:xfrm>
+          <a:prstGeom prst="rect">
+            <a:avLst/>
+          </a:prstGeom>
+          <a:noFill/>
+        </p:spPr>
+        <p:txBody>
+          <a:bodyPr wrap="square" anchor="t" lIns="25400" rIns="25400" tIns="0" bIns="0">
+            <a:spAutoFit/>
+          </a:bodyPr>
+          <a:lstStyle/>
+          <a:p>
+            <a:pPr algn="l">
+              <a:lnSpc>
+                <a:spcPct val="100000"/>
+              </a:lnSpc>
+            </a:pPr>
+            <a:r>
+              <a:rPr sz="2700" b="1">
+                <a:solidFill>
+                  <a:srgbClr val="F8FAFC"/>
+                </a:solidFill>
+                <a:latin typeface="Segoe UI"/>
+              </a:rPr>
               <a:t>La SPA: el recorrido del usuario</a:t>
             </a:r>
           </a:p>
@@ -5020,40 +8332,285 @@
       </p:sp>
       <p:sp>
         <p:nvSpPr>
-          <p:cNvPr id="3" name="Content Placeholder 2"/>
-          <p:cNvSpPr>
-            <a:spLocks noGrp="1"/>
-          </p:cNvSpPr>
-          <p:nvPr>
-            <p:ph idx="1"/>
-          </p:nvPr>
-        </p:nvSpPr>
-        <p:spPr/>
-        <p:txBody>
-          <a:bodyPr/>
-          <a:lstStyle/>
-          <a:p>
-            <a:r>
-              <a:rPr sz="1500"/>
+          <p:cNvPr id="7" name="TextBox 6"/>
+          <p:cNvSpPr txBox="1"/>
+          <p:nvPr/>
+        </p:nvSpPr>
+        <p:spPr>
+          <a:xfrm>
+            <a:off x="548640" y="1828800"/>
+            <a:ext cx="6492240" cy="4114800"/>
+          </a:xfrm>
+          <a:prstGeom prst="rect">
+            <a:avLst/>
+          </a:prstGeom>
+          <a:noFill/>
+        </p:spPr>
+        <p:txBody>
+          <a:bodyPr wrap="square" lIns="0" rIns="0">
+            <a:spAutoFit/>
+          </a:bodyPr>
+          <a:lstStyle/>
+          <a:p>
+            <a:pPr marL="233680" indent="-233680">
+              <a:lnSpc>
+                <a:spcPct val="118000"/>
+              </a:lnSpc>
+              <a:spcAft>
+                <a:spcPts val="1500"/>
+              </a:spcAft>
+            </a:pPr>
+            <a:r>
+              <a:rPr sz="1380">
+                <a:solidFill>
+                  <a:srgbClr val="22D3EE"/>
+                </a:solidFill>
+                <a:latin typeface="Segoe UI"/>
+              </a:rPr>
+              <a:t>▸  </a:t>
+            </a:r>
+            <a:r>
+              <a:rPr sz="1380">
+                <a:solidFill>
+                  <a:srgbClr val="E2E8F0"/>
+                </a:solidFill>
+                <a:latin typeface="Segoe UI"/>
+              </a:rPr>
               <a:t>Entrar → panel con los 4 indicadores → buscar «huaman» y encontrar «Huamán» → registrar estudiante → matricular → 3 notas → ver la boleta → cursos, usuarios y la pantalla de Auditoría (bitácora y boleta archivada).</a:t>
             </a:r>
           </a:p>
           <a:p>
-            <a:r>
-              <a:rPr sz="1500"/>
+            <a:pPr marL="233680" indent="-233680">
+              <a:lnSpc>
+                <a:spcPct val="118000"/>
+              </a:lnSpc>
+              <a:spcAft>
+                <a:spcPts val="1500"/>
+              </a:spcAft>
+            </a:pPr>
+            <a:r>
+              <a:rPr sz="1380">
+                <a:solidFill>
+                  <a:srgbClr val="22D3EE"/>
+                </a:solidFill>
+                <a:latin typeface="Segoe UI"/>
+              </a:rPr>
+              <a:t>▸  </a:t>
+            </a:r>
+            <a:r>
+              <a:rPr sz="1380">
+                <a:solidFill>
+                  <a:srgbClr val="E2E8F0"/>
+                </a:solidFill>
+                <a:latin typeface="Segoe UI"/>
+              </a:rPr>
               <a:t>Los errores se muestran con el mensaje del backend (409 y 422) y sin diálogos nativos del navegador.</a:t>
             </a:r>
           </a:p>
           <a:p>
-            <a:r>
-              <a:rPr sz="1500"/>
+            <a:pPr marL="233680" indent="-233680">
+              <a:lnSpc>
+                <a:spcPct val="118000"/>
+              </a:lnSpc>
+              <a:spcAft>
+                <a:spcPts val="1500"/>
+              </a:spcAft>
+            </a:pPr>
+            <a:r>
+              <a:rPr sz="1380">
+                <a:solidFill>
+                  <a:srgbClr val="22D3EE"/>
+                </a:solidFill>
+                <a:latin typeface="Segoe UI"/>
+              </a:rPr>
+              <a:t>▸  </a:t>
+            </a:r>
+            <a:r>
+              <a:rPr sz="1380">
+                <a:solidFill>
+                  <a:srgbClr val="E2E8F0"/>
+                </a:solidFill>
+                <a:latin typeface="Segoe UI"/>
+              </a:rPr>
               <a:t>Menú por rol: un usuario asistente no ve ni puede llamar la pantalla de usuarios.</a:t>
             </a:r>
           </a:p>
           <a:p>
-            <a:r>
-              <a:rPr sz="1500"/>
+            <a:pPr marL="233680" indent="-233680">
+              <a:lnSpc>
+                <a:spcPct val="118000"/>
+              </a:lnSpc>
+              <a:spcAft>
+                <a:spcPts val="1500"/>
+              </a:spcAft>
+            </a:pPr>
+            <a:r>
+              <a:rPr sz="1380">
+                <a:solidFill>
+                  <a:srgbClr val="22D3EE"/>
+                </a:solidFill>
+                <a:latin typeface="Segoe UI"/>
+              </a:rPr>
+              <a:t>▸  </a:t>
+            </a:r>
+            <a:r>
+              <a:rPr sz="1380">
+                <a:solidFill>
+                  <a:srgbClr val="E2E8F0"/>
+                </a:solidFill>
+                <a:latin typeface="Segoe UI"/>
+              </a:rPr>
               <a:t>Estado real: el SPA existe y consume las 30 operaciones del contrato; el recorrido se verificó de punta a punta en el navegador contra la API real.</a:t>
+            </a:r>
+          </a:p>
+        </p:txBody>
+      </p:sp>
+      <p:pic>
+        <p:nvPicPr>
+          <p:cNvPr id="8" name="Picture 7" descr="_recorte_accesibilidad_484x415.jpg"/>
+          <p:cNvPicPr>
+            <a:picLocks noChangeAspect="1"/>
+          </p:cNvPicPr>
+          <p:nvPr/>
+        </p:nvPicPr>
+        <p:blipFill>
+          <a:blip r:embed="rId2"/>
+          <a:stretch>
+            <a:fillRect/>
+          </a:stretch>
+        </p:blipFill>
+        <p:spPr>
+          <a:xfrm>
+            <a:off x="7269480" y="1737360"/>
+            <a:ext cx="4434840" cy="3794760"/>
+          </a:xfrm>
+          <a:prstGeom prst="rect">
+            <a:avLst/>
+          </a:prstGeom>
+          <a:ln w="12700">
+            <a:solidFill>
+              <a:srgbClr val="1E293B"/>
+            </a:solidFill>
+          </a:ln>
+        </p:spPr>
+      </p:pic>
+      <p:sp>
+        <p:nvSpPr>
+          <p:cNvPr id="9" name="Rectangle 8"/>
+          <p:cNvSpPr/>
+          <p:nvPr/>
+        </p:nvSpPr>
+        <p:spPr>
+          <a:xfrm>
+            <a:off x="548640" y="6272784"/>
+            <a:ext cx="11094415" cy="9525"/>
+          </a:xfrm>
+          <a:prstGeom prst="rect">
+            <a:avLst/>
+          </a:prstGeom>
+          <a:solidFill>
+            <a:srgbClr val="1E293B"/>
+          </a:solidFill>
+          <a:ln>
+            <a:noFill/>
+          </a:ln>
+        </p:spPr>
+        <p:style>
+          <a:lnRef idx="1">
+            <a:schemeClr val="accent1"/>
+          </a:lnRef>
+          <a:fillRef idx="3">
+            <a:schemeClr val="accent1"/>
+          </a:fillRef>
+          <a:effectRef idx="2">
+            <a:schemeClr val="accent1"/>
+          </a:effectRef>
+          <a:fontRef idx="minor">
+            <a:schemeClr val="lt1"/>
+          </a:fontRef>
+        </p:style>
+        <p:txBody>
+          <a:bodyPr rtlCol="0" anchor="ctr"/>
+          <a:lstStyle/>
+          <a:p>
+            <a:pPr algn="ctr"/>
+          </a:p>
+        </p:txBody>
+      </p:sp>
+      <p:sp>
+        <p:nvSpPr>
+          <p:cNvPr id="10" name="TextBox 9"/>
+          <p:cNvSpPr txBox="1"/>
+          <p:nvPr/>
+        </p:nvSpPr>
+        <p:spPr>
+          <a:xfrm>
+            <a:off x="548640" y="6355080"/>
+            <a:ext cx="8229600" cy="274320"/>
+          </a:xfrm>
+          <a:prstGeom prst="rect">
+            <a:avLst/>
+          </a:prstGeom>
+          <a:noFill/>
+        </p:spPr>
+        <p:txBody>
+          <a:bodyPr wrap="square" anchor="t" lIns="25400" rIns="25400" tIns="0" bIns="0">
+            <a:spAutoFit/>
+          </a:bodyPr>
+          <a:lstStyle/>
+          <a:p>
+            <a:pPr algn="l">
+              <a:lnSpc>
+                <a:spcPct val="112000"/>
+              </a:lnSpc>
+            </a:pPr>
+            <a:r>
+              <a:rPr sz="900" b="0">
+                <a:solidFill>
+                  <a:srgbClr val="94A3B8"/>
+                </a:solidFill>
+                <a:latin typeface="Segoe UI"/>
+              </a:rPr>
+              <a:t>GS08 · Matrículas y Notas — Trabajo colaborativo · Arteaga Rullier · Inocencio Gargate</a:t>
+            </a:r>
+          </a:p>
+        </p:txBody>
+      </p:sp>
+      <p:sp>
+        <p:nvSpPr>
+          <p:cNvPr id="11" name="TextBox 10"/>
+          <p:cNvSpPr txBox="1"/>
+          <p:nvPr/>
+        </p:nvSpPr>
+        <p:spPr>
+          <a:xfrm>
+            <a:off x="10728655" y="6355080"/>
+            <a:ext cx="914400" cy="274320"/>
+          </a:xfrm>
+          <a:prstGeom prst="rect">
+            <a:avLst/>
+          </a:prstGeom>
+          <a:noFill/>
+        </p:spPr>
+        <p:txBody>
+          <a:bodyPr wrap="square" anchor="t" lIns="25400" rIns="25400" tIns="0" bIns="0">
+            <a:spAutoFit/>
+          </a:bodyPr>
+          <a:lstStyle/>
+          <a:p>
+            <a:pPr algn="r">
+              <a:lnSpc>
+                <a:spcPct val="112000"/>
+              </a:lnSpc>
+            </a:pPr>
+            <a:r>
+              <a:rPr sz="900" b="0">
+                <a:solidFill>
+                  <a:srgbClr val="94A3B8"/>
+                </a:solidFill>
+                <a:latin typeface="Segoe UI"/>
+              </a:rPr>
+              <a:t>06 / 13</a:t>
             </a:r>
           </a:p>
         </p:txBody>
@@ -5078,20 +8635,210 @@
       <p:grpSpPr/>
       <p:sp>
         <p:nvSpPr>
-          <p:cNvPr id="2" name="Title 1"/>
-          <p:cNvSpPr>
-            <a:spLocks noGrp="1"/>
-          </p:cNvSpPr>
-          <p:nvPr>
-            <p:ph type="title"/>
-          </p:nvPr>
-        </p:nvSpPr>
-        <p:spPr/>
-        <p:txBody>
-          <a:bodyPr/>
-          <a:lstStyle/>
-          <a:p>
-            <a:r>
+          <p:cNvPr id="2" name="Rectangle 1"/>
+          <p:cNvSpPr/>
+          <p:nvPr/>
+        </p:nvSpPr>
+        <p:spPr>
+          <a:xfrm>
+            <a:off x="0" y="0"/>
+            <a:ext cx="12191695" cy="6858000"/>
+          </a:xfrm>
+          <a:prstGeom prst="rect">
+            <a:avLst/>
+          </a:prstGeom>
+          <a:solidFill>
+            <a:srgbClr val="0B1220"/>
+          </a:solidFill>
+          <a:ln>
+            <a:noFill/>
+          </a:ln>
+        </p:spPr>
+        <p:style>
+          <a:lnRef idx="1">
+            <a:schemeClr val="accent1"/>
+          </a:lnRef>
+          <a:fillRef idx="3">
+            <a:schemeClr val="accent1"/>
+          </a:fillRef>
+          <a:effectRef idx="2">
+            <a:schemeClr val="accent1"/>
+          </a:effectRef>
+          <a:fontRef idx="minor">
+            <a:schemeClr val="lt1"/>
+          </a:fontRef>
+        </p:style>
+        <p:txBody>
+          <a:bodyPr rtlCol="0" anchor="ctr"/>
+          <a:lstStyle/>
+          <a:p>
+            <a:pPr algn="ctr"/>
+          </a:p>
+        </p:txBody>
+      </p:sp>
+      <p:sp>
+        <p:nvSpPr>
+          <p:cNvPr id="3" name="Rectangle 2"/>
+          <p:cNvSpPr/>
+          <p:nvPr/>
+        </p:nvSpPr>
+        <p:spPr>
+          <a:xfrm>
+            <a:off x="0" y="0"/>
+            <a:ext cx="12191695" cy="41148"/>
+          </a:xfrm>
+          <a:prstGeom prst="rect">
+            <a:avLst/>
+          </a:prstGeom>
+          <a:solidFill>
+            <a:srgbClr val="22D3EE"/>
+          </a:solidFill>
+          <a:ln>
+            <a:noFill/>
+          </a:ln>
+        </p:spPr>
+        <p:style>
+          <a:lnRef idx="1">
+            <a:schemeClr val="accent1"/>
+          </a:lnRef>
+          <a:fillRef idx="3">
+            <a:schemeClr val="accent1"/>
+          </a:fillRef>
+          <a:effectRef idx="2">
+            <a:schemeClr val="accent1"/>
+          </a:effectRef>
+          <a:fontRef idx="minor">
+            <a:schemeClr val="lt1"/>
+          </a:fontRef>
+        </p:style>
+        <p:txBody>
+          <a:bodyPr rtlCol="0" anchor="ctr"/>
+          <a:lstStyle/>
+          <a:p>
+            <a:pPr algn="ctr"/>
+          </a:p>
+        </p:txBody>
+      </p:sp>
+      <p:sp>
+        <p:nvSpPr>
+          <p:cNvPr id="4" name="Rounded Rectangle 3"/>
+          <p:cNvSpPr/>
+          <p:nvPr/>
+        </p:nvSpPr>
+        <p:spPr>
+          <a:xfrm>
+            <a:off x="548640" y="384048"/>
+            <a:ext cx="566928" cy="310896"/>
+          </a:xfrm>
+          <a:prstGeom prst="roundRect">
+            <a:avLst>
+              <a:gd name="adj" fmla="val 30000"/>
+            </a:avLst>
+          </a:prstGeom>
+          <a:solidFill>
+            <a:srgbClr val="111C2E"/>
+          </a:solidFill>
+          <a:ln w="12700">
+            <a:solidFill>
+              <a:srgbClr val="22D3EE"/>
+            </a:solidFill>
+          </a:ln>
+        </p:spPr>
+        <p:style>
+          <a:lnRef idx="1">
+            <a:schemeClr val="accent1"/>
+          </a:lnRef>
+          <a:fillRef idx="3">
+            <a:schemeClr val="accent1"/>
+          </a:fillRef>
+          <a:effectRef idx="2">
+            <a:schemeClr val="accent1"/>
+          </a:effectRef>
+          <a:fontRef idx="minor">
+            <a:schemeClr val="lt1"/>
+          </a:fontRef>
+        </p:style>
+        <p:txBody>
+          <a:bodyPr rtlCol="0" anchor="ctr"/>
+          <a:lstStyle/>
+          <a:p>
+            <a:pPr algn="ctr"/>
+          </a:p>
+        </p:txBody>
+      </p:sp>
+      <p:sp>
+        <p:nvSpPr>
+          <p:cNvPr id="5" name="TextBox 4"/>
+          <p:cNvSpPr txBox="1"/>
+          <p:nvPr/>
+        </p:nvSpPr>
+        <p:spPr>
+          <a:xfrm>
+            <a:off x="548640" y="411480"/>
+            <a:ext cx="566928" cy="256032"/>
+          </a:xfrm>
+          <a:prstGeom prst="rect">
+            <a:avLst/>
+          </a:prstGeom>
+          <a:noFill/>
+        </p:spPr>
+        <p:txBody>
+          <a:bodyPr wrap="square" anchor="t" lIns="25400" rIns="25400" tIns="0" bIns="0">
+            <a:spAutoFit/>
+          </a:bodyPr>
+          <a:lstStyle/>
+          <a:p>
+            <a:pPr algn="ctr">
+              <a:lnSpc>
+                <a:spcPct val="112000"/>
+              </a:lnSpc>
+            </a:pPr>
+            <a:r>
+              <a:rPr sz="1000" b="1">
+                <a:solidFill>
+                  <a:srgbClr val="22D3EE"/>
+                </a:solidFill>
+                <a:latin typeface="Segoe UI"/>
+              </a:rPr>
+              <a:t>07</a:t>
+            </a:r>
+          </a:p>
+        </p:txBody>
+      </p:sp>
+      <p:sp>
+        <p:nvSpPr>
+          <p:cNvPr id="6" name="TextBox 5"/>
+          <p:cNvSpPr txBox="1"/>
+          <p:nvPr/>
+        </p:nvSpPr>
+        <p:spPr>
+          <a:xfrm>
+            <a:off x="1280160" y="310896"/>
+            <a:ext cx="10180015" cy="914400"/>
+          </a:xfrm>
+          <a:prstGeom prst="rect">
+            <a:avLst/>
+          </a:prstGeom>
+          <a:noFill/>
+        </p:spPr>
+        <p:txBody>
+          <a:bodyPr wrap="square" anchor="t" lIns="25400" rIns="25400" tIns="0" bIns="0">
+            <a:spAutoFit/>
+          </a:bodyPr>
+          <a:lstStyle/>
+          <a:p>
+            <a:pPr algn="l">
+              <a:lnSpc>
+                <a:spcPct val="100000"/>
+              </a:lnSpc>
+            </a:pPr>
+            <a:r>
+              <a:rPr sz="2700" b="1">
+                <a:solidFill>
+                  <a:srgbClr val="F8FAFC"/>
+                </a:solidFill>
+                <a:latin typeface="Segoe UI"/>
+              </a:rPr>
               <a:t>Migración del frontend: Vue 3 → React 19</a:t>
             </a:r>
           </a:p>
@@ -5099,40 +8846,285 @@
       </p:sp>
       <p:sp>
         <p:nvSpPr>
-          <p:cNvPr id="3" name="Content Placeholder 2"/>
-          <p:cNvSpPr>
-            <a:spLocks noGrp="1"/>
-          </p:cNvSpPr>
-          <p:nvPr>
-            <p:ph idx="1"/>
-          </p:nvPr>
-        </p:nvSpPr>
-        <p:spPr/>
-        <p:txBody>
-          <a:bodyPr/>
-          <a:lstStyle/>
-          <a:p>
-            <a:r>
-              <a:rPr sz="1500"/>
+          <p:cNvPr id="7" name="TextBox 6"/>
+          <p:cNvSpPr txBox="1"/>
+          <p:nvPr/>
+        </p:nvSpPr>
+        <p:spPr>
+          <a:xfrm>
+            <a:off x="548640" y="1828800"/>
+            <a:ext cx="6492240" cy="4114800"/>
+          </a:xfrm>
+          <a:prstGeom prst="rect">
+            <a:avLst/>
+          </a:prstGeom>
+          <a:noFill/>
+        </p:spPr>
+        <p:txBody>
+          <a:bodyPr wrap="square" lIns="0" rIns="0">
+            <a:spAutoFit/>
+          </a:bodyPr>
+          <a:lstStyle/>
+          <a:p>
+            <a:pPr marL="233680" indent="-233680">
+              <a:lnSpc>
+                <a:spcPct val="118000"/>
+              </a:lnSpc>
+              <a:spcAft>
+                <a:spcPts val="1500"/>
+              </a:spcAft>
+            </a:pPr>
+            <a:r>
+              <a:rPr sz="1320">
+                <a:solidFill>
+                  <a:srgbClr val="22D3EE"/>
+                </a:solidFill>
+                <a:latin typeface="Segoe UI"/>
+              </a:rPr>
+              <a:t>▸  </a:t>
+            </a:r>
+            <a:r>
+              <a:rPr sz="1320">
+                <a:solidFill>
+                  <a:srgbClr val="E2E8F0"/>
+                </a:solidFill>
+                <a:latin typeface="Segoe UI"/>
+              </a:rPr>
               <a:t>Por qué: la rúbrica del trabajo colaborativo de Implementación de Soluciones para Plataformas Web pide React con Tailwind. Se migra el frontend para cumplirla.</a:t>
             </a:r>
           </a:p>
           <a:p>
-            <a:r>
-              <a:rPr sz="1500"/>
+            <a:pPr marL="233680" indent="-233680">
+              <a:lnSpc>
+                <a:spcPct val="118000"/>
+              </a:lnSpc>
+              <a:spcAft>
+                <a:spcPts val="1500"/>
+              </a:spcAft>
+            </a:pPr>
+            <a:r>
+              <a:rPr sz="1320">
+                <a:solidFill>
+                  <a:srgbClr val="22D3EE"/>
+                </a:solidFill>
+                <a:latin typeface="Segoe UI"/>
+              </a:rPr>
+              <a:t>▸  </a:t>
+            </a:r>
+            <a:r>
+              <a:rPr sz="1320">
+                <a:solidFill>
+                  <a:srgbClr val="E2E8F0"/>
+                </a:solidFill>
+                <a:latin typeface="Segoe UI"/>
+              </a:rPr>
               <a:t>Qué cambia: solo la capa de presentación. La SPA está desacoplada del API —todo pasa por /api/v1—, así que no se toca el backend, ni la base de datos, ni la infraestructura.</a:t>
             </a:r>
           </a:p>
           <a:p>
-            <a:r>
-              <a:rPr sz="1500"/>
+            <a:pPr marL="233680" indent="-233680">
+              <a:lnSpc>
+                <a:spcPct val="118000"/>
+              </a:lnSpc>
+              <a:spcAft>
+                <a:spcPts val="1500"/>
+              </a:spcAft>
+            </a:pPr>
+            <a:r>
+              <a:rPr sz="1320">
+                <a:solidFill>
+                  <a:srgbClr val="22D3EE"/>
+                </a:solidFill>
+                <a:latin typeface="Segoe UI"/>
+              </a:rPr>
+              <a:t>▸  </a:t>
+            </a:r>
+            <a:r>
+              <a:rPr sz="1320">
+                <a:solidFill>
+                  <a:srgbClr val="E2E8F0"/>
+                </a:solidFill>
+                <a:latin typeface="Segoe UI"/>
+              </a:rPr>
               <a:t>Qué se gana: de 4 vistas al consumo de las 30 operaciones del contrato, con cursos, usuarios, notas y boleta, más búsqueda, filtros, paginación y pruebas.</a:t>
             </a:r>
           </a:p>
           <a:p>
-            <a:r>
-              <a:rPr sz="1500"/>
+            <a:pPr marL="233680" indent="-233680">
+              <a:lnSpc>
+                <a:spcPct val="118000"/>
+              </a:lnSpc>
+              <a:spcAft>
+                <a:spcPts val="1500"/>
+              </a:spcAft>
+            </a:pPr>
+            <a:r>
+              <a:rPr sz="1320">
+                <a:solidFill>
+                  <a:srgbClr val="22D3EE"/>
+                </a:solidFill>
+                <a:latin typeface="Segoe UI"/>
+              </a:rPr>
+              <a:t>▸  </a:t>
+            </a:r>
+            <a:r>
+              <a:rPr sz="1320">
+                <a:solidFill>
+                  <a:srgbClr val="E2E8F0"/>
+                </a:solidFill>
+                <a:latin typeface="Segoe UI"/>
+              </a:rPr>
               <a:t>Despliegue: mismo build estático servido por nginx, misma imagen y el mismo Coolify. El cambio no altera el entorno publicado: se vuelve a construir y listo.</a:t>
+            </a:r>
+          </a:p>
+        </p:txBody>
+      </p:sp>
+      <p:pic>
+        <p:nvPicPr>
+          <p:cNvPr id="8" name="Picture 7" descr="_recorte_hero_484x415.jpg"/>
+          <p:cNvPicPr>
+            <a:picLocks noChangeAspect="1"/>
+          </p:cNvPicPr>
+          <p:nvPr/>
+        </p:nvPicPr>
+        <p:blipFill>
+          <a:blip r:embed="rId2"/>
+          <a:stretch>
+            <a:fillRect/>
+          </a:stretch>
+        </p:blipFill>
+        <p:spPr>
+          <a:xfrm>
+            <a:off x="7269480" y="1737360"/>
+            <a:ext cx="4434840" cy="3794760"/>
+          </a:xfrm>
+          <a:prstGeom prst="rect">
+            <a:avLst/>
+          </a:prstGeom>
+          <a:ln w="12700">
+            <a:solidFill>
+              <a:srgbClr val="1E293B"/>
+            </a:solidFill>
+          </a:ln>
+        </p:spPr>
+      </p:pic>
+      <p:sp>
+        <p:nvSpPr>
+          <p:cNvPr id="9" name="Rectangle 8"/>
+          <p:cNvSpPr/>
+          <p:nvPr/>
+        </p:nvSpPr>
+        <p:spPr>
+          <a:xfrm>
+            <a:off x="548640" y="6272784"/>
+            <a:ext cx="11094415" cy="9525"/>
+          </a:xfrm>
+          <a:prstGeom prst="rect">
+            <a:avLst/>
+          </a:prstGeom>
+          <a:solidFill>
+            <a:srgbClr val="1E293B"/>
+          </a:solidFill>
+          <a:ln>
+            <a:noFill/>
+          </a:ln>
+        </p:spPr>
+        <p:style>
+          <a:lnRef idx="1">
+            <a:schemeClr val="accent1"/>
+          </a:lnRef>
+          <a:fillRef idx="3">
+            <a:schemeClr val="accent1"/>
+          </a:fillRef>
+          <a:effectRef idx="2">
+            <a:schemeClr val="accent1"/>
+          </a:effectRef>
+          <a:fontRef idx="minor">
+            <a:schemeClr val="lt1"/>
+          </a:fontRef>
+        </p:style>
+        <p:txBody>
+          <a:bodyPr rtlCol="0" anchor="ctr"/>
+          <a:lstStyle/>
+          <a:p>
+            <a:pPr algn="ctr"/>
+          </a:p>
+        </p:txBody>
+      </p:sp>
+      <p:sp>
+        <p:nvSpPr>
+          <p:cNvPr id="10" name="TextBox 9"/>
+          <p:cNvSpPr txBox="1"/>
+          <p:nvPr/>
+        </p:nvSpPr>
+        <p:spPr>
+          <a:xfrm>
+            <a:off x="548640" y="6355080"/>
+            <a:ext cx="8229600" cy="274320"/>
+          </a:xfrm>
+          <a:prstGeom prst="rect">
+            <a:avLst/>
+          </a:prstGeom>
+          <a:noFill/>
+        </p:spPr>
+        <p:txBody>
+          <a:bodyPr wrap="square" anchor="t" lIns="25400" rIns="25400" tIns="0" bIns="0">
+            <a:spAutoFit/>
+          </a:bodyPr>
+          <a:lstStyle/>
+          <a:p>
+            <a:pPr algn="l">
+              <a:lnSpc>
+                <a:spcPct val="112000"/>
+              </a:lnSpc>
+            </a:pPr>
+            <a:r>
+              <a:rPr sz="900" b="0">
+                <a:solidFill>
+                  <a:srgbClr val="94A3B8"/>
+                </a:solidFill>
+                <a:latin typeface="Segoe UI"/>
+              </a:rPr>
+              <a:t>GS08 · Matrículas y Notas — Trabajo colaborativo · Arteaga Rullier · Inocencio Gargate</a:t>
+            </a:r>
+          </a:p>
+        </p:txBody>
+      </p:sp>
+      <p:sp>
+        <p:nvSpPr>
+          <p:cNvPr id="11" name="TextBox 10"/>
+          <p:cNvSpPr txBox="1"/>
+          <p:nvPr/>
+        </p:nvSpPr>
+        <p:spPr>
+          <a:xfrm>
+            <a:off x="10728655" y="6355080"/>
+            <a:ext cx="914400" cy="274320"/>
+          </a:xfrm>
+          <a:prstGeom prst="rect">
+            <a:avLst/>
+          </a:prstGeom>
+          <a:noFill/>
+        </p:spPr>
+        <p:txBody>
+          <a:bodyPr wrap="square" anchor="t" lIns="25400" rIns="25400" tIns="0" bIns="0">
+            <a:spAutoFit/>
+          </a:bodyPr>
+          <a:lstStyle/>
+          <a:p>
+            <a:pPr algn="r">
+              <a:lnSpc>
+                <a:spcPct val="112000"/>
+              </a:lnSpc>
+            </a:pPr>
+            <a:r>
+              <a:rPr sz="900" b="0">
+                <a:solidFill>
+                  <a:srgbClr val="94A3B8"/>
+                </a:solidFill>
+                <a:latin typeface="Segoe UI"/>
+              </a:rPr>
+              <a:t>07 / 13</a:t>
             </a:r>
           </a:p>
         </p:txBody>
@@ -5157,20 +9149,210 @@
       <p:grpSpPr/>
       <p:sp>
         <p:nvSpPr>
-          <p:cNvPr id="2" name="Title 1"/>
-          <p:cNvSpPr>
-            <a:spLocks noGrp="1"/>
-          </p:cNvSpPr>
-          <p:nvPr>
-            <p:ph type="title"/>
-          </p:nvPr>
-        </p:nvSpPr>
-        <p:spPr/>
-        <p:txBody>
-          <a:bodyPr/>
-          <a:lstStyle/>
-          <a:p>
-            <a:r>
+          <p:cNvPr id="2" name="Rectangle 1"/>
+          <p:cNvSpPr/>
+          <p:nvPr/>
+        </p:nvSpPr>
+        <p:spPr>
+          <a:xfrm>
+            <a:off x="0" y="0"/>
+            <a:ext cx="12191695" cy="6858000"/>
+          </a:xfrm>
+          <a:prstGeom prst="rect">
+            <a:avLst/>
+          </a:prstGeom>
+          <a:solidFill>
+            <a:srgbClr val="0B1220"/>
+          </a:solidFill>
+          <a:ln>
+            <a:noFill/>
+          </a:ln>
+        </p:spPr>
+        <p:style>
+          <a:lnRef idx="1">
+            <a:schemeClr val="accent1"/>
+          </a:lnRef>
+          <a:fillRef idx="3">
+            <a:schemeClr val="accent1"/>
+          </a:fillRef>
+          <a:effectRef idx="2">
+            <a:schemeClr val="accent1"/>
+          </a:effectRef>
+          <a:fontRef idx="minor">
+            <a:schemeClr val="lt1"/>
+          </a:fontRef>
+        </p:style>
+        <p:txBody>
+          <a:bodyPr rtlCol="0" anchor="ctr"/>
+          <a:lstStyle/>
+          <a:p>
+            <a:pPr algn="ctr"/>
+          </a:p>
+        </p:txBody>
+      </p:sp>
+      <p:sp>
+        <p:nvSpPr>
+          <p:cNvPr id="3" name="Rectangle 2"/>
+          <p:cNvSpPr/>
+          <p:nvPr/>
+        </p:nvSpPr>
+        <p:spPr>
+          <a:xfrm>
+            <a:off x="0" y="0"/>
+            <a:ext cx="12191695" cy="41148"/>
+          </a:xfrm>
+          <a:prstGeom prst="rect">
+            <a:avLst/>
+          </a:prstGeom>
+          <a:solidFill>
+            <a:srgbClr val="22D3EE"/>
+          </a:solidFill>
+          <a:ln>
+            <a:noFill/>
+          </a:ln>
+        </p:spPr>
+        <p:style>
+          <a:lnRef idx="1">
+            <a:schemeClr val="accent1"/>
+          </a:lnRef>
+          <a:fillRef idx="3">
+            <a:schemeClr val="accent1"/>
+          </a:fillRef>
+          <a:effectRef idx="2">
+            <a:schemeClr val="accent1"/>
+          </a:effectRef>
+          <a:fontRef idx="minor">
+            <a:schemeClr val="lt1"/>
+          </a:fontRef>
+        </p:style>
+        <p:txBody>
+          <a:bodyPr rtlCol="0" anchor="ctr"/>
+          <a:lstStyle/>
+          <a:p>
+            <a:pPr algn="ctr"/>
+          </a:p>
+        </p:txBody>
+      </p:sp>
+      <p:sp>
+        <p:nvSpPr>
+          <p:cNvPr id="4" name="Rounded Rectangle 3"/>
+          <p:cNvSpPr/>
+          <p:nvPr/>
+        </p:nvSpPr>
+        <p:spPr>
+          <a:xfrm>
+            <a:off x="548640" y="384048"/>
+            <a:ext cx="566928" cy="310896"/>
+          </a:xfrm>
+          <a:prstGeom prst="roundRect">
+            <a:avLst>
+              <a:gd name="adj" fmla="val 30000"/>
+            </a:avLst>
+          </a:prstGeom>
+          <a:solidFill>
+            <a:srgbClr val="111C2E"/>
+          </a:solidFill>
+          <a:ln w="12700">
+            <a:solidFill>
+              <a:srgbClr val="22D3EE"/>
+            </a:solidFill>
+          </a:ln>
+        </p:spPr>
+        <p:style>
+          <a:lnRef idx="1">
+            <a:schemeClr val="accent1"/>
+          </a:lnRef>
+          <a:fillRef idx="3">
+            <a:schemeClr val="accent1"/>
+          </a:fillRef>
+          <a:effectRef idx="2">
+            <a:schemeClr val="accent1"/>
+          </a:effectRef>
+          <a:fontRef idx="minor">
+            <a:schemeClr val="lt1"/>
+          </a:fontRef>
+        </p:style>
+        <p:txBody>
+          <a:bodyPr rtlCol="0" anchor="ctr"/>
+          <a:lstStyle/>
+          <a:p>
+            <a:pPr algn="ctr"/>
+          </a:p>
+        </p:txBody>
+      </p:sp>
+      <p:sp>
+        <p:nvSpPr>
+          <p:cNvPr id="5" name="TextBox 4"/>
+          <p:cNvSpPr txBox="1"/>
+          <p:nvPr/>
+        </p:nvSpPr>
+        <p:spPr>
+          <a:xfrm>
+            <a:off x="548640" y="411480"/>
+            <a:ext cx="566928" cy="256032"/>
+          </a:xfrm>
+          <a:prstGeom prst="rect">
+            <a:avLst/>
+          </a:prstGeom>
+          <a:noFill/>
+        </p:spPr>
+        <p:txBody>
+          <a:bodyPr wrap="square" anchor="t" lIns="25400" rIns="25400" tIns="0" bIns="0">
+            <a:spAutoFit/>
+          </a:bodyPr>
+          <a:lstStyle/>
+          <a:p>
+            <a:pPr algn="ctr">
+              <a:lnSpc>
+                <a:spcPct val="112000"/>
+              </a:lnSpc>
+            </a:pPr>
+            <a:r>
+              <a:rPr sz="1000" b="1">
+                <a:solidFill>
+                  <a:srgbClr val="22D3EE"/>
+                </a:solidFill>
+                <a:latin typeface="Segoe UI"/>
+              </a:rPr>
+              <a:t>08</a:t>
+            </a:r>
+          </a:p>
+        </p:txBody>
+      </p:sp>
+      <p:sp>
+        <p:nvSpPr>
+          <p:cNvPr id="6" name="TextBox 5"/>
+          <p:cNvSpPr txBox="1"/>
+          <p:nvPr/>
+        </p:nvSpPr>
+        <p:spPr>
+          <a:xfrm>
+            <a:off x="1280160" y="310896"/>
+            <a:ext cx="10180015" cy="914400"/>
+          </a:xfrm>
+          <a:prstGeom prst="rect">
+            <a:avLst/>
+          </a:prstGeom>
+          <a:noFill/>
+        </p:spPr>
+        <p:txBody>
+          <a:bodyPr wrap="square" anchor="t" lIns="25400" rIns="25400" tIns="0" bIns="0">
+            <a:spAutoFit/>
+          </a:bodyPr>
+          <a:lstStyle/>
+          <a:p>
+            <a:pPr algn="l">
+              <a:lnSpc>
+                <a:spcPct val="100000"/>
+              </a:lnSpc>
+            </a:pPr>
+            <a:r>
+              <a:rPr sz="2700" b="1">
+                <a:solidFill>
+                  <a:srgbClr val="F8FAFC"/>
+                </a:solidFill>
+                <a:latin typeface="Segoe UI"/>
+              </a:rPr>
               <a:t>Contenedores y CI</a:t>
             </a:r>
           </a:p>
@@ -5178,44 +9360,285 @@
       </p:sp>
       <p:sp>
         <p:nvSpPr>
-          <p:cNvPr id="3" name="Content Placeholder 2"/>
-          <p:cNvSpPr>
-            <a:spLocks noGrp="1"/>
-          </p:cNvSpPr>
-          <p:nvPr>
-            <p:ph idx="1"/>
-          </p:nvPr>
-        </p:nvSpPr>
-        <p:spPr/>
-        <p:txBody>
-          <a:bodyPr/>
-          <a:lstStyle/>
-          <a:p>
-            <a:pPr/>
-            <a:r>
-              <a:rPr sz="1500"/>
+          <p:cNvPr id="7" name="TextBox 6"/>
+          <p:cNvSpPr txBox="1"/>
+          <p:nvPr/>
+        </p:nvSpPr>
+        <p:spPr>
+          <a:xfrm>
+            <a:off x="548640" y="1828800"/>
+            <a:ext cx="6492240" cy="4114800"/>
+          </a:xfrm>
+          <a:prstGeom prst="rect">
+            <a:avLst/>
+          </a:prstGeom>
+          <a:noFill/>
+        </p:spPr>
+        <p:txBody>
+          <a:bodyPr wrap="square" lIns="0" rIns="0">
+            <a:spAutoFit/>
+          </a:bodyPr>
+          <a:lstStyle/>
+          <a:p>
+            <a:pPr marL="233680" indent="-233680">
+              <a:lnSpc>
+                <a:spcPct val="118000"/>
+              </a:lnSpc>
+              <a:spcAft>
+                <a:spcPts val="1500"/>
+              </a:spcAft>
+            </a:pPr>
+            <a:r>
+              <a:rPr sz="1380">
+                <a:solidFill>
+                  <a:srgbClr val="22D3EE"/>
+                </a:solidFill>
+                <a:latin typeface="Segoe UI"/>
+              </a:rPr>
+              <a:t>▸  </a:t>
+            </a:r>
+            <a:r>
+              <a:rPr sz="1380">
+                <a:solidFill>
+                  <a:srgbClr val="E2E8F0"/>
+                </a:solidFill>
+                <a:latin typeface="Segoe UI"/>
+              </a:rPr>
               <a:t>8 servicios con un solo comando: web (nginx: 80 en producción, 8080 en local), dos instancias del API, PostgreSQL, MongoDB, Redis, Prometheus y Grafana.</a:t>
             </a:r>
           </a:p>
           <a:p>
-            <a:pPr/>
-            <a:r>
-              <a:rPr sz="1500"/>
+            <a:pPr marL="233680" indent="-233680">
+              <a:lnSpc>
+                <a:spcPct val="118000"/>
+              </a:lnSpc>
+              <a:spcAft>
+                <a:spcPts val="1500"/>
+              </a:spcAft>
+            </a:pPr>
+            <a:r>
+              <a:rPr sz="1380">
+                <a:solidFill>
+                  <a:srgbClr val="22D3EE"/>
+                </a:solidFill>
+                <a:latin typeface="Segoe UI"/>
+              </a:rPr>
+              <a:t>▸  </a:t>
+            </a:r>
+            <a:r>
+              <a:rPr sz="1380">
+                <a:solidFill>
+                  <a:srgbClr val="E2E8F0"/>
+                </a:solidFill>
+                <a:latin typeface="Segoe UI"/>
+              </a:rPr>
               <a:t>Balanceo real 1 a 1 entre las dos instancias; con una apagada, 6 peticiones siguen dando 200 con reintento (failover).</a:t>
             </a:r>
           </a:p>
           <a:p>
-            <a:pPr/>
-            <a:r>
-              <a:rPr sz="1500"/>
+            <a:pPr marL="233680" indent="-233680">
+              <a:lnSpc>
+                <a:spcPct val="118000"/>
+              </a:lnSpc>
+              <a:spcAft>
+                <a:spcPts val="1500"/>
+              </a:spcAft>
+            </a:pPr>
+            <a:r>
+              <a:rPr sz="1380">
+                <a:solidFill>
+                  <a:srgbClr val="22D3EE"/>
+                </a:solidFill>
+                <a:latin typeface="Segoe UI"/>
+              </a:rPr>
+              <a:t>▸  </a:t>
+            </a:r>
+            <a:r>
+              <a:rPr sz="1380">
+                <a:solidFill>
+                  <a:srgbClr val="E2E8F0"/>
+                </a:solidFill>
+                <a:latin typeface="Segoe UI"/>
+              </a:rPr>
               <a:t>CI en cada push a main: infraestructura + backend (ruff y 121 pruebas, 90 % de cobertura) + frontend (25 pruebas, eslint y build) + imágenes con humo; los cinco jobs están en verde.</a:t>
             </a:r>
           </a:p>
           <a:p>
-            <a:pPr/>
-            <a:r>
-              <a:rPr sz="1500"/>
+            <a:pPr marL="233680" indent="-233680">
+              <a:lnSpc>
+                <a:spcPct val="118000"/>
+              </a:lnSpc>
+              <a:spcAft>
+                <a:spcPts val="1500"/>
+              </a:spcAft>
+            </a:pPr>
+            <a:r>
+              <a:rPr sz="1380">
+                <a:solidFill>
+                  <a:srgbClr val="22D3EE"/>
+                </a:solidFill>
+                <a:latin typeface="Segoe UI"/>
+              </a:rPr>
+              <a:t>▸  </a:t>
+            </a:r>
+            <a:r>
+              <a:rPr sz="1380">
+                <a:solidFill>
+                  <a:srgbClr val="E2E8F0"/>
+                </a:solidFill>
+                <a:latin typeface="Segoe UI"/>
+              </a:rPr>
               <a:t>CD en GitHub Actions: al terminar el CI en verde sobre main pide el despliegue a Coolify y verifica producción</a:t>
+            </a:r>
+          </a:p>
+        </p:txBody>
+      </p:sp>
+      <p:pic>
+        <p:nvPicPr>
+          <p:cNvPr id="8" name="Picture 7" descr="_recorte_arq_484x415.jpg"/>
+          <p:cNvPicPr>
+            <a:picLocks noChangeAspect="1"/>
+          </p:cNvPicPr>
+          <p:nvPr/>
+        </p:nvPicPr>
+        <p:blipFill>
+          <a:blip r:embed="rId2"/>
+          <a:stretch>
+            <a:fillRect/>
+          </a:stretch>
+        </p:blipFill>
+        <p:spPr>
+          <a:xfrm>
+            <a:off x="7269480" y="1737360"/>
+            <a:ext cx="4434840" cy="3794760"/>
+          </a:xfrm>
+          <a:prstGeom prst="rect">
+            <a:avLst/>
+          </a:prstGeom>
+          <a:ln w="12700">
+            <a:solidFill>
+              <a:srgbClr val="1E293B"/>
+            </a:solidFill>
+          </a:ln>
+        </p:spPr>
+      </p:pic>
+      <p:sp>
+        <p:nvSpPr>
+          <p:cNvPr id="9" name="Rectangle 8"/>
+          <p:cNvSpPr/>
+          <p:nvPr/>
+        </p:nvSpPr>
+        <p:spPr>
+          <a:xfrm>
+            <a:off x="548640" y="6272784"/>
+            <a:ext cx="11094415" cy="9525"/>
+          </a:xfrm>
+          <a:prstGeom prst="rect">
+            <a:avLst/>
+          </a:prstGeom>
+          <a:solidFill>
+            <a:srgbClr val="1E293B"/>
+          </a:solidFill>
+          <a:ln>
+            <a:noFill/>
+          </a:ln>
+        </p:spPr>
+        <p:style>
+          <a:lnRef idx="1">
+            <a:schemeClr val="accent1"/>
+          </a:lnRef>
+          <a:fillRef idx="3">
+            <a:schemeClr val="accent1"/>
+          </a:fillRef>
+          <a:effectRef idx="2">
+            <a:schemeClr val="accent1"/>
+          </a:effectRef>
+          <a:fontRef idx="minor">
+            <a:schemeClr val="lt1"/>
+          </a:fontRef>
+        </p:style>
+        <p:txBody>
+          <a:bodyPr rtlCol="0" anchor="ctr"/>
+          <a:lstStyle/>
+          <a:p>
+            <a:pPr algn="ctr"/>
+          </a:p>
+        </p:txBody>
+      </p:sp>
+      <p:sp>
+        <p:nvSpPr>
+          <p:cNvPr id="10" name="TextBox 9"/>
+          <p:cNvSpPr txBox="1"/>
+          <p:nvPr/>
+        </p:nvSpPr>
+        <p:spPr>
+          <a:xfrm>
+            <a:off x="548640" y="6355080"/>
+            <a:ext cx="8229600" cy="274320"/>
+          </a:xfrm>
+          <a:prstGeom prst="rect">
+            <a:avLst/>
+          </a:prstGeom>
+          <a:noFill/>
+        </p:spPr>
+        <p:txBody>
+          <a:bodyPr wrap="square" anchor="t" lIns="25400" rIns="25400" tIns="0" bIns="0">
+            <a:spAutoFit/>
+          </a:bodyPr>
+          <a:lstStyle/>
+          <a:p>
+            <a:pPr algn="l">
+              <a:lnSpc>
+                <a:spcPct val="112000"/>
+              </a:lnSpc>
+            </a:pPr>
+            <a:r>
+              <a:rPr sz="900" b="0">
+                <a:solidFill>
+                  <a:srgbClr val="94A3B8"/>
+                </a:solidFill>
+                <a:latin typeface="Segoe UI"/>
+              </a:rPr>
+              <a:t>GS08 · Matrículas y Notas — Trabajo colaborativo · Arteaga Rullier · Inocencio Gargate</a:t>
+            </a:r>
+          </a:p>
+        </p:txBody>
+      </p:sp>
+      <p:sp>
+        <p:nvSpPr>
+          <p:cNvPr id="11" name="TextBox 10"/>
+          <p:cNvSpPr txBox="1"/>
+          <p:nvPr/>
+        </p:nvSpPr>
+        <p:spPr>
+          <a:xfrm>
+            <a:off x="10728655" y="6355080"/>
+            <a:ext cx="914400" cy="274320"/>
+          </a:xfrm>
+          <a:prstGeom prst="rect">
+            <a:avLst/>
+          </a:prstGeom>
+          <a:noFill/>
+        </p:spPr>
+        <p:txBody>
+          <a:bodyPr wrap="square" anchor="t" lIns="25400" rIns="25400" tIns="0" bIns="0">
+            <a:spAutoFit/>
+          </a:bodyPr>
+          <a:lstStyle/>
+          <a:p>
+            <a:pPr algn="r">
+              <a:lnSpc>
+                <a:spcPct val="112000"/>
+              </a:lnSpc>
+            </a:pPr>
+            <a:r>
+              <a:rPr sz="900" b="0">
+                <a:solidFill>
+                  <a:srgbClr val="94A3B8"/>
+                </a:solidFill>
+                <a:latin typeface="Segoe UI"/>
+              </a:rPr>
+              <a:t>08 / 13</a:t>
             </a:r>
           </a:p>
         </p:txBody>
@@ -5240,54 +9663,210 @@
       <p:grpSpPr/>
       <p:sp>
         <p:nvSpPr>
-          <p:cNvPr id="2" name="Title 1"/>
-          <p:cNvSpPr>
-            <a:spLocks noGrp="1"/>
-          </p:cNvSpPr>
-          <p:nvPr>
-            <p:ph type="title"/>
-          </p:nvPr>
-        </p:nvSpPr>
-        <p:spPr/>
-        <p:txBody>
-          <a:bodyPr/>
-          <a:lstStyle/>
-          <a:p/>
-        </p:txBody>
-      </p:sp>
-      <p:sp>
-        <p:nvSpPr>
-          <p:cNvPr id="3" name="Content Placeholder 2"/>
-          <p:cNvSpPr>
-            <a:spLocks noGrp="1"/>
-          </p:cNvSpPr>
-          <p:nvPr>
-            <p:ph idx="1"/>
-          </p:nvPr>
-        </p:nvSpPr>
-        <p:spPr/>
-        <p:txBody>
-          <a:bodyPr/>
-          <a:lstStyle/>
-          <a:p/>
-        </p:txBody>
-      </p:sp>
-      <p:sp>
-        <p:nvSpPr>
-          <p:cNvPr id="2" name="Title 1"/>
-          <p:cNvSpPr>
-            <a:spLocks noGrp="1"/>
-          </p:cNvSpPr>
-          <p:nvPr>
-            <p:ph type="title"/>
-          </p:nvPr>
-        </p:nvSpPr>
-        <p:spPr/>
-        <p:txBody>
-          <a:bodyPr/>
-          <a:lstStyle/>
-          <a:p>
-            <a:r>
+          <p:cNvPr id="2" name="Rectangle 1"/>
+          <p:cNvSpPr/>
+          <p:nvPr/>
+        </p:nvSpPr>
+        <p:spPr>
+          <a:xfrm>
+            <a:off x="0" y="0"/>
+            <a:ext cx="12191695" cy="6858000"/>
+          </a:xfrm>
+          <a:prstGeom prst="rect">
+            <a:avLst/>
+          </a:prstGeom>
+          <a:solidFill>
+            <a:srgbClr val="0B1220"/>
+          </a:solidFill>
+          <a:ln>
+            <a:noFill/>
+          </a:ln>
+        </p:spPr>
+        <p:style>
+          <a:lnRef idx="1">
+            <a:schemeClr val="accent1"/>
+          </a:lnRef>
+          <a:fillRef idx="3">
+            <a:schemeClr val="accent1"/>
+          </a:fillRef>
+          <a:effectRef idx="2">
+            <a:schemeClr val="accent1"/>
+          </a:effectRef>
+          <a:fontRef idx="minor">
+            <a:schemeClr val="lt1"/>
+          </a:fontRef>
+        </p:style>
+        <p:txBody>
+          <a:bodyPr rtlCol="0" anchor="ctr"/>
+          <a:lstStyle/>
+          <a:p>
+            <a:pPr algn="ctr"/>
+          </a:p>
+        </p:txBody>
+      </p:sp>
+      <p:sp>
+        <p:nvSpPr>
+          <p:cNvPr id="3" name="Rectangle 2"/>
+          <p:cNvSpPr/>
+          <p:nvPr/>
+        </p:nvSpPr>
+        <p:spPr>
+          <a:xfrm>
+            <a:off x="0" y="0"/>
+            <a:ext cx="12191695" cy="41148"/>
+          </a:xfrm>
+          <a:prstGeom prst="rect">
+            <a:avLst/>
+          </a:prstGeom>
+          <a:solidFill>
+            <a:srgbClr val="22D3EE"/>
+          </a:solidFill>
+          <a:ln>
+            <a:noFill/>
+          </a:ln>
+        </p:spPr>
+        <p:style>
+          <a:lnRef idx="1">
+            <a:schemeClr val="accent1"/>
+          </a:lnRef>
+          <a:fillRef idx="3">
+            <a:schemeClr val="accent1"/>
+          </a:fillRef>
+          <a:effectRef idx="2">
+            <a:schemeClr val="accent1"/>
+          </a:effectRef>
+          <a:fontRef idx="minor">
+            <a:schemeClr val="lt1"/>
+          </a:fontRef>
+        </p:style>
+        <p:txBody>
+          <a:bodyPr rtlCol="0" anchor="ctr"/>
+          <a:lstStyle/>
+          <a:p>
+            <a:pPr algn="ctr"/>
+          </a:p>
+        </p:txBody>
+      </p:sp>
+      <p:sp>
+        <p:nvSpPr>
+          <p:cNvPr id="4" name="Rounded Rectangle 3"/>
+          <p:cNvSpPr/>
+          <p:nvPr/>
+        </p:nvSpPr>
+        <p:spPr>
+          <a:xfrm>
+            <a:off x="548640" y="384048"/>
+            <a:ext cx="566928" cy="310896"/>
+          </a:xfrm>
+          <a:prstGeom prst="roundRect">
+            <a:avLst>
+              <a:gd name="adj" fmla="val 30000"/>
+            </a:avLst>
+          </a:prstGeom>
+          <a:solidFill>
+            <a:srgbClr val="111C2E"/>
+          </a:solidFill>
+          <a:ln w="12700">
+            <a:solidFill>
+              <a:srgbClr val="22D3EE"/>
+            </a:solidFill>
+          </a:ln>
+        </p:spPr>
+        <p:style>
+          <a:lnRef idx="1">
+            <a:schemeClr val="accent1"/>
+          </a:lnRef>
+          <a:fillRef idx="3">
+            <a:schemeClr val="accent1"/>
+          </a:fillRef>
+          <a:effectRef idx="2">
+            <a:schemeClr val="accent1"/>
+          </a:effectRef>
+          <a:fontRef idx="minor">
+            <a:schemeClr val="lt1"/>
+          </a:fontRef>
+        </p:style>
+        <p:txBody>
+          <a:bodyPr rtlCol="0" anchor="ctr"/>
+          <a:lstStyle/>
+          <a:p>
+            <a:pPr algn="ctr"/>
+          </a:p>
+        </p:txBody>
+      </p:sp>
+      <p:sp>
+        <p:nvSpPr>
+          <p:cNvPr id="5" name="TextBox 4"/>
+          <p:cNvSpPr txBox="1"/>
+          <p:nvPr/>
+        </p:nvSpPr>
+        <p:spPr>
+          <a:xfrm>
+            <a:off x="548640" y="411480"/>
+            <a:ext cx="566928" cy="256032"/>
+          </a:xfrm>
+          <a:prstGeom prst="rect">
+            <a:avLst/>
+          </a:prstGeom>
+          <a:noFill/>
+        </p:spPr>
+        <p:txBody>
+          <a:bodyPr wrap="square" anchor="t" lIns="25400" rIns="25400" tIns="0" bIns="0">
+            <a:spAutoFit/>
+          </a:bodyPr>
+          <a:lstStyle/>
+          <a:p>
+            <a:pPr algn="ctr">
+              <a:lnSpc>
+                <a:spcPct val="112000"/>
+              </a:lnSpc>
+            </a:pPr>
+            <a:r>
+              <a:rPr sz="1000" b="1">
+                <a:solidFill>
+                  <a:srgbClr val="22D3EE"/>
+                </a:solidFill>
+                <a:latin typeface="Segoe UI"/>
+              </a:rPr>
+              <a:t>09</a:t>
+            </a:r>
+          </a:p>
+        </p:txBody>
+      </p:sp>
+      <p:sp>
+        <p:nvSpPr>
+          <p:cNvPr id="6" name="TextBox 5"/>
+          <p:cNvSpPr txBox="1"/>
+          <p:nvPr/>
+        </p:nvSpPr>
+        <p:spPr>
+          <a:xfrm>
+            <a:off x="1280160" y="310896"/>
+            <a:ext cx="10180015" cy="914400"/>
+          </a:xfrm>
+          <a:prstGeom prst="rect">
+            <a:avLst/>
+          </a:prstGeom>
+          <a:noFill/>
+        </p:spPr>
+        <p:txBody>
+          <a:bodyPr wrap="square" anchor="t" lIns="25400" rIns="25400" tIns="0" bIns="0">
+            <a:spAutoFit/>
+          </a:bodyPr>
+          <a:lstStyle/>
+          <a:p>
+            <a:pPr algn="l">
+              <a:lnSpc>
+                <a:spcPct val="100000"/>
+              </a:lnSpc>
+            </a:pPr>
+            <a:r>
+              <a:rPr sz="2300" b="1">
+                <a:solidFill>
+                  <a:srgbClr val="F8FAFC"/>
+                </a:solidFill>
+                <a:latin typeface="Segoe UI"/>
+              </a:rPr>
               <a:t>Capa de rúbrica del API: segunda base, caché, GraphQL y logging</a:t>
             </a:r>
           </a:p>
@@ -5295,44 +9874,285 @@
       </p:sp>
       <p:sp>
         <p:nvSpPr>
-          <p:cNvPr id="3" name="Content Placeholder 2"/>
-          <p:cNvSpPr>
-            <a:spLocks noGrp="1"/>
-          </p:cNvSpPr>
-          <p:nvPr>
-            <p:ph idx="1"/>
-          </p:nvPr>
-        </p:nvSpPr>
-        <p:spPr/>
-        <p:txBody>
-          <a:bodyPr/>
-          <a:lstStyle/>
-          <a:p>
-            <a:pPr/>
-            <a:r>
-              <a:rPr sz="1500"/>
+          <p:cNvPr id="7" name="TextBox 6"/>
+          <p:cNvSpPr txBox="1"/>
+          <p:nvPr/>
+        </p:nvSpPr>
+        <p:spPr>
+          <a:xfrm>
+            <a:off x="548640" y="1828800"/>
+            <a:ext cx="6492240" cy="4114800"/>
+          </a:xfrm>
+          <a:prstGeom prst="rect">
+            <a:avLst/>
+          </a:prstGeom>
+          <a:noFill/>
+        </p:spPr>
+        <p:txBody>
+          <a:bodyPr wrap="square" lIns="0" rIns="0">
+            <a:spAutoFit/>
+          </a:bodyPr>
+          <a:lstStyle/>
+          <a:p>
+            <a:pPr marL="233680" indent="-233680">
+              <a:lnSpc>
+                <a:spcPct val="118000"/>
+              </a:lnSpc>
+              <a:spcAft>
+                <a:spcPts val="1500"/>
+              </a:spcAft>
+            </a:pPr>
+            <a:r>
+              <a:rPr sz="1380">
+                <a:solidFill>
+                  <a:srgbClr val="22D3EE"/>
+                </a:solidFill>
+                <a:latin typeface="Segoe UI"/>
+              </a:rPr>
+              <a:t>▸  </a:t>
+            </a:r>
+            <a:r>
+              <a:rPr sz="1380">
+                <a:solidFill>
+                  <a:srgbClr val="E2E8F0"/>
+                </a:solidFill>
+                <a:latin typeface="Segoe UI"/>
+              </a:rPr>
               <a:t>Segunda base documental (MongoDB 8.0): la bitácora guarda usuario, acción, entidad, resultado y duración de cada escritura, con contraseñas y tokens enmascarados («***»).</a:t>
             </a:r>
           </a:p>
           <a:p>
-            <a:pPr/>
-            <a:r>
-              <a:rPr sz="1500"/>
+            <a:pPr marL="233680" indent="-233680">
+              <a:lnSpc>
+                <a:spcPct val="118000"/>
+              </a:lnSpc>
+              <a:spcAft>
+                <a:spcPts val="1500"/>
+              </a:spcAft>
+            </a:pPr>
+            <a:r>
+              <a:rPr sz="1380">
+                <a:solidFill>
+                  <a:srgbClr val="22D3EE"/>
+                </a:solidFill>
+                <a:latin typeface="Segoe UI"/>
+              </a:rPr>
+              <a:t>▸  </a:t>
+            </a:r>
+            <a:r>
+              <a:rPr sz="1380">
+                <a:solidFill>
+                  <a:srgbClr val="E2E8F0"/>
+                </a:solidFill>
+                <a:latin typeface="Segoe UI"/>
+              </a:rPr>
               <a:t>Caché distribuida (Redis 8): el panel se arma una vez y se guarda 60 s; medido con 20 000 estudiantes y 20 000 matrículas: 54,2 ms → 13,5 ms (4,0×), y cualquier escritura la invalida sola.</a:t>
             </a:r>
           </a:p>
           <a:p>
-            <a:pPr/>
-            <a:r>
-              <a:rPr sz="1500"/>
+            <a:pPr marL="233680" indent="-233680">
+              <a:lnSpc>
+                <a:spcPct val="118000"/>
+              </a:lnSpc>
+              <a:spcAft>
+                <a:spcPts val="1500"/>
+              </a:spcAft>
+            </a:pPr>
+            <a:r>
+              <a:rPr sz="1380">
+                <a:solidFill>
+                  <a:srgbClr val="22D3EE"/>
+                </a:solidFill>
+                <a:latin typeface="Segoe UI"/>
+              </a:rPr>
+              <a:t>▸  </a:t>
+            </a:r>
+            <a:r>
+              <a:rPr sz="1380">
+                <a:solidFill>
+                  <a:srgbClr val="E2E8F0"/>
+                </a:solidFill>
+                <a:latin typeface="Segoe UI"/>
+              </a:rPr>
               <a:t>GraphQL en /graphql (Strawberry) con la consulta de boleta, que comparte una sola fórmula de promedio ponderado con el REST.</a:t>
             </a:r>
           </a:p>
           <a:p>
-            <a:pPr/>
-            <a:r>
-              <a:rPr sz="1500"/>
+            <a:pPr marL="233680" indent="-233680">
+              <a:lnSpc>
+                <a:spcPct val="118000"/>
+              </a:lnSpc>
+              <a:spcAft>
+                <a:spcPts val="1500"/>
+              </a:spcAft>
+            </a:pPr>
+            <a:r>
+              <a:rPr sz="1380">
+                <a:solidFill>
+                  <a:srgbClr val="22D3EE"/>
+                </a:solidFill>
+                <a:latin typeface="Segoe UI"/>
+              </a:rPr>
+              <a:t>▸  </a:t>
+            </a:r>
+            <a:r>
+              <a:rPr sz="1380">
+                <a:solidFill>
+                  <a:srgbClr val="E2E8F0"/>
+                </a:solidFill>
+                <a:latin typeface="Segoe UI"/>
+              </a:rPr>
               <a:t>Logging centralizado: JSON con identificador de petición, usuario, ruta, estado y duración; Grafana lee la serie {servicio="gs08-api"} desde Loki.</a:t>
+            </a:r>
+          </a:p>
+        </p:txBody>
+      </p:sp>
+      <p:pic>
+        <p:nvPicPr>
+          <p:cNvPr id="8" name="Picture 7" descr="_recorte_datos_484x415.jpg"/>
+          <p:cNvPicPr>
+            <a:picLocks noChangeAspect="1"/>
+          </p:cNvPicPr>
+          <p:nvPr/>
+        </p:nvPicPr>
+        <p:blipFill>
+          <a:blip r:embed="rId2"/>
+          <a:stretch>
+            <a:fillRect/>
+          </a:stretch>
+        </p:blipFill>
+        <p:spPr>
+          <a:xfrm>
+            <a:off x="7269480" y="1737360"/>
+            <a:ext cx="4434840" cy="3794760"/>
+          </a:xfrm>
+          <a:prstGeom prst="rect">
+            <a:avLst/>
+          </a:prstGeom>
+          <a:ln w="12700">
+            <a:solidFill>
+              <a:srgbClr val="1E293B"/>
+            </a:solidFill>
+          </a:ln>
+        </p:spPr>
+      </p:pic>
+      <p:sp>
+        <p:nvSpPr>
+          <p:cNvPr id="9" name="Rectangle 8"/>
+          <p:cNvSpPr/>
+          <p:nvPr/>
+        </p:nvSpPr>
+        <p:spPr>
+          <a:xfrm>
+            <a:off x="548640" y="6272784"/>
+            <a:ext cx="11094415" cy="9525"/>
+          </a:xfrm>
+          <a:prstGeom prst="rect">
+            <a:avLst/>
+          </a:prstGeom>
+          <a:solidFill>
+            <a:srgbClr val="1E293B"/>
+          </a:solidFill>
+          <a:ln>
+            <a:noFill/>
+          </a:ln>
+        </p:spPr>
+        <p:style>
+          <a:lnRef idx="1">
+            <a:schemeClr val="accent1"/>
+          </a:lnRef>
+          <a:fillRef idx="3">
+            <a:schemeClr val="accent1"/>
+          </a:fillRef>
+          <a:effectRef idx="2">
+            <a:schemeClr val="accent1"/>
+          </a:effectRef>
+          <a:fontRef idx="minor">
+            <a:schemeClr val="lt1"/>
+          </a:fontRef>
+        </p:style>
+        <p:txBody>
+          <a:bodyPr rtlCol="0" anchor="ctr"/>
+          <a:lstStyle/>
+          <a:p>
+            <a:pPr algn="ctr"/>
+          </a:p>
+        </p:txBody>
+      </p:sp>
+      <p:sp>
+        <p:nvSpPr>
+          <p:cNvPr id="10" name="TextBox 9"/>
+          <p:cNvSpPr txBox="1"/>
+          <p:nvPr/>
+        </p:nvSpPr>
+        <p:spPr>
+          <a:xfrm>
+            <a:off x="548640" y="6355080"/>
+            <a:ext cx="8229600" cy="274320"/>
+          </a:xfrm>
+          <a:prstGeom prst="rect">
+            <a:avLst/>
+          </a:prstGeom>
+          <a:noFill/>
+        </p:spPr>
+        <p:txBody>
+          <a:bodyPr wrap="square" anchor="t" lIns="25400" rIns="25400" tIns="0" bIns="0">
+            <a:spAutoFit/>
+          </a:bodyPr>
+          <a:lstStyle/>
+          <a:p>
+            <a:pPr algn="l">
+              <a:lnSpc>
+                <a:spcPct val="112000"/>
+              </a:lnSpc>
+            </a:pPr>
+            <a:r>
+              <a:rPr sz="900" b="0">
+                <a:solidFill>
+                  <a:srgbClr val="94A3B8"/>
+                </a:solidFill>
+                <a:latin typeface="Segoe UI"/>
+              </a:rPr>
+              <a:t>GS08 · Matrículas y Notas — Trabajo colaborativo · Arteaga Rullier · Inocencio Gargate</a:t>
+            </a:r>
+          </a:p>
+        </p:txBody>
+      </p:sp>
+      <p:sp>
+        <p:nvSpPr>
+          <p:cNvPr id="11" name="TextBox 10"/>
+          <p:cNvSpPr txBox="1"/>
+          <p:nvPr/>
+        </p:nvSpPr>
+        <p:spPr>
+          <a:xfrm>
+            <a:off x="10728655" y="6355080"/>
+            <a:ext cx="914400" cy="274320"/>
+          </a:xfrm>
+          <a:prstGeom prst="rect">
+            <a:avLst/>
+          </a:prstGeom>
+          <a:noFill/>
+        </p:spPr>
+        <p:txBody>
+          <a:bodyPr wrap="square" anchor="t" lIns="25400" rIns="25400" tIns="0" bIns="0">
+            <a:spAutoFit/>
+          </a:bodyPr>
+          <a:lstStyle/>
+          <a:p>
+            <a:pPr algn="r">
+              <a:lnSpc>
+                <a:spcPct val="112000"/>
+              </a:lnSpc>
+            </a:pPr>
+            <a:r>
+              <a:rPr sz="900" b="0">
+                <a:solidFill>
+                  <a:srgbClr val="94A3B8"/>
+                </a:solidFill>
+                <a:latin typeface="Segoe UI"/>
+              </a:rPr>
+              <a:t>09 / 13</a:t>
             </a:r>
           </a:p>
         </p:txBody>
@@ -5663,324 +10483,4 @@
   </a:objectDefaults>
   <a:extraClrSchemeLst/>
 </a:theme>
-</file>
-
-<file path=ppt/theme/theme2.xml><?xml version="1.0" encoding="utf-8"?>
-<a:theme xmlns:a="http://schemas.openxmlformats.org/drawingml/2006/main" name="Office Theme">
-  <a:themeElements>
-    <a:clrScheme name="Office">
-      <a:dk1>
-        <a:sysClr val="windowText" lastClr="000000"/>
-      </a:dk1>
-      <a:lt1>
-        <a:sysClr val="window" lastClr="FFFFFF"/>
-      </a:lt1>
-      <a:dk2>
-        <a:srgbClr val="1F497D"/>
-      </a:dk2>
-      <a:lt2>
-        <a:srgbClr val="EEECE1"/>
-      </a:lt2>
-      <a:accent1>
-        <a:srgbClr val="4F81BD"/>
-      </a:accent1>
-      <a:accent2>
-        <a:srgbClr val="C0504D"/>
-      </a:accent2>
-      <a:accent3>
-        <a:srgbClr val="9BBB59"/>
-      </a:accent3>
-      <a:accent4>
-        <a:srgbClr val="8064A2"/>
-      </a:accent4>
-      <a:accent5>
-        <a:srgbClr val="4BACC6"/>
-      </a:accent5>
-      <a:accent6>
-        <a:srgbClr val="F79646"/>
-      </a:accent6>
-      <a:hlink>
-        <a:srgbClr val="0000FF"/>
-      </a:hlink>
-      <a:folHlink>
-        <a:srgbClr val="800080"/>
-      </a:folHlink>
-    </a:clrScheme>
-    <a:fontScheme name="Office">
-      <a:majorFont>
-        <a:latin typeface="Calibri"/>
-        <a:ea typeface=""/>
-        <a:cs typeface=""/>
-        <a:font script="Jpan" typeface="ＭＳ Ｐゴシック"/>
-        <a:font script="Hang" typeface="맑은 고딕"/>
-        <a:font script="Hans" typeface="宋体"/>
-        <a:font script="Hant" typeface="新細明體"/>
-        <a:font script="Arab" typeface="Times New Roman"/>
-        <a:font script="Hebr" typeface="Times New Roman"/>
-        <a:font script="Thai" typeface="Angsana New"/>
-        <a:font script="Ethi" typeface="Nyala"/>
-        <a:font script="Beng" typeface="Vrinda"/>
-        <a:font script="Gujr" typeface="Shruti"/>
-        <a:font script="Khmr" typeface="MoolBoran"/>
-        <a:font script="Knda" typeface="Tunga"/>
-        <a:font script="Guru" typeface="Raavi"/>
-        <a:font script="Cans" typeface="Euphemia"/>
-        <a:font script="Cher" typeface="Plantagenet Cherokee"/>
-        <a:font script="Yiii" typeface="Microsoft Yi Baiti"/>
-        <a:font script="Tibt" typeface="Microsoft Himalaya"/>
-        <a:font script="Thaa" typeface="MV Boli"/>
-        <a:font script="Deva" typeface="Mangal"/>
-        <a:font script="Telu" typeface="Gautami"/>
-        <a:font script="Taml" typeface="Latha"/>
-        <a:font script="Syrc" typeface="Estrangelo Edessa"/>
-        <a:font script="Orya" typeface="Kalinga"/>
-        <a:font script="Mlym" typeface="Kartika"/>
-        <a:font script="Laoo" typeface="DokChampa"/>
-        <a:font script="Sinh" typeface="Iskoola Pota"/>
-        <a:font script="Mong" typeface="Mongolian Baiti"/>
-        <a:font script="Viet" typeface="Times New Roman"/>
-        <a:font script="Uigh" typeface="Microsoft Uighur"/>
-        <a:font script="Geor" typeface="Sylfaen"/>
-      </a:majorFont>
-      <a:minorFont>
-        <a:latin typeface="Calibri"/>
-        <a:ea typeface=""/>
-        <a:cs typeface=""/>
-        <a:font script="Jpan" typeface="ＭＳ Ｐゴシック"/>
-        <a:font script="Hang" typeface="맑은 고딕"/>
-        <a:font script="Hans" typeface="宋体"/>
-        <a:font script="Hant" typeface="新細明體"/>
-        <a:font script="Arab" typeface="Arial"/>
-        <a:font script="Hebr" typeface="Arial"/>
-        <a:font script="Thai" typeface="Cordia New"/>
-        <a:font script="Ethi" typeface="Nyala"/>
-        <a:font script="Beng" typeface="Vrinda"/>
-        <a:font script="Gujr" typeface="Shruti"/>
-        <a:font script="Khmr" typeface="DaunPenh"/>
-        <a:font script="Knda" typeface="Tunga"/>
-        <a:font script="Guru" typeface="Raavi"/>
-        <a:font script="Cans" typeface="Euphemia"/>
-        <a:font script="Cher" typeface="Plantagenet Cherokee"/>
-        <a:font script="Yiii" typeface="Microsoft Yi Baiti"/>
-        <a:font script="Tibt" typeface="Microsoft Himalaya"/>
-        <a:font script="Thaa" typeface="MV Boli"/>
-        <a:font script="Deva" typeface="Mangal"/>
-        <a:font script="Telu" typeface="Gautami"/>
-        <a:font script="Taml" typeface="Latha"/>
-        <a:font script="Syrc" typeface="Estrangelo Edessa"/>
-        <a:font script="Orya" typeface="Kalinga"/>
-        <a:font script="Mlym" typeface="Kartika"/>
-        <a:font script="Laoo" typeface="DokChampa"/>
-        <a:font script="Sinh" typeface="Iskoola Pota"/>
-        <a:font script="Mong" typeface="Mongolian Baiti"/>
-        <a:font script="Viet" typeface="Arial"/>
-        <a:font script="Uigh" typeface="Microsoft Uighur"/>
-        <a:font script="Geor" typeface="Sylfaen"/>
-      </a:minorFont>
-    </a:fontScheme>
-    <a:fmtScheme name="Office">
-      <a:fillStyleLst>
-        <a:solidFill>
-          <a:schemeClr val="phClr"/>
-        </a:solidFill>
-        <a:gradFill rotWithShape="1">
-          <a:gsLst>
-            <a:gs pos="0">
-              <a:schemeClr val="phClr">
-                <a:tint val="50000"/>
-                <a:satMod val="300000"/>
-              </a:schemeClr>
-            </a:gs>
-            <a:gs pos="35000">
-              <a:schemeClr val="phClr">
-                <a:tint val="37000"/>
-                <a:satMod val="300000"/>
-              </a:schemeClr>
-            </a:gs>
-            <a:gs pos="100000">
-              <a:schemeClr val="phClr">
-                <a:tint val="15000"/>
-                <a:satMod val="350000"/>
-              </a:schemeClr>
-            </a:gs>
-          </a:gsLst>
-          <a:lin ang="16200000" scaled="1"/>
-        </a:gradFill>
-        <a:gradFill rotWithShape="1">
-          <a:gsLst>
-            <a:gs pos="0">
-              <a:schemeClr val="phClr">
-                <a:tint val="100000"/>
-                <a:shade val="100000"/>
-                <a:satMod val="130000"/>
-              </a:schemeClr>
-            </a:gs>
-            <a:gs pos="100000">
-              <a:schemeClr val="phClr">
-                <a:tint val="50000"/>
-                <a:shade val="100000"/>
-                <a:satMod val="350000"/>
-              </a:schemeClr>
-            </a:gs>
-          </a:gsLst>
-          <a:lin ang="16200000" scaled="0"/>
-        </a:gradFill>
-      </a:fillStyleLst>
-      <a:lnStyleLst>
-        <a:ln w="9525" cap="flat" cmpd="sng" algn="ctr">
-          <a:solidFill>
-            <a:schemeClr val="phClr">
-              <a:shade val="95000"/>
-              <a:satMod val="105000"/>
-            </a:schemeClr>
-          </a:solidFill>
-          <a:prstDash val="solid"/>
-        </a:ln>
-        <a:ln w="25400" cap="flat" cmpd="sng" algn="ctr">
-          <a:solidFill>
-            <a:schemeClr val="phClr"/>
-          </a:solidFill>
-          <a:prstDash val="solid"/>
-        </a:ln>
-        <a:ln w="38100" cap="flat" cmpd="sng" algn="ctr">
-          <a:solidFill>
-            <a:schemeClr val="phClr"/>
-          </a:solidFill>
-          <a:prstDash val="solid"/>
-        </a:ln>
-      </a:lnStyleLst>
-      <a:effectStyleLst>
-        <a:effectStyle>
-          <a:effectLst>
-            <a:outerShdw blurRad="40000" dist="20000" dir="5400000" rotWithShape="0">
-              <a:srgbClr val="000000">
-                <a:alpha val="38000"/>
-              </a:srgbClr>
-            </a:outerShdw>
-          </a:effectLst>
-        </a:effectStyle>
-        <a:effectStyle>
-          <a:effectLst>
-            <a:outerShdw blurRad="40000" dist="23000" dir="5400000" rotWithShape="0">
-              <a:srgbClr val="000000">
-                <a:alpha val="35000"/>
-              </a:srgbClr>
-            </a:outerShdw>
-          </a:effectLst>
-        </a:effectStyle>
-        <a:effectStyle>
-          <a:effectLst>
-            <a:outerShdw blurRad="40000" dist="23000" dir="5400000" rotWithShape="0">
-              <a:srgbClr val="000000">
-                <a:alpha val="35000"/>
-              </a:srgbClr>
-            </a:outerShdw>
-          </a:effectLst>
-          <a:scene3d>
-            <a:camera prst="orthographicFront">
-              <a:rot lat="0" lon="0" rev="0"/>
-            </a:camera>
-            <a:lightRig rig="threePt" dir="t">
-              <a:rot lat="0" lon="0" rev="1200000"/>
-            </a:lightRig>
-          </a:scene3d>
-          <a:sp3d>
-            <a:bevelT w="63500" h="25400"/>
-          </a:sp3d>
-        </a:effectStyle>
-      </a:effectStyleLst>
-      <a:bgFillStyleLst>
-        <a:solidFill>
-          <a:schemeClr val="phClr"/>
-        </a:solidFill>
-        <a:gradFill rotWithShape="1">
-          <a:gsLst>
-            <a:gs pos="0">
-              <a:schemeClr val="phClr">
-                <a:tint val="40000"/>
-                <a:satMod val="350000"/>
-              </a:schemeClr>
-            </a:gs>
-            <a:gs pos="40000">
-              <a:schemeClr val="phClr">
-                <a:tint val="45000"/>
-                <a:shade val="99000"/>
-                <a:satMod val="350000"/>
-              </a:schemeClr>
-            </a:gs>
-            <a:gs pos="100000">
-              <a:schemeClr val="phClr">
-                <a:shade val="20000"/>
-                <a:satMod val="255000"/>
-              </a:schemeClr>
-            </a:gs>
-          </a:gsLst>
-          <a:path path="circle">
-            <a:fillToRect l="50000" t="-80000" r="50000" b="180000"/>
-          </a:path>
-        </a:gradFill>
-        <a:gradFill rotWithShape="1">
-          <a:gsLst>
-            <a:gs pos="0">
-              <a:schemeClr val="phClr">
-                <a:tint val="80000"/>
-                <a:satMod val="300000"/>
-              </a:schemeClr>
-            </a:gs>
-            <a:gs pos="100000">
-              <a:schemeClr val="phClr">
-                <a:shade val="30000"/>
-                <a:satMod val="200000"/>
-              </a:schemeClr>
-            </a:gs>
-          </a:gsLst>
-          <a:path path="circle">
-            <a:fillToRect l="50000" t="50000" r="50000" b="50000"/>
-          </a:path>
-        </a:gradFill>
-      </a:bgFillStyleLst>
-    </a:fmtScheme>
-  </a:themeElements>
-  <a:objectDefaults>
-    <a:spDef>
-      <a:spPr/>
-      <a:bodyPr/>
-      <a:lstStyle/>
-      <a:style>
-        <a:lnRef idx="1">
-          <a:schemeClr val="accent1"/>
-        </a:lnRef>
-        <a:fillRef idx="3">
-          <a:schemeClr val="accent1"/>
-        </a:fillRef>
-        <a:effectRef idx="2">
-          <a:schemeClr val="accent1"/>
-        </a:effectRef>
-        <a:fontRef idx="minor">
-          <a:schemeClr val="lt1"/>
-        </a:fontRef>
-      </a:style>
-    </a:spDef>
-    <a:lnDef>
-      <a:spPr/>
-      <a:bodyPr/>
-      <a:lstStyle/>
-      <a:style>
-        <a:lnRef idx="2">
-          <a:schemeClr val="accent1"/>
-        </a:lnRef>
-        <a:fillRef idx="0">
-          <a:schemeClr val="accent1"/>
-        </a:fillRef>
-        <a:effectRef idx="1">
-          <a:schemeClr val="accent1"/>
-        </a:effectRef>
-        <a:fontRef idx="minor">
-          <a:schemeClr val="tx1"/>
-        </a:fontRef>
-      </a:style>
-    </a:lnDef>
-  </a:objectDefaults>
-  <a:extraClrSchemeLst/>
-</a:theme>
 </file>